--- a/docs/slides/kor/20261020_Meeting_intro_ko.pptx
+++ b/docs/slides/kor/20261020_Meeting_intro_ko.pptx
@@ -9,6 +9,8 @@
     <p:sldId id="257" r:id="rId9"/>
     <p:sldId id="258" r:id="rId10"/>
     <p:sldId id="259" r:id="rId11"/>
+    <p:sldId id="260" r:id="rId12"/>
+    <p:sldId id="261" r:id="rId13"/>
   </p:sldIdLst>
   <p:sldSz cx="12191999" cy="6858000" type="screen4x3"/>
   <p:notesSz cx="6858000" cy="9144000"/>
@@ -505,7 +507,7 @@
           <a:lstStyle/>
           <a:p>
             <a:r>
-              <a:t>Problem before dataset. A labelled flow is a tabular network record with an assigned class. Labels are assumed available after investigation; their acquisition is not evaluated here. XGBoost full refitting is the chosen comparator, not a claim that all tree updates require retraining. Class arrival is not a claim of zero-label novelty detection or cross-network robustness.</a:t>
+              <a:t>IDS is a classifier of flow records, not a name for the dataset. Begin with the operational gap: only some attack labels are available initially; investigation later supplies a few examples of another attack. The research question is how much newly labelled data and update computation each method needs, while tracking existing-class quality. Do not infer a universal need for retraining from a weekday collection schedule. Full cumulative XGB refitting is our chosen baseline. This experiment evaluates adaptation after labelling, not unknown-attack detection before labelling or generalization across networks.</a:t>
             </a:r>
           </a:p>
         </p:txBody>
@@ -575,7 +577,7 @@
           <a:lstStyle/>
           <a:p>
             <a:r>
-              <a:t>https://arxiv.org/html/2605.13986v1 Sections 1, 2.2, 2.5. Synthetic tasks refer to model pretraining, not the IDS evaluation data. Context is a supplied labelled dataset, not information stored inside fixed pretrained weights. Fine-tuning is optional weight optimization and is not used in the supplied result pages. FT interface: https://github.com/PriorLabs/TabPFN/blob/main/src/tabpfn/finetuning/finetuned_base.py</a:t>
+              <a:t>https://arxiv.org/html/2605.13986v1 Sections 1, 2.2, 2.5. Synthetic tasks concern pretraining, not our IDS evaluation rows. Context lives outside the weights. Updating a context does not write its rows into the model parameters. IDS fine-tuning would optimize the model using losses on labelled queries, but the displayed no-FT comparisons do not do this.</a:t>
             </a:r>
           </a:p>
         </p:txBody>
@@ -645,7 +647,7 @@
           <a:lstStyle/>
           <a:p>
             <a:r>
-              <a:t>https://arxiv.org/html/2605.13986v1 Figure 5, Section 2.1. Original figure on the left, without a visible caption per user instruction. Steps 1–3 follow cell embedding, column-wise feature embedding, and row-wise feature aggregation. The labelled context is external input; the diagram does not depict IDS weight fine-tuning.</a:t>
+              <a:t>https://arxiv.org/html/2605.13986v1 Figure 5, Section 2.1. Original model diagram without a visible caption as requested. These are inference representations; they are not a sequence of IDS weight-training stages.</a:t>
             </a:r>
           </a:p>
         </p:txBody>
@@ -715,7 +717,147 @@
           <a:lstStyle/>
           <a:p>
             <a:r>
-              <a:t>https://arxiv.org/html/2605.13986v1 Sections 2.2 and 2.4.2. The decoder averages one-hot context labels with learned attention weights. Cached prediction can reuse prepared context states; changing context may require recomputation. No claim that a context update is free, or universally faster than XGBoost refitting.</a:t>
+              <a:t>https://arxiv.org/html/2605.13986v1 Sections 2.2 and 2.4.2. The many-class decoder uses attention-weighted context labels. Updating the context may require rebuilding preprocessing and cache states. Frozen weights do not imply a free update.</a:t>
+            </a:r>
+          </a:p>
+        </p:txBody>
+      </p:sp>
+      <p:sp>
+        <p:nvSpPr>
+          <p:cNvPr id="4" name="Slide Number Placeholder 3"/>
+          <p:cNvSpPr>
+            <a:spLocks noGrp="1"/>
+          </p:cNvSpPr>
+          <p:nvPr>
+            <p:ph type="sldNum" idx="5" sz="quarter"/>
+          </p:nvPr>
+        </p:nvSpPr>
+        <p:spPr/>
+      </p:sp>
+    </p:spTree>
+  </p:cSld>
+  <p:clrMapOvr>
+    <a:masterClrMapping/>
+  </p:clrMapOvr>
+</p:notes>
+</file>
+
+<file path=ppt/notesSlides/notesSlide5.xml><?xml version="1.0" encoding="utf-8"?>
+<p:notes xmlns:a="http://schemas.openxmlformats.org/drawingml/2006/main" xmlns:p="http://schemas.openxmlformats.org/presentationml/2006/main" xmlns:r="http://schemas.openxmlformats.org/officeDocument/2006/relationships">
+  <p:cSld>
+    <p:spTree>
+      <p:nvGrpSpPr>
+        <p:cNvPr id="1" name=""/>
+        <p:cNvGrpSpPr/>
+        <p:nvPr/>
+      </p:nvGrpSpPr>
+      <p:grpSpPr>
+        <a:xfrm>
+          <a:off x="0" y="0"/>
+          <a:ext cx="0" cy="0"/>
+          <a:chOff x="0" y="0"/>
+          <a:chExt cx="0" cy="0"/>
+        </a:xfrm>
+      </p:grpSpPr>
+      <p:sp>
+        <p:nvSpPr>
+          <p:cNvPr id="2" name="Slide Image Placeholder 1"/>
+          <p:cNvSpPr>
+            <a:spLocks noGrp="1"/>
+          </p:cNvSpPr>
+          <p:nvPr>
+            <p:ph type="sldImg" idx="2"/>
+          </p:nvPr>
+        </p:nvSpPr>
+        <p:spPr/>
+      </p:sp>
+      <p:sp>
+        <p:nvSpPr>
+          <p:cNvPr id="3" name="Notes Placeholder 2"/>
+          <p:cNvSpPr>
+            <a:spLocks noGrp="1"/>
+          </p:cNvSpPr>
+          <p:nvPr>
+            <p:ph type="body" idx="3" sz="quarter"/>
+          </p:nvPr>
+        </p:nvSpPr>
+        <p:spPr/>
+        <p:txBody>
+          <a:bodyPr/>
+          <a:lstStyle/>
+          <a:p>
+            <a:r>
+              <a:t>Data trace: EXP77 data manifests -&gt; EXP71 cumulative run data -&gt; conflict-free fixed-split manifests. The stored suite may contain multiple benchmark keys, but the experiment selects one dataset independently; no CIC attacks are injected into ToN or vice versa. The 100-row example explains the old setting; the next page explicitly states it has no operational or optimality justification. Original row IDs are disjoint across train/test, but duplicate feature vectors can exist; this is not a claim of feature-disjoint holdout. Stages control which labels become available and how many; the researcher does not synthesize the network-feature rows.</a:t>
+            </a:r>
+          </a:p>
+        </p:txBody>
+      </p:sp>
+      <p:sp>
+        <p:nvSpPr>
+          <p:cNvPr id="4" name="Slide Number Placeholder 3"/>
+          <p:cNvSpPr>
+            <a:spLocks noGrp="1"/>
+          </p:cNvSpPr>
+          <p:nvPr>
+            <p:ph type="sldNum" idx="5" sz="quarter"/>
+          </p:nvPr>
+        </p:nvSpPr>
+        <p:spPr/>
+      </p:sp>
+    </p:spTree>
+  </p:cSld>
+  <p:clrMapOvr>
+    <a:masterClrMapping/>
+  </p:clrMapOvr>
+</p:notes>
+</file>
+
+<file path=ppt/notesSlides/notesSlide6.xml><?xml version="1.0" encoding="utf-8"?>
+<p:notes xmlns:a="http://schemas.openxmlformats.org/drawingml/2006/main" xmlns:p="http://schemas.openxmlformats.org/presentationml/2006/main" xmlns:r="http://schemas.openxmlformats.org/officeDocument/2006/relationships">
+  <p:cSld>
+    <p:spTree>
+      <p:nvGrpSpPr>
+        <p:cNvPr id="1" name=""/>
+        <p:cNvGrpSpPr/>
+        <p:nvPr/>
+      </p:nvGrpSpPr>
+      <p:grpSpPr>
+        <a:xfrm>
+          <a:off x="0" y="0"/>
+          <a:ext cx="0" cy="0"/>
+          <a:chOff x="0" y="0"/>
+          <a:chExt cx="0" cy="0"/>
+        </a:xfrm>
+      </p:grpSpPr>
+      <p:sp>
+        <p:nvSpPr>
+          <p:cNvPr id="2" name="Slide Image Placeholder 1"/>
+          <p:cNvSpPr>
+            <a:spLocks noGrp="1"/>
+          </p:cNvSpPr>
+          <p:nvPr>
+            <p:ph type="sldImg" idx="2"/>
+          </p:nvPr>
+        </p:nvSpPr>
+        <p:spPr/>
+      </p:sp>
+      <p:sp>
+        <p:nvSpPr>
+          <p:cNvPr id="3" name="Notes Placeholder 2"/>
+          <p:cNvSpPr>
+            <a:spLocks noGrp="1"/>
+          </p:cNvSpPr>
+          <p:nvPr>
+            <p:ph type="body" idx="3" sz="quarter"/>
+          </p:nvPr>
+        </p:nvSpPr>
+        <p:spPr/>
+        <p:txBody>
+          <a:bodyPr/>
+          <a:lstStyle/>
+          <a:p>
+            <a:r>
+              <a:t>Counts and class arrival order from EXP77/EXP71 manifests. Initial total 750+125+125=1000. The n rows are real labelled training examples, not daily attack frequencies or test counts. Both methods receive the same IDs. Cumulative final sizes: CIC 1000+4n, ToN 1000+7n. Old displayed results sweep n=10/20/50/100/200/400, and the old cost snapshot uses n=100. 100 is an illustrative setting, not a statistical midpoint, optimum, or measured operational frequency. The revised n=5/10/20/30/50 buffer plan is design-only and has no results yet.</a:t>
             </a:r>
           </a:p>
         </p:txBody>
@@ -3743,7 +3885,7 @@
           </a:bodyPr>
           <a:lstStyle/>
           <a:p>
-            <a:pPr>
+            <a:pPr algn="l">
               <a:lnSpc>
                 <a:spcPct val="114000"/>
               </a:lnSpc>
@@ -3763,7 +3905,7 @@
                 <a:ea typeface="Pretendard"/>
                 <a:cs typeface="Pretendard"/>
               </a:rPr>
-              <a:t>신규 공격 사례를 반영하는 IDS</a:t>
+              <a:t>소수 신규 공격 사례에 대응하는 IDS</a:t>
             </a:r>
           </a:p>
         </p:txBody>
@@ -3776,8 +3918,8 @@
         </p:nvSpPr>
         <p:spPr>
           <a:xfrm>
-            <a:off x="566928" y="1024128"/>
-            <a:ext cx="10972800" cy="475488"/>
+            <a:off x="566928" y="1005840"/>
+            <a:ext cx="10972800" cy="322280"/>
           </a:xfrm>
           <a:prstGeom prst="rect">
             <a:avLst/>
@@ -3790,19 +3932,19 @@
           </a:bodyPr>
           <a:lstStyle/>
           <a:p>
-            <a:pPr>
-              <a:lnSpc>
-                <a:spcPct val="114000"/>
-              </a:lnSpc>
-              <a:spcBef>
-                <a:spcPts val="0"/>
-              </a:spcBef>
-              <a:spcAft>
-                <a:spcPts val="0"/>
-              </a:spcAft>
-            </a:pPr>
-            <a:r>
-              <a:rPr sz="2200" b="0" lang="ko-KR">
+            <a:pPr algn="l">
+              <a:lnSpc>
+                <a:spcPct val="114000"/>
+              </a:lnSpc>
+              <a:spcBef>
+                <a:spcPts val="0"/>
+              </a:spcBef>
+              <a:spcAft>
+                <a:spcPts val="0"/>
+              </a:spcAft>
+            </a:pPr>
+            <a:r>
+              <a:rPr sz="2100" b="0" lang="ko-KR">
                 <a:solidFill>
                   <a:srgbClr val="20262E"/>
                 </a:solidFill>
@@ -3810,21 +3952,92 @@
                 <a:ea typeface="Pretendard"/>
                 <a:cs typeface="Pretendard"/>
               </a:rPr>
-              <a:t>IDS · 통신 기록의 특징을 이용한 정상·공격 유형 분류</a:t>
-            </a:r>
-          </a:p>
-        </p:txBody>
-      </p:sp>
-      <p:sp>
-        <p:nvSpPr>
-          <p:cNvPr id="4" name="Rectangle 3"/>
+              <a:t>침입 탐지 시스템(IDS) · 통신 기록의 특징으로 정상·공격 유형 분류</a:t>
+            </a:r>
+          </a:p>
+        </p:txBody>
+      </p:sp>
+      <p:sp>
+        <p:nvSpPr>
+          <p:cNvPr id="4" name="TextBox 3"/>
+          <p:cNvSpPr txBox="1"/>
+          <p:nvPr/>
+        </p:nvSpPr>
+        <p:spPr>
+          <a:xfrm>
+            <a:off x="566928" y="1572768"/>
+            <a:ext cx="10972800" cy="644560"/>
+          </a:xfrm>
+          <a:prstGeom prst="rect">
+            <a:avLst/>
+          </a:prstGeom>
+          <a:noFill/>
+        </p:spPr>
+        <p:txBody>
+          <a:bodyPr wrap="none" anchor="t" lIns="0" rIns="0" tIns="0" bIns="0">
+            <a:noAutofit/>
+          </a:bodyPr>
+          <a:lstStyle/>
+          <a:p>
+            <a:pPr algn="l">
+              <a:lnSpc>
+                <a:spcPct val="114000"/>
+              </a:lnSpc>
+              <a:spcBef>
+                <a:spcPts val="0"/>
+              </a:spcBef>
+              <a:spcAft>
+                <a:spcPts val="0"/>
+              </a:spcAft>
+            </a:pPr>
+            <a:r>
+              <a:rPr sz="2100" b="1" lang="ko-KR">
+                <a:solidFill>
+                  <a:srgbClr val="00306C"/>
+                </a:solidFill>
+                <a:latin typeface="Pretendard"/>
+                <a:ea typeface="Pretendard"/>
+                <a:cs typeface="Pretendard"/>
+              </a:rPr>
+              <a:t>처음 확보한 라벨에 없는 공격의 등장</a:t>
+            </a:r>
+          </a:p>
+          <a:p>
+            <a:pPr algn="l">
+              <a:lnSpc>
+                <a:spcPct val="114000"/>
+              </a:lnSpc>
+              <a:spcBef>
+                <a:spcPts val="0"/>
+              </a:spcBef>
+              <a:spcAft>
+                <a:spcPts val="0"/>
+              </a:spcAft>
+            </a:pPr>
+            <a:r>
+              <a:rPr sz="2100" b="1" lang="ko-KR">
+                <a:solidFill>
+                  <a:srgbClr val="00306C"/>
+                </a:solidFill>
+                <a:latin typeface="Pretendard"/>
+                <a:ea typeface="Pretendard"/>
+                <a:cs typeface="Pretendard"/>
+              </a:rPr>
+              <a:t>고정된 분류 점수만으로 파악하기 어려운 신규 사례 반영 능력</a:t>
+            </a:r>
+          </a:p>
+        </p:txBody>
+      </p:sp>
+      <p:sp>
+        <p:nvSpPr>
+          <p:cNvPr id="5" name="Rectangle 4"/>
           <p:cNvSpPr/>
           <p:nvPr/>
         </p:nvSpPr>
         <p:spPr>
           <a:xfrm>
-            <a:off x="566928" y="1810512"/>
-            <a:ext cx="3337560" cy="1600200"/>
+            <a:off x="566928" y="2596896"/>
+            <a:ext cx="3337560" cy="1444752"/>
           </a:xfrm>
           <a:prstGeom prst="rect">
             <a:avLst/>
@@ -3860,14 +4073,14 @@
       </p:sp>
       <p:sp>
         <p:nvSpPr>
-          <p:cNvPr id="5" name="TextBox 4"/>
+          <p:cNvPr id="6" name="TextBox 5"/>
           <p:cNvSpPr txBox="1"/>
           <p:nvPr/>
         </p:nvSpPr>
         <p:spPr>
           <a:xfrm>
-            <a:off x="749808" y="1965960"/>
-            <a:ext cx="2971800" cy="384048"/>
+            <a:off x="731520" y="2761488"/>
+            <a:ext cx="3008376" cy="322280"/>
           </a:xfrm>
           <a:prstGeom prst="rect">
             <a:avLst/>
@@ -3880,19 +4093,19 @@
           </a:bodyPr>
           <a:lstStyle/>
           <a:p>
-            <a:pPr>
-              <a:lnSpc>
-                <a:spcPct val="114000"/>
-              </a:lnSpc>
-              <a:spcBef>
-                <a:spcPts val="0"/>
-              </a:spcBef>
-              <a:spcAft>
-                <a:spcPts val="0"/>
-              </a:spcAft>
-            </a:pPr>
-            <a:r>
-              <a:rPr sz="2200" b="1" lang="ko-KR">
+            <a:pPr algn="l">
+              <a:lnSpc>
+                <a:spcPct val="114000"/>
+              </a:lnSpc>
+              <a:spcBef>
+                <a:spcPts val="0"/>
+              </a:spcBef>
+              <a:spcAft>
+                <a:spcPts val="0"/>
+              </a:spcAft>
+            </a:pPr>
+            <a:r>
+              <a:rPr sz="2100" b="1" lang="ko-KR">
                 <a:solidFill>
                   <a:srgbClr val="007BC6"/>
                 </a:solidFill>
@@ -3900,21 +4113,21 @@
                 <a:ea typeface="Pretendard"/>
                 <a:cs typeface="Pretendard"/>
               </a:rPr>
-              <a:t>초기 운영</a:t>
-            </a:r>
-          </a:p>
-        </p:txBody>
-      </p:sp>
-      <p:sp>
-        <p:nvSpPr>
-          <p:cNvPr id="6" name="TextBox 5"/>
+              <a:t>운영 시작</a:t>
+            </a:r>
+          </a:p>
+        </p:txBody>
+      </p:sp>
+      <p:sp>
+        <p:nvSpPr>
+          <p:cNvPr id="7" name="TextBox 6"/>
           <p:cNvSpPr txBox="1"/>
           <p:nvPr/>
         </p:nvSpPr>
         <p:spPr>
           <a:xfrm>
-            <a:off x="749808" y="2560320"/>
-            <a:ext cx="2980944" cy="621792"/>
+            <a:off x="731520" y="3319272"/>
+            <a:ext cx="3008376" cy="521787"/>
           </a:xfrm>
           <a:prstGeom prst="rect">
             <a:avLst/>
@@ -3927,19 +4140,19 @@
           </a:bodyPr>
           <a:lstStyle/>
           <a:p>
-            <a:pPr>
-              <a:lnSpc>
-                <a:spcPct val="114000"/>
-              </a:lnSpc>
-              <a:spcBef>
-                <a:spcPts val="0"/>
-              </a:spcBef>
-              <a:spcAft>
-                <a:spcPts val="0"/>
-              </a:spcAft>
-            </a:pPr>
-            <a:r>
-              <a:rPr sz="1900" b="0" lang="ko-KR">
+            <a:pPr algn="l">
+              <a:lnSpc>
+                <a:spcPct val="114000"/>
+              </a:lnSpc>
+              <a:spcBef>
+                <a:spcPts val="0"/>
+              </a:spcBef>
+              <a:spcAft>
+                <a:spcPts val="0"/>
+              </a:spcAft>
+            </a:pPr>
+            <a:r>
+              <a:rPr sz="1700" b="0" lang="ko-KR">
                 <a:solidFill>
                   <a:srgbClr val="20262E"/>
                 </a:solidFill>
@@ -3947,23 +4160,23 @@
                 <a:ea typeface="Pretendard"/>
                 <a:cs typeface="Pretendard"/>
               </a:rPr>
-              <a:t>정상 + 알려진 공격의</a:t>
-            </a:r>
-          </a:p>
-          <a:p>
-            <a:pPr>
-              <a:lnSpc>
-                <a:spcPct val="114000"/>
-              </a:lnSpc>
-              <a:spcBef>
-                <a:spcPts val="0"/>
-              </a:spcBef>
-              <a:spcAft>
-                <a:spcPts val="0"/>
-              </a:spcAft>
-            </a:pPr>
-            <a:r>
-              <a:rPr sz="1900" b="0" lang="ko-KR">
+              <a:t>정상 + 공격 A·B</a:t>
+            </a:r>
+          </a:p>
+          <a:p>
+            <a:pPr algn="l">
+              <a:lnSpc>
+                <a:spcPct val="114000"/>
+              </a:lnSpc>
+              <a:spcBef>
+                <a:spcPts val="0"/>
+              </a:spcBef>
+              <a:spcAft>
+                <a:spcPts val="0"/>
+              </a:spcAft>
+            </a:pPr>
+            <a:r>
+              <a:rPr sz="1700" b="0" lang="ko-KR">
                 <a:solidFill>
                   <a:srgbClr val="20262E"/>
                 </a:solidFill>
@@ -3971,20 +4184,20 @@
                 <a:ea typeface="Pretendard"/>
                 <a:cs typeface="Pretendard"/>
               </a:rPr>
-              <a:t>라벨 사례 확보</a:t>
-            </a:r>
-          </a:p>
-        </p:txBody>
-      </p:sp>
-      <p:sp>
-        <p:nvSpPr>
-          <p:cNvPr id="7" name="Right Arrow 6"/>
+              <a:t>일부 유형의 라벨만 확보</a:t>
+            </a:r>
+          </a:p>
+        </p:txBody>
+      </p:sp>
+      <p:sp>
+        <p:nvSpPr>
+          <p:cNvPr id="8" name="Right Arrow 7"/>
           <p:cNvSpPr/>
           <p:nvPr/>
         </p:nvSpPr>
         <p:spPr>
           <a:xfrm>
-            <a:off x="4050791" y="2468880"/>
+            <a:off x="4050791" y="3182112"/>
             <a:ext cx="320040" cy="256032"/>
           </a:xfrm>
           <a:prstGeom prst="rightArrow">
@@ -4021,14 +4234,14 @@
       </p:sp>
       <p:sp>
         <p:nvSpPr>
-          <p:cNvPr id="8" name="Rectangle 7"/>
+          <p:cNvPr id="9" name="Rectangle 8"/>
           <p:cNvSpPr/>
           <p:nvPr/>
         </p:nvSpPr>
         <p:spPr>
           <a:xfrm>
-            <a:off x="4425696" y="1810512"/>
-            <a:ext cx="3337560" cy="1600200"/>
+            <a:off x="4425696" y="2596896"/>
+            <a:ext cx="3337560" cy="1444752"/>
           </a:xfrm>
           <a:prstGeom prst="rect">
             <a:avLst/>
@@ -4064,14 +4277,14 @@
       </p:sp>
       <p:sp>
         <p:nvSpPr>
-          <p:cNvPr id="9" name="TextBox 8"/>
+          <p:cNvPr id="10" name="TextBox 9"/>
           <p:cNvSpPr txBox="1"/>
           <p:nvPr/>
         </p:nvSpPr>
         <p:spPr>
           <a:xfrm>
-            <a:off x="4608576" y="1965960"/>
-            <a:ext cx="2971800" cy="384048"/>
+            <a:off x="4590288" y="2761488"/>
+            <a:ext cx="3008376" cy="322280"/>
           </a:xfrm>
           <a:prstGeom prst="rect">
             <a:avLst/>
@@ -4084,19 +4297,19 @@
           </a:bodyPr>
           <a:lstStyle/>
           <a:p>
-            <a:pPr>
-              <a:lnSpc>
-                <a:spcPct val="114000"/>
-              </a:lnSpc>
-              <a:spcBef>
-                <a:spcPts val="0"/>
-              </a:spcBef>
-              <a:spcAft>
-                <a:spcPts val="0"/>
-              </a:spcAft>
-            </a:pPr>
-            <a:r>
-              <a:rPr sz="2200" b="1" lang="ko-KR">
+            <a:pPr algn="l">
+              <a:lnSpc>
+                <a:spcPct val="114000"/>
+              </a:lnSpc>
+              <a:spcBef>
+                <a:spcPts val="0"/>
+              </a:spcBef>
+              <a:spcAft>
+                <a:spcPts val="0"/>
+              </a:spcAft>
+            </a:pPr>
+            <a:r>
+              <a:rPr sz="2100" b="1" lang="ko-KR">
                 <a:solidFill>
                   <a:srgbClr val="007BC6"/>
                 </a:solidFill>
@@ -4104,21 +4317,21 @@
                 <a:ea typeface="Pretendard"/>
                 <a:cs typeface="Pretendard"/>
               </a:rPr>
-              <a:t>새 공격 사례 확보</a:t>
-            </a:r>
-          </a:p>
-        </p:txBody>
-      </p:sp>
-      <p:sp>
-        <p:nvSpPr>
-          <p:cNvPr id="10" name="TextBox 9"/>
+              <a:t>추가 조사 이후</a:t>
+            </a:r>
+          </a:p>
+        </p:txBody>
+      </p:sp>
+      <p:sp>
+        <p:nvSpPr>
+          <p:cNvPr id="11" name="TextBox 10"/>
           <p:cNvSpPr txBox="1"/>
           <p:nvPr/>
         </p:nvSpPr>
         <p:spPr>
           <a:xfrm>
-            <a:off x="4608576" y="2560320"/>
-            <a:ext cx="2980944" cy="621792"/>
+            <a:off x="4590288" y="3319272"/>
+            <a:ext cx="3008376" cy="521787"/>
           </a:xfrm>
           <a:prstGeom prst="rect">
             <a:avLst/>
@@ -4131,19 +4344,19 @@
           </a:bodyPr>
           <a:lstStyle/>
           <a:p>
-            <a:pPr>
-              <a:lnSpc>
-                <a:spcPct val="114000"/>
-              </a:lnSpc>
-              <a:spcBef>
-                <a:spcPts val="0"/>
-              </a:spcBef>
-              <a:spcAft>
-                <a:spcPts val="0"/>
-              </a:spcAft>
-            </a:pPr>
-            <a:r>
-              <a:rPr sz="1900" b="0" lang="ko-KR">
+            <a:pPr algn="l">
+              <a:lnSpc>
+                <a:spcPct val="114000"/>
+              </a:lnSpc>
+              <a:spcBef>
+                <a:spcPts val="0"/>
+              </a:spcBef>
+              <a:spcAft>
+                <a:spcPts val="0"/>
+              </a:spcAft>
+            </a:pPr>
+            <a:r>
+              <a:rPr sz="1700" b="0" lang="ko-KR">
                 <a:solidFill>
                   <a:srgbClr val="20262E"/>
                 </a:solidFill>
@@ -4151,23 +4364,23 @@
                 <a:ea typeface="Pretendard"/>
                 <a:cs typeface="Pretendard"/>
               </a:rPr>
-              <a:t>처음 접한 공격 유형의</a:t>
-            </a:r>
-          </a:p>
-          <a:p>
-            <a:pPr>
-              <a:lnSpc>
-                <a:spcPct val="114000"/>
-              </a:lnSpc>
-              <a:spcBef>
-                <a:spcPts val="0"/>
-              </a:spcBef>
-              <a:spcAft>
-                <a:spcPts val="0"/>
-              </a:spcAft>
-            </a:pPr>
-            <a:r>
-              <a:rPr sz="1900" b="0" lang="ko-KR">
+              <a:t>새 공격 C의 라벨 소량 확보</a:t>
+            </a:r>
+          </a:p>
+          <a:p>
+            <a:pPr algn="l">
+              <a:lnSpc>
+                <a:spcPct val="114000"/>
+              </a:lnSpc>
+              <a:spcBef>
+                <a:spcPts val="0"/>
+              </a:spcBef>
+              <a:spcAft>
+                <a:spcPts val="0"/>
+              </a:spcAft>
+            </a:pPr>
+            <a:r>
+              <a:rPr sz="1700" b="0" lang="ko-KR">
                 <a:solidFill>
                   <a:srgbClr val="20262E"/>
                 </a:solidFill>
@@ -4175,20 +4388,20 @@
                 <a:ea typeface="Pretendard"/>
                 <a:cs typeface="Pretendard"/>
               </a:rPr>
-              <a:t>소수 라벨 사례 확보</a:t>
-            </a:r>
-          </a:p>
-        </p:txBody>
-      </p:sp>
-      <p:sp>
-        <p:nvSpPr>
-          <p:cNvPr id="11" name="Right Arrow 10"/>
+              <a:t>기존 탐지기에 반영할 필요</a:t>
+            </a:r>
+          </a:p>
+        </p:txBody>
+      </p:sp>
+      <p:sp>
+        <p:nvSpPr>
+          <p:cNvPr id="12" name="Right Arrow 11"/>
           <p:cNvSpPr/>
           <p:nvPr/>
         </p:nvSpPr>
         <p:spPr>
           <a:xfrm>
-            <a:off x="7909560" y="2468880"/>
+            <a:off x="7909560" y="3182112"/>
             <a:ext cx="320040" cy="256032"/>
           </a:xfrm>
           <a:prstGeom prst="rightArrow">
@@ -4225,14 +4438,14 @@
       </p:sp>
       <p:sp>
         <p:nvSpPr>
-          <p:cNvPr id="12" name="Rectangle 11"/>
+          <p:cNvPr id="13" name="Rectangle 12"/>
           <p:cNvSpPr/>
           <p:nvPr/>
         </p:nvSpPr>
         <p:spPr>
           <a:xfrm>
-            <a:off x="8284463" y="1810512"/>
-            <a:ext cx="3337560" cy="1600200"/>
+            <a:off x="8284463" y="2596896"/>
+            <a:ext cx="3337560" cy="1444752"/>
           </a:xfrm>
           <a:prstGeom prst="rect">
             <a:avLst/>
@@ -4268,14 +4481,14 @@
       </p:sp>
       <p:sp>
         <p:nvSpPr>
-          <p:cNvPr id="13" name="TextBox 12"/>
+          <p:cNvPr id="14" name="TextBox 13"/>
           <p:cNvSpPr txBox="1"/>
           <p:nvPr/>
         </p:nvSpPr>
         <p:spPr>
           <a:xfrm>
-            <a:off x="8467343" y="1965960"/>
-            <a:ext cx="2971800" cy="384048"/>
+            <a:off x="8449055" y="2761488"/>
+            <a:ext cx="3008376" cy="322280"/>
           </a:xfrm>
           <a:prstGeom prst="rect">
             <a:avLst/>
@@ -4288,19 +4501,19 @@
           </a:bodyPr>
           <a:lstStyle/>
           <a:p>
-            <a:pPr>
-              <a:lnSpc>
-                <a:spcPct val="114000"/>
-              </a:lnSpc>
-              <a:spcBef>
-                <a:spcPts val="0"/>
-              </a:spcBef>
-              <a:spcAft>
-                <a:spcPts val="0"/>
-              </a:spcAft>
-            </a:pPr>
-            <a:r>
-              <a:rPr sz="2200" b="1" lang="ko-KR">
+            <a:pPr algn="l">
+              <a:lnSpc>
+                <a:spcPct val="114000"/>
+              </a:lnSpc>
+              <a:spcBef>
+                <a:spcPts val="0"/>
+              </a:spcBef>
+              <a:spcAft>
+                <a:spcPts val="0"/>
+              </a:spcAft>
+            </a:pPr>
+            <a:r>
+              <a:rPr sz="2100" b="1" lang="ko-KR">
                 <a:solidFill>
                   <a:srgbClr val="007BC6"/>
                 </a:solidFill>
@@ -4308,21 +4521,21 @@
                 <a:ea typeface="Pretendard"/>
                 <a:cs typeface="Pretendard"/>
               </a:rPr>
-              <a:t>탐지기 갱신</a:t>
-            </a:r>
-          </a:p>
-        </p:txBody>
-      </p:sp>
-      <p:sp>
-        <p:nvSpPr>
-          <p:cNvPr id="14" name="TextBox 13"/>
+              <a:t>갱신 후 확인</a:t>
+            </a:r>
+          </a:p>
+        </p:txBody>
+      </p:sp>
+      <p:sp>
+        <p:nvSpPr>
+          <p:cNvPr id="15" name="TextBox 14"/>
           <p:cNvSpPr txBox="1"/>
           <p:nvPr/>
         </p:nvSpPr>
         <p:spPr>
           <a:xfrm>
-            <a:off x="8467343" y="2560320"/>
-            <a:ext cx="2980944" cy="621792"/>
+            <a:off x="8449055" y="3319272"/>
+            <a:ext cx="3008376" cy="521787"/>
           </a:xfrm>
           <a:prstGeom prst="rect">
             <a:avLst/>
@@ -4335,19 +4548,19 @@
           </a:bodyPr>
           <a:lstStyle/>
           <a:p>
-            <a:pPr>
-              <a:lnSpc>
-                <a:spcPct val="114000"/>
-              </a:lnSpc>
-              <a:spcBef>
-                <a:spcPts val="0"/>
-              </a:spcBef>
-              <a:spcAft>
-                <a:spcPts val="0"/>
-              </a:spcAft>
-            </a:pPr>
-            <a:r>
-              <a:rPr sz="1900" b="0" lang="ko-KR">
+            <a:pPr algn="l">
+              <a:lnSpc>
+                <a:spcPct val="114000"/>
+              </a:lnSpc>
+              <a:spcBef>
+                <a:spcPts val="0"/>
+              </a:spcBef>
+              <a:spcAft>
+                <a:spcPts val="0"/>
+              </a:spcAft>
+            </a:pPr>
+            <a:r>
+              <a:rPr sz="1700" b="0" lang="ko-KR">
                 <a:solidFill>
                   <a:srgbClr val="20262E"/>
                 </a:solidFill>
@@ -4355,23 +4568,23 @@
                 <a:ea typeface="Pretendard"/>
                 <a:cs typeface="Pretendard"/>
               </a:rPr>
-              <a:t>새 공격 반영 +</a:t>
-            </a:r>
-          </a:p>
-          <a:p>
-            <a:pPr>
-              <a:lnSpc>
-                <a:spcPct val="114000"/>
-              </a:lnSpc>
-              <a:spcBef>
-                <a:spcPts val="0"/>
-              </a:spcBef>
-              <a:spcAft>
-                <a:spcPts val="0"/>
-              </a:spcAft>
-            </a:pPr>
-            <a:r>
-              <a:rPr sz="1900" b="0" lang="ko-KR">
+              <a:t>C 탐지 품질과 갱신 비용</a:t>
+            </a:r>
+          </a:p>
+          <a:p>
+            <a:pPr algn="l">
+              <a:lnSpc>
+                <a:spcPct val="114000"/>
+              </a:lnSpc>
+              <a:spcBef>
+                <a:spcPts val="0"/>
+              </a:spcBef>
+              <a:spcAft>
+                <a:spcPts val="0"/>
+              </a:spcAft>
+            </a:pPr>
+            <a:r>
+              <a:rPr sz="1700" b="0" lang="ko-KR">
                 <a:solidFill>
                   <a:srgbClr val="20262E"/>
                 </a:solidFill>
@@ -4379,21 +4592,21 @@
                 <a:ea typeface="Pretendard"/>
                 <a:cs typeface="Pretendard"/>
               </a:rPr>
-              <a:t>기존 정상·공격 구분 유지</a:t>
-            </a:r>
-          </a:p>
-        </p:txBody>
-      </p:sp>
-      <p:sp>
-        <p:nvSpPr>
-          <p:cNvPr id="15" name="TextBox 14"/>
+              <a:t>기존 정상·A·B 구분 유지</a:t>
+            </a:r>
+          </a:p>
+        </p:txBody>
+      </p:sp>
+      <p:sp>
+        <p:nvSpPr>
+          <p:cNvPr id="16" name="TextBox 15"/>
           <p:cNvSpPr txBox="1"/>
           <p:nvPr/>
         </p:nvSpPr>
         <p:spPr>
           <a:xfrm>
-            <a:off x="594360" y="3849624"/>
-            <a:ext cx="1874519" cy="365760"/>
+            <a:off x="594360" y="4480560"/>
+            <a:ext cx="1691640" cy="337626"/>
           </a:xfrm>
           <a:prstGeom prst="rect">
             <a:avLst/>
@@ -4406,19 +4619,19 @@
           </a:bodyPr>
           <a:lstStyle/>
           <a:p>
-            <a:pPr>
-              <a:lnSpc>
-                <a:spcPct val="114000"/>
-              </a:lnSpc>
-              <a:spcBef>
-                <a:spcPts val="0"/>
-              </a:spcBef>
-              <a:spcAft>
-                <a:spcPts val="0"/>
-              </a:spcAft>
-            </a:pPr>
-            <a:r>
-              <a:rPr sz="2300" b="1" lang="ko-KR">
+            <a:pPr algn="l">
+              <a:lnSpc>
+                <a:spcPct val="114000"/>
+              </a:lnSpc>
+              <a:spcBef>
+                <a:spcPts val="0"/>
+              </a:spcBef>
+              <a:spcAft>
+                <a:spcPts val="0"/>
+              </a:spcAft>
+            </a:pPr>
+            <a:r>
+              <a:rPr sz="2200" b="1" lang="ko-KR">
                 <a:solidFill>
                   <a:srgbClr val="20262E"/>
                 </a:solidFill>
@@ -4433,14 +4646,14 @@
       </p:sp>
       <p:sp>
         <p:nvSpPr>
-          <p:cNvPr id="16" name="TextBox 15"/>
+          <p:cNvPr id="17" name="TextBox 16"/>
           <p:cNvSpPr txBox="1"/>
           <p:nvPr/>
         </p:nvSpPr>
         <p:spPr>
           <a:xfrm>
-            <a:off x="2606040" y="3849624"/>
-            <a:ext cx="8961120" cy="420624"/>
+            <a:off x="2423160" y="4480560"/>
+            <a:ext cx="9052560" cy="384048"/>
           </a:xfrm>
           <a:prstGeom prst="rect">
             <a:avLst/>
@@ -4453,19 +4666,19 @@
           </a:bodyPr>
           <a:lstStyle/>
           <a:p>
-            <a:pPr>
-              <a:lnSpc>
-                <a:spcPct val="114000"/>
-              </a:lnSpc>
-              <a:spcBef>
-                <a:spcPts val="0"/>
-              </a:spcBef>
-              <a:spcAft>
-                <a:spcPts val="0"/>
-              </a:spcAft>
-            </a:pPr>
-            <a:r>
-              <a:rPr sz="2100" b="0" lang="ko-KR">
+            <a:pPr algn="l">
+              <a:lnSpc>
+                <a:spcPct val="114000"/>
+              </a:lnSpc>
+              <a:spcBef>
+                <a:spcPts val="0"/>
+              </a:spcBef>
+              <a:spcAft>
+                <a:spcPts val="0"/>
+              </a:spcAft>
+            </a:pPr>
+            <a:r>
+              <a:rPr sz="2000" b="0" lang="ko-KR">
                 <a:solidFill>
                   <a:srgbClr val="20262E"/>
                 </a:solidFill>
@@ -4473,21 +4686,21 @@
                 <a:ea typeface="Pretendard"/>
                 <a:cs typeface="Pretendard"/>
               </a:rPr>
-              <a:t>확보한 라벨 사례로 누적 재학습하는 비교군</a:t>
-            </a:r>
-          </a:p>
-        </p:txBody>
-      </p:sp>
-      <p:sp>
-        <p:nvSpPr>
-          <p:cNvPr id="17" name="TextBox 16"/>
+              <a:t>새 사례를 포함한 누적 라벨 데이터로 모델 재학습</a:t>
+            </a:r>
+          </a:p>
+        </p:txBody>
+      </p:sp>
+      <p:sp>
+        <p:nvSpPr>
+          <p:cNvPr id="18" name="TextBox 17"/>
           <p:cNvSpPr txBox="1"/>
           <p:nvPr/>
         </p:nvSpPr>
         <p:spPr>
           <a:xfrm>
-            <a:off x="594360" y="4572000"/>
-            <a:ext cx="1874519" cy="365760"/>
+            <a:off x="594360" y="5093208"/>
+            <a:ext cx="1691640" cy="337626"/>
           </a:xfrm>
           <a:prstGeom prst="rect">
             <a:avLst/>
@@ -4500,19 +4713,19 @@
           </a:bodyPr>
           <a:lstStyle/>
           <a:p>
-            <a:pPr>
-              <a:lnSpc>
-                <a:spcPct val="114000"/>
-              </a:lnSpc>
-              <a:spcBef>
-                <a:spcPts val="0"/>
-              </a:spcBef>
-              <a:spcAft>
-                <a:spcPts val="0"/>
-              </a:spcAft>
-            </a:pPr>
-            <a:r>
-              <a:rPr sz="2300" b="1" lang="ko-KR">
+            <a:pPr algn="l">
+              <a:lnSpc>
+                <a:spcPct val="114000"/>
+              </a:lnSpc>
+              <a:spcBef>
+                <a:spcPts val="0"/>
+              </a:spcBef>
+              <a:spcAft>
+                <a:spcPts val="0"/>
+              </a:spcAft>
+            </a:pPr>
+            <a:r>
+              <a:rPr sz="2200" b="1" lang="ko-KR">
                 <a:solidFill>
                   <a:srgbClr val="007BC6"/>
                 </a:solidFill>
@@ -4527,14 +4740,14 @@
       </p:sp>
       <p:sp>
         <p:nvSpPr>
-          <p:cNvPr id="18" name="TextBox 17"/>
+          <p:cNvPr id="19" name="TextBox 18"/>
           <p:cNvSpPr txBox="1"/>
           <p:nvPr/>
         </p:nvSpPr>
         <p:spPr>
           <a:xfrm>
-            <a:off x="2606040" y="4572000"/>
-            <a:ext cx="8961120" cy="420624"/>
+            <a:off x="2423160" y="5093208"/>
+            <a:ext cx="9052560" cy="384048"/>
           </a:xfrm>
           <a:prstGeom prst="rect">
             <a:avLst/>
@@ -4547,19 +4760,19 @@
           </a:bodyPr>
           <a:lstStyle/>
           <a:p>
-            <a:pPr>
-              <a:lnSpc>
-                <a:spcPct val="114000"/>
-              </a:lnSpc>
-              <a:spcBef>
-                <a:spcPts val="0"/>
-              </a:spcBef>
-              <a:spcAft>
-                <a:spcPts val="0"/>
-              </a:spcAft>
-            </a:pPr>
-            <a:r>
-              <a:rPr sz="2100" b="0" lang="ko-KR">
+            <a:pPr algn="l">
+              <a:lnSpc>
+                <a:spcPct val="114000"/>
+              </a:lnSpc>
+              <a:spcBef>
+                <a:spcPts val="0"/>
+              </a:spcBef>
+              <a:spcAft>
+                <a:spcPts val="0"/>
+              </a:spcAft>
+            </a:pPr>
+            <a:r>
+              <a:rPr sz="2000" b="0" lang="ko-KR">
                 <a:solidFill>
                   <a:srgbClr val="20262E"/>
                 </a:solidFill>
@@ -4567,27 +4780,74 @@
                 <a:ea typeface="Pretendard"/>
                 <a:cs typeface="Pretendard"/>
               </a:rPr>
-              <a:t>사전학습 가중치 고정, 라벨 사례를 context로 제공</a:t>
-            </a:r>
-          </a:p>
-        </p:txBody>
-      </p:sp>
-      <p:sp>
-        <p:nvSpPr>
-          <p:cNvPr id="19" name="Rectangle 18"/>
+              <a:t>사전학습 모델에 기존·신규 사례를 context로 제공</a:t>
+            </a:r>
+          </a:p>
+        </p:txBody>
+      </p:sp>
+      <p:sp>
+        <p:nvSpPr>
+          <p:cNvPr id="20" name="TextBox 19"/>
+          <p:cNvSpPr txBox="1"/>
+          <p:nvPr/>
+        </p:nvSpPr>
+        <p:spPr>
+          <a:xfrm>
+            <a:off x="594360" y="5815584"/>
+            <a:ext cx="10972800" cy="292608"/>
+          </a:xfrm>
+          <a:prstGeom prst="rect">
+            <a:avLst/>
+          </a:prstGeom>
+          <a:noFill/>
+        </p:spPr>
+        <p:txBody>
+          <a:bodyPr wrap="none" anchor="t" lIns="0" rIns="0" tIns="0" bIns="0">
+            <a:noAutofit/>
+          </a:bodyPr>
+          <a:lstStyle/>
+          <a:p>
+            <a:pPr algn="l">
+              <a:lnSpc>
+                <a:spcPct val="114000"/>
+              </a:lnSpc>
+              <a:spcBef>
+                <a:spcPts val="0"/>
+              </a:spcBef>
+              <a:spcAft>
+                <a:spcPts val="0"/>
+              </a:spcAft>
+            </a:pPr>
+            <a:r>
+              <a:rPr sz="1700" b="0" lang="ko-KR">
+                <a:solidFill>
+                  <a:srgbClr val="617080"/>
+                </a:solidFill>
+                <a:latin typeface="Pretendard"/>
+                <a:ea typeface="Pretendard"/>
+                <a:cs typeface="Pretendard"/>
+              </a:rPr>
+              <a:t>이번 평가 범위 · 새 공격의 라벨 확보 이후 적응</a:t>
+            </a:r>
+          </a:p>
+        </p:txBody>
+      </p:sp>
+      <p:sp>
+        <p:nvSpPr>
+          <p:cNvPr id="21" name="Rectangle 20"/>
           <p:cNvSpPr/>
           <p:nvPr/>
         </p:nvSpPr>
         <p:spPr>
           <a:xfrm>
-            <a:off x="566928" y="5596128"/>
-            <a:ext cx="11018520" cy="704088"/>
+            <a:off x="0" y="6446520"/>
+            <a:ext cx="12191999" cy="411480"/>
           </a:xfrm>
           <a:prstGeom prst="rect">
             <a:avLst/>
           </a:prstGeom>
           <a:solidFill>
-            <a:srgbClr val="F1F5F9"/>
+            <a:srgbClr val="00306C"/>
           </a:solidFill>
           <a:ln>
             <a:noFill/>
@@ -4617,14 +4877,14 @@
       </p:sp>
       <p:sp>
         <p:nvSpPr>
-          <p:cNvPr id="20" name="TextBox 19"/>
+          <p:cNvPr id="22" name="TextBox 21"/>
           <p:cNvSpPr txBox="1"/>
           <p:nvPr/>
         </p:nvSpPr>
         <p:spPr>
           <a:xfrm>
-            <a:off x="768096" y="5769864"/>
-            <a:ext cx="10607040" cy="365760"/>
+            <a:off x="566928" y="6528816"/>
+            <a:ext cx="9738360" cy="214853"/>
           </a:xfrm>
           <a:prstGeom prst="rect">
             <a:avLst/>
@@ -4637,27 +4897,74 @@
           </a:bodyPr>
           <a:lstStyle/>
           <a:p>
-            <a:pPr>
-              <a:lnSpc>
-                <a:spcPct val="114000"/>
-              </a:lnSpc>
-              <a:spcBef>
-                <a:spcPts val="0"/>
-              </a:spcBef>
-              <a:spcAft>
-                <a:spcPts val="0"/>
-              </a:spcAft>
-            </a:pPr>
-            <a:r>
-              <a:rPr sz="2000" b="1" lang="ko-KR">
-                <a:solidFill>
-                  <a:srgbClr val="00306C"/>
-                </a:solidFill>
-                <a:latin typeface="Pretendard"/>
-                <a:ea typeface="Pretendard"/>
-                <a:cs typeface="Pretendard"/>
-              </a:rPr>
-              <a:t>비교 기준 · 신규 공격 탐지 · 기존 탐지 품질 · 갱신 비용</a:t>
+            <a:pPr algn="l">
+              <a:lnSpc>
+                <a:spcPct val="114000"/>
+              </a:lnSpc>
+              <a:spcBef>
+                <a:spcPts val="0"/>
+              </a:spcBef>
+              <a:spcAft>
+                <a:spcPts val="0"/>
+              </a:spcAft>
+            </a:pPr>
+            <a:r>
+              <a:rPr sz="1400" b="0" lang="ko-KR">
+                <a:solidFill>
+                  <a:srgbClr val="FFFFFF"/>
+                </a:solidFill>
+                <a:latin typeface="Pretendard"/>
+                <a:ea typeface="Pretendard"/>
+                <a:cs typeface="Pretendard"/>
+              </a:rPr>
+              <a:t>비교 질문 · 소수 신규 사례에서 얻는 탐지 품질과 갱신 비용</a:t>
+            </a:r>
+          </a:p>
+        </p:txBody>
+      </p:sp>
+      <p:sp>
+        <p:nvSpPr>
+          <p:cNvPr id="23" name="TextBox 22"/>
+          <p:cNvSpPr txBox="1"/>
+          <p:nvPr/>
+        </p:nvSpPr>
+        <p:spPr>
+          <a:xfrm>
+            <a:off x="10469880" y="6537960"/>
+            <a:ext cx="1143000" cy="201168"/>
+          </a:xfrm>
+          <a:prstGeom prst="rect">
+            <a:avLst/>
+          </a:prstGeom>
+          <a:noFill/>
+        </p:spPr>
+        <p:txBody>
+          <a:bodyPr wrap="none" anchor="t" lIns="0" rIns="0" tIns="0" bIns="0">
+            <a:noAutofit/>
+          </a:bodyPr>
+          <a:lstStyle/>
+          <a:p>
+            <a:pPr algn="r">
+              <a:lnSpc>
+                <a:spcPct val="114000"/>
+              </a:lnSpc>
+              <a:spcBef>
+                <a:spcPts val="0"/>
+              </a:spcBef>
+              <a:spcAft>
+                <a:spcPts val="0"/>
+              </a:spcAft>
+            </a:pPr>
+            <a:r>
+              <a:rPr sz="1200" b="0" lang="ko-KR">
+                <a:solidFill>
+                  <a:srgbClr val="FFFFFF"/>
+                </a:solidFill>
+                <a:latin typeface="Pretendard"/>
+                <a:ea typeface="Pretendard"/>
+                <a:cs typeface="Pretendard"/>
+              </a:rPr>
+              <a:t>01   1</a:t>
             </a:r>
           </a:p>
         </p:txBody>
@@ -4702,7 +5009,7 @@
           </a:bodyPr>
           <a:lstStyle/>
           <a:p>
-            <a:pPr>
+            <a:pPr algn="l">
               <a:lnSpc>
                 <a:spcPct val="114000"/>
               </a:lnSpc>
@@ -4722,7 +5029,7 @@
                 <a:ea typeface="Pretendard"/>
                 <a:cs typeface="Pretendard"/>
               </a:rPr>
-              <a:t>TabPFN · 가중치, context, query</a:t>
+              <a:t>TabPFN · 사전학습 가중치와 입력 사례의 역할</a:t>
             </a:r>
           </a:p>
         </p:txBody>
@@ -4735,8 +5042,8 @@
         </p:nvSpPr>
         <p:spPr>
           <a:xfrm>
-            <a:off x="566928" y="960120"/>
-            <a:ext cx="10972800" cy="365760"/>
+            <a:off x="566928" y="1005840"/>
+            <a:ext cx="10972800" cy="310896"/>
           </a:xfrm>
           <a:prstGeom prst="rect">
             <a:avLst/>
@@ -4749,7 +5056,7 @@
           </a:bodyPr>
           <a:lstStyle/>
           <a:p>
-            <a:pPr>
+            <a:pPr algn="l">
               <a:lnSpc>
                 <a:spcPct val="114000"/>
               </a:lnSpc>
@@ -4776,13 +5083,84 @@
       </p:sp>
       <p:sp>
         <p:nvSpPr>
-          <p:cNvPr id="4" name="Rectangle 3"/>
+          <p:cNvPr id="4" name="TextBox 3"/>
+          <p:cNvSpPr txBox="1"/>
+          <p:nvPr/>
+        </p:nvSpPr>
+        <p:spPr>
+          <a:xfrm>
+            <a:off x="566928" y="1527048"/>
+            <a:ext cx="10972800" cy="675253"/>
+          </a:xfrm>
+          <a:prstGeom prst="rect">
+            <a:avLst/>
+          </a:prstGeom>
+          <a:noFill/>
+        </p:spPr>
+        <p:txBody>
+          <a:bodyPr wrap="none" anchor="t" lIns="0" rIns="0" tIns="0" bIns="0">
+            <a:noAutofit/>
+          </a:bodyPr>
+          <a:lstStyle/>
+          <a:p>
+            <a:pPr algn="l">
+              <a:lnSpc>
+                <a:spcPct val="114000"/>
+              </a:lnSpc>
+              <a:spcBef>
+                <a:spcPts val="0"/>
+              </a:spcBef>
+              <a:spcAft>
+                <a:spcPts val="0"/>
+              </a:spcAft>
+            </a:pPr>
+            <a:r>
+              <a:rPr sz="2200" b="1" lang="ko-KR">
+                <a:solidFill>
+                  <a:srgbClr val="00306C"/>
+                </a:solidFill>
+                <a:latin typeface="Pretendard"/>
+                <a:ea typeface="Pretendard"/>
+                <a:cs typeface="Pretendard"/>
+              </a:rPr>
+              <a:t>사전학습된 것은 사례에서 예측하는 방법</a:t>
+            </a:r>
+          </a:p>
+          <a:p>
+            <a:pPr algn="l">
+              <a:lnSpc>
+                <a:spcPct val="114000"/>
+              </a:lnSpc>
+              <a:spcBef>
+                <a:spcPts val="0"/>
+              </a:spcBef>
+              <a:spcAft>
+                <a:spcPts val="0"/>
+              </a:spcAft>
+            </a:pPr>
+            <a:r>
+              <a:rPr sz="2200" b="1" lang="ko-KR">
+                <a:solidFill>
+                  <a:srgbClr val="00306C"/>
+                </a:solidFill>
+                <a:latin typeface="Pretendard"/>
+                <a:ea typeface="Pretendard"/>
+                <a:cs typeface="Pretendard"/>
+              </a:rPr>
+              <a:t>현재 IDS의 정상·공격 클래스에 해당하는 사례는 추론 시 입력</a:t>
+            </a:r>
+          </a:p>
+        </p:txBody>
+      </p:sp>
+      <p:sp>
+        <p:nvSpPr>
+          <p:cNvPr id="5" name="Rectangle 4"/>
           <p:cNvSpPr/>
           <p:nvPr/>
         </p:nvSpPr>
         <p:spPr>
           <a:xfrm>
-            <a:off x="566928" y="1709928"/>
+            <a:off x="566928" y="2395728"/>
             <a:ext cx="2953512" cy="914400"/>
           </a:xfrm>
           <a:prstGeom prst="rect">
@@ -4819,14 +5197,14 @@
       </p:sp>
       <p:sp>
         <p:nvSpPr>
-          <p:cNvPr id="5" name="TextBox 4"/>
+          <p:cNvPr id="6" name="TextBox 5"/>
           <p:cNvSpPr txBox="1"/>
           <p:nvPr/>
         </p:nvSpPr>
         <p:spPr>
           <a:xfrm>
-            <a:off x="749808" y="1865376"/>
-            <a:ext cx="2606040" cy="322280"/>
+            <a:off x="749808" y="2542032"/>
+            <a:ext cx="2606040" cy="306933"/>
           </a:xfrm>
           <a:prstGeom prst="rect">
             <a:avLst/>
@@ -4839,19 +5217,19 @@
           </a:bodyPr>
           <a:lstStyle/>
           <a:p>
-            <a:pPr>
-              <a:lnSpc>
-                <a:spcPct val="114000"/>
-              </a:lnSpc>
-              <a:spcBef>
-                <a:spcPts val="0"/>
-              </a:spcBef>
-              <a:spcAft>
-                <a:spcPts val="0"/>
-              </a:spcAft>
-            </a:pPr>
-            <a:r>
-              <a:rPr sz="2100" b="1" lang="ko-KR">
+            <a:pPr algn="l">
+              <a:lnSpc>
+                <a:spcPct val="114000"/>
+              </a:lnSpc>
+              <a:spcBef>
+                <a:spcPts val="0"/>
+              </a:spcBef>
+              <a:spcAft>
+                <a:spcPts val="0"/>
+              </a:spcAft>
+            </a:pPr>
+            <a:r>
+              <a:rPr sz="2000" b="1" lang="ko-KR">
                 <a:solidFill>
                   <a:srgbClr val="007BC6"/>
                 </a:solidFill>
@@ -4866,14 +5244,14 @@
       </p:sp>
       <p:sp>
         <p:nvSpPr>
-          <p:cNvPr id="6" name="TextBox 5"/>
+          <p:cNvPr id="7" name="TextBox 6"/>
           <p:cNvSpPr txBox="1"/>
           <p:nvPr/>
         </p:nvSpPr>
         <p:spPr>
           <a:xfrm>
-            <a:off x="749808" y="2267712"/>
-            <a:ext cx="2606040" cy="260893"/>
+            <a:off x="749808" y="2944368"/>
+            <a:ext cx="2606040" cy="245546"/>
           </a:xfrm>
           <a:prstGeom prst="rect">
             <a:avLst/>
@@ -4886,19 +5264,19 @@
           </a:bodyPr>
           <a:lstStyle/>
           <a:p>
-            <a:pPr>
-              <a:lnSpc>
-                <a:spcPct val="114000"/>
-              </a:lnSpc>
-              <a:spcBef>
-                <a:spcPts val="0"/>
-              </a:spcBef>
-              <a:spcAft>
-                <a:spcPts val="0"/>
-              </a:spcAft>
-            </a:pPr>
-            <a:r>
-              <a:rPr sz="1700" b="0" lang="ko-KR">
+            <a:pPr algn="l">
+              <a:lnSpc>
+                <a:spcPct val="114000"/>
+              </a:lnSpc>
+              <a:spcBef>
+                <a:spcPts val="0"/>
+              </a:spcBef>
+              <a:spcAft>
+                <a:spcPts val="0"/>
+              </a:spcAft>
+            </a:pPr>
+            <a:r>
+              <a:rPr sz="1600" b="0" lang="ko-KR">
                 <a:solidFill>
                   <a:srgbClr val="20262E"/>
                 </a:solidFill>
@@ -4906,21 +5284,21 @@
                 <a:ea typeface="Pretendard"/>
                 <a:cs typeface="Pretendard"/>
               </a:rPr>
-              <a:t>통신 특징 + 정답 라벨</a:t>
-            </a:r>
-          </a:p>
-        </p:txBody>
-      </p:sp>
-      <p:sp>
-        <p:nvSpPr>
-          <p:cNvPr id="7" name="Rectangle 6"/>
+              <a:t>기존·신규 특징 + 라벨</a:t>
+            </a:r>
+          </a:p>
+        </p:txBody>
+      </p:sp>
+      <p:sp>
+        <p:nvSpPr>
+          <p:cNvPr id="8" name="Rectangle 7"/>
           <p:cNvSpPr/>
           <p:nvPr/>
         </p:nvSpPr>
         <p:spPr>
           <a:xfrm>
-            <a:off x="566928" y="2862072"/>
-            <a:ext cx="2953512" cy="914400"/>
+            <a:off x="566928" y="3538728"/>
+            <a:ext cx="2953512" cy="795528"/>
           </a:xfrm>
           <a:prstGeom prst="rect">
             <a:avLst/>
@@ -4956,14 +5334,14 @@
       </p:sp>
       <p:sp>
         <p:nvSpPr>
-          <p:cNvPr id="8" name="TextBox 7"/>
+          <p:cNvPr id="9" name="TextBox 8"/>
           <p:cNvSpPr txBox="1"/>
           <p:nvPr/>
         </p:nvSpPr>
         <p:spPr>
           <a:xfrm>
-            <a:off x="749808" y="3017520"/>
-            <a:ext cx="2606040" cy="322280"/>
+            <a:off x="749808" y="3657600"/>
+            <a:ext cx="2606040" cy="306933"/>
           </a:xfrm>
           <a:prstGeom prst="rect">
             <a:avLst/>
@@ -4976,19 +5354,19 @@
           </a:bodyPr>
           <a:lstStyle/>
           <a:p>
-            <a:pPr>
-              <a:lnSpc>
-                <a:spcPct val="114000"/>
-              </a:lnSpc>
-              <a:spcBef>
-                <a:spcPts val="0"/>
-              </a:spcBef>
-              <a:spcAft>
-                <a:spcPts val="0"/>
-              </a:spcAft>
-            </a:pPr>
-            <a:r>
-              <a:rPr sz="2100" b="1" lang="ko-KR">
+            <a:pPr algn="l">
+              <a:lnSpc>
+                <a:spcPct val="114000"/>
+              </a:lnSpc>
+              <a:spcBef>
+                <a:spcPts val="0"/>
+              </a:spcBef>
+              <a:spcAft>
+                <a:spcPts val="0"/>
+              </a:spcAft>
+            </a:pPr>
+            <a:r>
+              <a:rPr sz="2000" b="1" lang="ko-KR">
                 <a:solidFill>
                   <a:srgbClr val="007BC6"/>
                 </a:solidFill>
@@ -5003,14 +5381,14 @@
       </p:sp>
       <p:sp>
         <p:nvSpPr>
-          <p:cNvPr id="9" name="TextBox 8"/>
+          <p:cNvPr id="10" name="TextBox 9"/>
           <p:cNvSpPr txBox="1"/>
           <p:nvPr/>
         </p:nvSpPr>
         <p:spPr>
           <a:xfrm>
-            <a:off x="749808" y="3419856"/>
-            <a:ext cx="2606040" cy="260893"/>
+            <a:off x="749808" y="4023360"/>
+            <a:ext cx="2606040" cy="245546"/>
           </a:xfrm>
           <a:prstGeom prst="rect">
             <a:avLst/>
@@ -5023,19 +5401,19 @@
           </a:bodyPr>
           <a:lstStyle/>
           <a:p>
-            <a:pPr>
-              <a:lnSpc>
-                <a:spcPct val="114000"/>
-              </a:lnSpc>
-              <a:spcBef>
-                <a:spcPts val="0"/>
-              </a:spcBef>
-              <a:spcAft>
-                <a:spcPts val="0"/>
-              </a:spcAft>
-            </a:pPr>
-            <a:r>
-              <a:rPr sz="1700" b="0" lang="ko-KR">
+            <a:pPr algn="l">
+              <a:lnSpc>
+                <a:spcPct val="114000"/>
+              </a:lnSpc>
+              <a:spcBef>
+                <a:spcPts val="0"/>
+              </a:spcBef>
+              <a:spcAft>
+                <a:spcPts val="0"/>
+              </a:spcAft>
+            </a:pPr>
+            <a:r>
+              <a:rPr sz="1600" b="0" lang="ko-KR">
                 <a:solidFill>
                   <a:srgbClr val="20262E"/>
                 </a:solidFill>
@@ -5043,20 +5421,20 @@
                 <a:ea typeface="Pretendard"/>
                 <a:cs typeface="Pretendard"/>
               </a:rPr>
-              <a:t>분류할 통신 기록</a:t>
-            </a:r>
-          </a:p>
-        </p:txBody>
-      </p:sp>
-      <p:sp>
-        <p:nvSpPr>
-          <p:cNvPr id="10" name="Right Arrow 9"/>
+              <a:t>분류할 기록 · 정답 미입력</a:t>
+            </a:r>
+          </a:p>
+        </p:txBody>
+      </p:sp>
+      <p:sp>
+        <p:nvSpPr>
+          <p:cNvPr id="11" name="Right Arrow 10"/>
           <p:cNvSpPr/>
           <p:nvPr/>
         </p:nvSpPr>
         <p:spPr>
           <a:xfrm>
-            <a:off x="3721608" y="2167128"/>
+            <a:off x="3721608" y="2779776"/>
             <a:ext cx="429768" cy="292608"/>
           </a:xfrm>
           <a:prstGeom prst="rightArrow">
@@ -5093,13 +5471,13 @@
       </p:sp>
       <p:sp>
         <p:nvSpPr>
-          <p:cNvPr id="11" name="Right Arrow 10"/>
+          <p:cNvPr id="12" name="Right Arrow 11"/>
           <p:cNvSpPr/>
           <p:nvPr/>
         </p:nvSpPr>
         <p:spPr>
           <a:xfrm>
-            <a:off x="3721608" y="3310128"/>
+            <a:off x="3721608" y="3794760"/>
             <a:ext cx="429768" cy="292608"/>
           </a:xfrm>
           <a:prstGeom prst="rightArrow">
@@ -5136,13 +5514,13 @@
       </p:sp>
       <p:sp>
         <p:nvSpPr>
-          <p:cNvPr id="12" name="Rectangle 11"/>
+          <p:cNvPr id="13" name="Rectangle 12"/>
           <p:cNvSpPr/>
           <p:nvPr/>
         </p:nvSpPr>
         <p:spPr>
           <a:xfrm>
-            <a:off x="4389120" y="2075688"/>
+            <a:off x="4389120" y="2834640"/>
             <a:ext cx="3246120" cy="1335024"/>
           </a:xfrm>
           <a:prstGeom prst="rect">
@@ -5179,13 +5557,13 @@
       </p:sp>
       <p:sp>
         <p:nvSpPr>
-          <p:cNvPr id="13" name="TextBox 12"/>
+          <p:cNvPr id="14" name="TextBox 13"/>
           <p:cNvSpPr txBox="1"/>
           <p:nvPr/>
         </p:nvSpPr>
         <p:spPr>
           <a:xfrm>
-            <a:off x="4572000" y="2322576"/>
+            <a:off x="4572000" y="3063240"/>
             <a:ext cx="2880360" cy="399013"/>
           </a:xfrm>
           <a:prstGeom prst="rect">
@@ -5199,7 +5577,7 @@
           </a:bodyPr>
           <a:lstStyle/>
           <a:p>
-            <a:pPr>
+            <a:pPr algn="l">
               <a:lnSpc>
                 <a:spcPct val="114000"/>
               </a:lnSpc>
@@ -5226,13 +5604,13 @@
       </p:sp>
       <p:sp>
         <p:nvSpPr>
-          <p:cNvPr id="14" name="TextBox 13"/>
+          <p:cNvPr id="15" name="TextBox 14"/>
           <p:cNvSpPr txBox="1"/>
           <p:nvPr/>
         </p:nvSpPr>
         <p:spPr>
           <a:xfrm>
-            <a:off x="4572000" y="2889504"/>
+            <a:off x="4572000" y="3639312"/>
             <a:ext cx="2880360" cy="276240"/>
           </a:xfrm>
           <a:prstGeom prst="rect">
@@ -5246,7 +5624,7 @@
           </a:bodyPr>
           <a:lstStyle/>
           <a:p>
-            <a:pPr>
+            <a:pPr algn="l">
               <a:lnSpc>
                 <a:spcPct val="114000"/>
               </a:lnSpc>
@@ -5273,13 +5651,13 @@
       </p:sp>
       <p:sp>
         <p:nvSpPr>
-          <p:cNvPr id="15" name="Right Arrow 14"/>
+          <p:cNvPr id="16" name="Right Arrow 15"/>
           <p:cNvSpPr/>
           <p:nvPr/>
         </p:nvSpPr>
         <p:spPr>
           <a:xfrm>
-            <a:off x="7836408" y="2679192"/>
+            <a:off x="7836408" y="3346704"/>
             <a:ext cx="429768" cy="292608"/>
           </a:xfrm>
           <a:prstGeom prst="rightArrow">
@@ -5316,13 +5694,13 @@
       </p:sp>
       <p:sp>
         <p:nvSpPr>
-          <p:cNvPr id="16" name="Rectangle 15"/>
+          <p:cNvPr id="17" name="Rectangle 16"/>
           <p:cNvSpPr/>
           <p:nvPr/>
         </p:nvSpPr>
         <p:spPr>
           <a:xfrm>
-            <a:off x="8503920" y="2075688"/>
+            <a:off x="8503920" y="2834640"/>
             <a:ext cx="3090672" cy="1335024"/>
           </a:xfrm>
           <a:prstGeom prst="rect">
@@ -5359,13 +5737,13 @@
       </p:sp>
       <p:sp>
         <p:nvSpPr>
-          <p:cNvPr id="17" name="TextBox 16"/>
+          <p:cNvPr id="18" name="TextBox 17"/>
           <p:cNvSpPr txBox="1"/>
           <p:nvPr/>
         </p:nvSpPr>
         <p:spPr>
           <a:xfrm>
-            <a:off x="8686800" y="2350008"/>
+            <a:off x="8686800" y="3108960"/>
             <a:ext cx="2715768" cy="322280"/>
           </a:xfrm>
           <a:prstGeom prst="rect">
@@ -5379,7 +5757,7 @@
           </a:bodyPr>
           <a:lstStyle/>
           <a:p>
-            <a:pPr>
+            <a:pPr algn="l">
               <a:lnSpc>
                 <a:spcPct val="114000"/>
               </a:lnSpc>
@@ -5406,13 +5784,13 @@
       </p:sp>
       <p:sp>
         <p:nvSpPr>
-          <p:cNvPr id="18" name="TextBox 17"/>
+          <p:cNvPr id="19" name="TextBox 18"/>
           <p:cNvSpPr txBox="1"/>
           <p:nvPr/>
         </p:nvSpPr>
         <p:spPr>
           <a:xfrm>
-            <a:off x="8686800" y="2898648"/>
+            <a:off x="8686800" y="3657600"/>
             <a:ext cx="2715768" cy="274320"/>
           </a:xfrm>
           <a:prstGeom prst="rect">
@@ -5426,7 +5804,7 @@
           </a:bodyPr>
           <a:lstStyle/>
           <a:p>
-            <a:pPr>
+            <a:pPr algn="l">
               <a:lnSpc>
                 <a:spcPct val="114000"/>
               </a:lnSpc>
@@ -5446,21 +5824,21 @@
                 <a:ea typeface="Pretendard"/>
                 <a:cs typeface="Pretendard"/>
               </a:rPr>
-              <a:t>정상 · 공격 A · 공격 B …</a:t>
-            </a:r>
-          </a:p>
-        </p:txBody>
-      </p:sp>
-      <p:sp>
-        <p:nvSpPr>
-          <p:cNvPr id="19" name="TextBox 18"/>
+              <a:t>정상 · 공격 A · 공격 C …</a:t>
+            </a:r>
+          </a:p>
+        </p:txBody>
+      </p:sp>
+      <p:sp>
+        <p:nvSpPr>
+          <p:cNvPr id="20" name="TextBox 19"/>
           <p:cNvSpPr txBox="1"/>
           <p:nvPr/>
         </p:nvSpPr>
         <p:spPr>
           <a:xfrm>
-            <a:off x="594360" y="4242816"/>
-            <a:ext cx="2404872" cy="320040"/>
+            <a:off x="594360" y="4690872"/>
+            <a:ext cx="2423160" cy="320040"/>
           </a:xfrm>
           <a:prstGeom prst="rect">
             <a:avLst/>
@@ -5473,7 +5851,7 @@
           </a:bodyPr>
           <a:lstStyle/>
           <a:p>
-            <a:pPr>
+            <a:pPr algn="l">
               <a:lnSpc>
                 <a:spcPct val="114000"/>
               </a:lnSpc>
@@ -5500,13 +5878,13 @@
       </p:sp>
       <p:sp>
         <p:nvSpPr>
-          <p:cNvPr id="20" name="TextBox 19"/>
+          <p:cNvPr id="21" name="TextBox 20"/>
           <p:cNvSpPr txBox="1"/>
           <p:nvPr/>
         </p:nvSpPr>
         <p:spPr>
           <a:xfrm>
-            <a:off x="3154680" y="4242816"/>
+            <a:off x="3154680" y="4690872"/>
             <a:ext cx="8275320" cy="329184"/>
           </a:xfrm>
           <a:prstGeom prst="rect">
@@ -5520,7 +5898,7 @@
           </a:bodyPr>
           <a:lstStyle/>
           <a:p>
-            <a:pPr>
+            <a:pPr algn="l">
               <a:lnSpc>
                 <a:spcPct val="114000"/>
               </a:lnSpc>
@@ -5540,20 +5918,20 @@
                 <a:ea typeface="Pretendard"/>
                 <a:cs typeface="Pretendard"/>
               </a:rPr>
-              <a:t>가중치 변경 없이, context에 조건화한 query 예측</a:t>
-            </a:r>
-          </a:p>
-        </p:txBody>
-      </p:sp>
-      <p:sp>
-        <p:nvSpPr>
-          <p:cNvPr id="21" name="TextBox 20"/>
+              <a:t>context와 query의 관계를 이용한 예측 · 가중치 갱신 없음</a:t>
+            </a:r>
+          </a:p>
+        </p:txBody>
+      </p:sp>
+      <p:sp>
+        <p:nvSpPr>
+          <p:cNvPr id="22" name="TextBox 21"/>
           <p:cNvSpPr txBox="1"/>
           <p:nvPr/>
         </p:nvSpPr>
         <p:spPr>
           <a:xfrm>
-            <a:off x="594360" y="4892040"/>
+            <a:off x="594360" y="5340096"/>
             <a:ext cx="2194560" cy="320040"/>
           </a:xfrm>
           <a:prstGeom prst="rect">
@@ -5567,7 +5945,7 @@
           </a:bodyPr>
           <a:lstStyle/>
           <a:p>
-            <a:pPr>
+            <a:pPr algn="l">
               <a:lnSpc>
                 <a:spcPct val="114000"/>
               </a:lnSpc>
@@ -5594,14 +5972,14 @@
       </p:sp>
       <p:sp>
         <p:nvSpPr>
-          <p:cNvPr id="22" name="TextBox 21"/>
+          <p:cNvPr id="23" name="TextBox 22"/>
           <p:cNvSpPr txBox="1"/>
           <p:nvPr/>
         </p:nvSpPr>
         <p:spPr>
           <a:xfrm>
-            <a:off x="3154680" y="4892040"/>
-            <a:ext cx="8275320" cy="583173"/>
+            <a:off x="3154680" y="5340096"/>
+            <a:ext cx="8275320" cy="603504"/>
           </a:xfrm>
           <a:prstGeom prst="rect">
             <a:avLst/>
@@ -5614,19 +5992,19 @@
           </a:bodyPr>
           <a:lstStyle/>
           <a:p>
-            <a:pPr>
-              <a:lnSpc>
-                <a:spcPct val="114000"/>
-              </a:lnSpc>
-              <a:spcBef>
-                <a:spcPts val="0"/>
-              </a:spcBef>
-              <a:spcAft>
-                <a:spcPts val="0"/>
-              </a:spcAft>
-            </a:pPr>
-            <a:r>
-              <a:rPr sz="1900" b="0" lang="ko-KR">
+            <a:pPr algn="l">
+              <a:lnSpc>
+                <a:spcPct val="114000"/>
+              </a:lnSpc>
+              <a:spcBef>
+                <a:spcPts val="0"/>
+              </a:spcBef>
+              <a:spcAft>
+                <a:spcPts val="0"/>
+              </a:spcAft>
+            </a:pPr>
+            <a:r>
+              <a:rPr sz="1800" b="0" lang="ko-KR">
                 <a:solidFill>
                   <a:srgbClr val="20262E"/>
                 </a:solidFill>
@@ -5634,23 +6012,23 @@
                 <a:ea typeface="Pretendard"/>
                 <a:cs typeface="Pretendard"/>
               </a:rPr>
-              <a:t>IDS 사례를 context/query로 나누고</a:t>
-            </a:r>
-          </a:p>
-          <a:p>
-            <a:pPr>
-              <a:lnSpc>
-                <a:spcPct val="114000"/>
-              </a:lnSpc>
-              <a:spcBef>
-                <a:spcPts val="0"/>
-              </a:spcBef>
-              <a:spcAft>
-                <a:spcPts val="0"/>
-              </a:spcAft>
-            </a:pPr>
-            <a:r>
-              <a:rPr sz="1900" b="0" lang="ko-KR">
+              <a:t>IDS 사례를 context/query로 나누고 query 정답 손실을 역전파</a:t>
+            </a:r>
+          </a:p>
+          <a:p>
+            <a:pPr algn="l">
+              <a:lnSpc>
+                <a:spcPct val="114000"/>
+              </a:lnSpc>
+              <a:spcBef>
+                <a:spcPts val="0"/>
+              </a:spcBef>
+              <a:spcAft>
+                <a:spcPts val="0"/>
+              </a:spcAft>
+            </a:pPr>
+            <a:r>
+              <a:rPr sz="1800" b="0" lang="ko-KR">
                 <a:solidFill>
                   <a:srgbClr val="20262E"/>
                 </a:solidFill>
@@ -5658,27 +6036,27 @@
                 <a:ea typeface="Pretendard"/>
                 <a:cs typeface="Pretendard"/>
               </a:rPr>
-              <a:t>query 정답의 손실을 역전파하여 가중치 갱신</a:t>
-            </a:r>
-          </a:p>
-        </p:txBody>
-      </p:sp>
-      <p:sp>
-        <p:nvSpPr>
-          <p:cNvPr id="23" name="Rectangle 22"/>
+              <a:t>별도의 가중치 추가 학습 · 이번 비교에서는 미수행</a:t>
+            </a:r>
+          </a:p>
+        </p:txBody>
+      </p:sp>
+      <p:sp>
+        <p:nvSpPr>
+          <p:cNvPr id="24" name="Rectangle 23"/>
           <p:cNvSpPr/>
           <p:nvPr/>
         </p:nvSpPr>
         <p:spPr>
           <a:xfrm>
-            <a:off x="566928" y="5751576"/>
-            <a:ext cx="11018520" cy="557784"/>
+            <a:off x="0" y="6446520"/>
+            <a:ext cx="12191999" cy="411480"/>
           </a:xfrm>
           <a:prstGeom prst="rect">
             <a:avLst/>
           </a:prstGeom>
           <a:solidFill>
-            <a:srgbClr val="F1F5F9"/>
+            <a:srgbClr val="00306C"/>
           </a:solidFill>
           <a:ln>
             <a:noFill/>
@@ -5708,14 +6086,14 @@
       </p:sp>
       <p:sp>
         <p:nvSpPr>
-          <p:cNvPr id="24" name="TextBox 23"/>
+          <p:cNvPr id="25" name="TextBox 24"/>
           <p:cNvSpPr txBox="1"/>
           <p:nvPr/>
         </p:nvSpPr>
         <p:spPr>
           <a:xfrm>
-            <a:off x="768096" y="5888736"/>
-            <a:ext cx="10616184" cy="291586"/>
+            <a:off x="566928" y="6528816"/>
+            <a:ext cx="9738360" cy="214853"/>
           </a:xfrm>
           <a:prstGeom prst="rect">
             <a:avLst/>
@@ -5728,27 +6106,74 @@
           </a:bodyPr>
           <a:lstStyle/>
           <a:p>
-            <a:pPr>
-              <a:lnSpc>
-                <a:spcPct val="114000"/>
-              </a:lnSpc>
-              <a:spcBef>
-                <a:spcPts val="0"/>
-              </a:spcBef>
-              <a:spcAft>
-                <a:spcPts val="0"/>
-              </a:spcAft>
-            </a:pPr>
-            <a:r>
-              <a:rPr sz="1900" b="1" lang="ko-KR">
-                <a:solidFill>
-                  <a:srgbClr val="00306C"/>
-                </a:solidFill>
-                <a:latin typeface="Pretendard"/>
-                <a:ea typeface="Pretendard"/>
-                <a:cs typeface="Pretendard"/>
-              </a:rPr>
-              <a:t>현재 비교 · 초기 IDS fine-tuning 없이 사전학습 가중치 유지</a:t>
+            <a:pPr algn="l">
+              <a:lnSpc>
+                <a:spcPct val="114000"/>
+              </a:lnSpc>
+              <a:spcBef>
+                <a:spcPts val="0"/>
+              </a:spcBef>
+              <a:spcAft>
+                <a:spcPts val="0"/>
+              </a:spcAft>
+            </a:pPr>
+            <a:r>
+              <a:rPr sz="1400" b="0" lang="ko-KR">
+                <a:solidFill>
+                  <a:srgbClr val="FFFFFF"/>
+                </a:solidFill>
+                <a:latin typeface="Pretendard"/>
+                <a:ea typeface="Pretendard"/>
+                <a:cs typeface="Pretendard"/>
+              </a:rPr>
+              <a:t>가중치를 고정해도 필요한 context · 현재 분류 문제를 알려 주는 라벨 사례</a:t>
+            </a:r>
+          </a:p>
+        </p:txBody>
+      </p:sp>
+      <p:sp>
+        <p:nvSpPr>
+          <p:cNvPr id="26" name="TextBox 25"/>
+          <p:cNvSpPr txBox="1"/>
+          <p:nvPr/>
+        </p:nvSpPr>
+        <p:spPr>
+          <a:xfrm>
+            <a:off x="10469880" y="6537960"/>
+            <a:ext cx="1143000" cy="201168"/>
+          </a:xfrm>
+          <a:prstGeom prst="rect">
+            <a:avLst/>
+          </a:prstGeom>
+          <a:noFill/>
+        </p:spPr>
+        <p:txBody>
+          <a:bodyPr wrap="none" anchor="t" lIns="0" rIns="0" tIns="0" bIns="0">
+            <a:noAutofit/>
+          </a:bodyPr>
+          <a:lstStyle/>
+          <a:p>
+            <a:pPr algn="r">
+              <a:lnSpc>
+                <a:spcPct val="114000"/>
+              </a:lnSpc>
+              <a:spcBef>
+                <a:spcPts val="0"/>
+              </a:spcBef>
+              <a:spcAft>
+                <a:spcPts val="0"/>
+              </a:spcAft>
+            </a:pPr>
+            <a:r>
+              <a:rPr sz="1200" b="0" lang="ko-KR">
+                <a:solidFill>
+                  <a:srgbClr val="FFFFFF"/>
+                </a:solidFill>
+                <a:latin typeface="Pretendard"/>
+                <a:ea typeface="Pretendard"/>
+                <a:cs typeface="Pretendard"/>
+              </a:rPr>
+              <a:t>02   2</a:t>
             </a:r>
           </a:p>
         </p:txBody>
@@ -5793,7 +6218,7 @@
           </a:bodyPr>
           <a:lstStyle/>
           <a:p>
-            <a:pPr>
+            <a:pPr algn="l">
               <a:lnSpc>
                 <a:spcPct val="114000"/>
               </a:lnSpc>
@@ -5865,7 +6290,7 @@
           </a:bodyPr>
           <a:lstStyle/>
           <a:p>
-            <a:pPr>
+            <a:pPr algn="l">
               <a:lnSpc>
                 <a:spcPct val="114000"/>
               </a:lnSpc>
@@ -5912,7 +6337,7 @@
           </a:bodyPr>
           <a:lstStyle/>
           <a:p>
-            <a:pPr>
+            <a:pPr algn="l">
               <a:lnSpc>
                 <a:spcPct val="114000"/>
               </a:lnSpc>
@@ -5936,7 +6361,7 @@
             </a:r>
           </a:p>
           <a:p>
-            <a:pPr>
+            <a:pPr algn="l">
               <a:lnSpc>
                 <a:spcPct val="114000"/>
               </a:lnSpc>
@@ -5983,7 +6408,7 @@
           </a:bodyPr>
           <a:lstStyle/>
           <a:p>
-            <a:pPr>
+            <a:pPr algn="l">
               <a:lnSpc>
                 <a:spcPct val="114000"/>
               </a:lnSpc>
@@ -6030,7 +6455,7 @@
           </a:bodyPr>
           <a:lstStyle/>
           <a:p>
-            <a:pPr>
+            <a:pPr algn="l">
               <a:lnSpc>
                 <a:spcPct val="114000"/>
               </a:lnSpc>
@@ -6050,11 +6475,11 @@
                 <a:ea typeface="Pretendard"/>
                 <a:cs typeface="Pretendard"/>
               </a:rPr>
-              <a:t>여러 통신 기록에서 각 특징의 분포 파악</a:t>
-            </a:r>
-          </a:p>
-          <a:p>
-            <a:pPr>
+              <a:t>여러 기록에서 각 특징의 분포 파악</a:t>
+            </a:r>
+          </a:p>
+          <a:p>
+            <a:pPr algn="l">
               <a:lnSpc>
                 <a:spcPct val="114000"/>
               </a:lnSpc>
@@ -6074,7 +6499,7 @@
                 <a:ea typeface="Pretendard"/>
                 <a:cs typeface="Pretendard"/>
               </a:rPr>
-              <a:t>context의 라벨도 함께 참조</a:t>
+              <a:t>context 라벨을 함께 참조</a:t>
             </a:r>
           </a:p>
         </p:txBody>
@@ -6101,7 +6526,7 @@
           </a:bodyPr>
           <a:lstStyle/>
           <a:p>
-            <a:pPr>
+            <a:pPr algn="l">
               <a:lnSpc>
                 <a:spcPct val="114000"/>
               </a:lnSpc>
@@ -6148,7 +6573,7 @@
           </a:bodyPr>
           <a:lstStyle/>
           <a:p>
-            <a:pPr>
+            <a:pPr algn="l">
               <a:lnSpc>
                 <a:spcPct val="114000"/>
               </a:lnSpc>
@@ -6168,11 +6593,11 @@
                 <a:ea typeface="Pretendard"/>
                 <a:cs typeface="Pretendard"/>
               </a:rPr>
-              <a:t>한 통신 기록의 특징들을 하나의 표현으로 통합</a:t>
-            </a:r>
-          </a:p>
-          <a:p>
-            <a:pPr>
+              <a:t>한 기록의 특징들을 하나의 표현으로 통합</a:t>
+            </a:r>
+          </a:p>
+          <a:p>
+            <a:pPr algn="l">
               <a:lnSpc>
                 <a:spcPct val="114000"/>
               </a:lnSpc>
@@ -6192,7 +6617,144 @@
                 <a:ea typeface="Pretendard"/>
                 <a:cs typeface="Pretendard"/>
               </a:rPr>
-              <a:t>다른 기록과의 관계를 비교할 준비</a:t>
+              <a:t>사례 간 관계 비교에 사용할 행 표현 생성</a:t>
+            </a:r>
+          </a:p>
+        </p:txBody>
+      </p:sp>
+      <p:sp>
+        <p:nvSpPr>
+          <p:cNvPr id="10" name="Rectangle 9"/>
+          <p:cNvSpPr/>
+          <p:nvPr/>
+        </p:nvSpPr>
+        <p:spPr>
+          <a:xfrm>
+            <a:off x="0" y="6446520"/>
+            <a:ext cx="12191999" cy="411480"/>
+          </a:xfrm>
+          <a:prstGeom prst="rect">
+            <a:avLst/>
+          </a:prstGeom>
+          <a:solidFill>
+            <a:srgbClr val="00306C"/>
+          </a:solidFill>
+          <a:ln>
+            <a:noFill/>
+          </a:ln>
+        </p:spPr>
+        <p:style>
+          <a:lnRef idx="1">
+            <a:schemeClr val="accent1"/>
+          </a:lnRef>
+          <a:fillRef idx="3">
+            <a:schemeClr val="accent1"/>
+          </a:fillRef>
+          <a:effectRef idx="2">
+            <a:schemeClr val="accent1"/>
+          </a:effectRef>
+          <a:fontRef idx="minor">
+            <a:schemeClr val="lt1"/>
+          </a:fontRef>
+        </p:style>
+        <p:txBody>
+          <a:bodyPr rtlCol="0" anchor="ctr"/>
+          <a:lstStyle/>
+          <a:p>
+            <a:pPr algn="ctr"/>
+          </a:p>
+        </p:txBody>
+      </p:sp>
+      <p:sp>
+        <p:nvSpPr>
+          <p:cNvPr id="11" name="TextBox 10"/>
+          <p:cNvSpPr txBox="1"/>
+          <p:nvPr/>
+        </p:nvSpPr>
+        <p:spPr>
+          <a:xfrm>
+            <a:off x="566928" y="6528816"/>
+            <a:ext cx="9738360" cy="210312"/>
+          </a:xfrm>
+          <a:prstGeom prst="rect">
+            <a:avLst/>
+          </a:prstGeom>
+          <a:noFill/>
+        </p:spPr>
+        <p:txBody>
+          <a:bodyPr wrap="none" anchor="t" lIns="0" rIns="0" tIns="0" bIns="0">
+            <a:noAutofit/>
+          </a:bodyPr>
+          <a:lstStyle/>
+          <a:p>
+            <a:pPr algn="l">
+              <a:lnSpc>
+                <a:spcPct val="114000"/>
+              </a:lnSpc>
+              <a:spcBef>
+                <a:spcPts val="0"/>
+              </a:spcBef>
+              <a:spcAft>
+                <a:spcPts val="0"/>
+              </a:spcAft>
+            </a:pPr>
+            <a:r>
+              <a:rPr sz="1400" b="0" lang="ko-KR">
+                <a:solidFill>
+                  <a:srgbClr val="FFFFFF"/>
+                </a:solidFill>
+                <a:latin typeface="Pretendard"/>
+                <a:ea typeface="Pretendard"/>
+                <a:cs typeface="Pretendard"/>
+              </a:rPr>
+              <a:t/>
+            </a:r>
+          </a:p>
+        </p:txBody>
+      </p:sp>
+      <p:sp>
+        <p:nvSpPr>
+          <p:cNvPr id="12" name="TextBox 11"/>
+          <p:cNvSpPr txBox="1"/>
+          <p:nvPr/>
+        </p:nvSpPr>
+        <p:spPr>
+          <a:xfrm>
+            <a:off x="10469880" y="6537960"/>
+            <a:ext cx="1143000" cy="201168"/>
+          </a:xfrm>
+          <a:prstGeom prst="rect">
+            <a:avLst/>
+          </a:prstGeom>
+          <a:noFill/>
+        </p:spPr>
+        <p:txBody>
+          <a:bodyPr wrap="none" anchor="t" lIns="0" rIns="0" tIns="0" bIns="0">
+            <a:noAutofit/>
+          </a:bodyPr>
+          <a:lstStyle/>
+          <a:p>
+            <a:pPr algn="r">
+              <a:lnSpc>
+                <a:spcPct val="114000"/>
+              </a:lnSpc>
+              <a:spcBef>
+                <a:spcPts val="0"/>
+              </a:spcBef>
+              <a:spcAft>
+                <a:spcPts val="0"/>
+              </a:spcAft>
+            </a:pPr>
+            <a:r>
+              <a:rPr sz="1200" b="0" lang="ko-KR">
+                <a:solidFill>
+                  <a:srgbClr val="FFFFFF"/>
+                </a:solidFill>
+                <a:latin typeface="Pretendard"/>
+                <a:ea typeface="Pretendard"/>
+                <a:cs typeface="Pretendard"/>
+              </a:rPr>
+              <a:t>02   3</a:t>
             </a:r>
           </a:p>
         </p:txBody>
@@ -6237,7 +6799,7 @@
           </a:bodyPr>
           <a:lstStyle/>
           <a:p>
-            <a:pPr>
+            <a:pPr algn="l">
               <a:lnSpc>
                 <a:spcPct val="114000"/>
               </a:lnSpc>
@@ -6257,7 +6819,7 @@
                 <a:ea typeface="Pretendard"/>
                 <a:cs typeface="Pretendard"/>
               </a:rPr>
-              <a:t>v3 구조 · 사례 참조와 갱신</a:t>
+              <a:t>v3 구조 · 사례 참조와 갱신 비용</a:t>
             </a:r>
           </a:p>
         </p:txBody>
@@ -6309,7 +6871,7 @@
           </a:bodyPr>
           <a:lstStyle/>
           <a:p>
-            <a:pPr>
+            <a:pPr algn="l">
               <a:lnSpc>
                 <a:spcPct val="114000"/>
               </a:lnSpc>
@@ -6356,7 +6918,7 @@
           </a:bodyPr>
           <a:lstStyle/>
           <a:p>
-            <a:pPr>
+            <a:pPr algn="l">
               <a:lnSpc>
                 <a:spcPct val="114000"/>
               </a:lnSpc>
@@ -6376,11 +6938,11 @@
                 <a:ea typeface="Pretendard"/>
                 <a:cs typeface="Pretendard"/>
               </a:rPr>
-              <a:t>query와 context 사례의 관계를 계산</a:t>
-            </a:r>
-          </a:p>
-          <a:p>
-            <a:pPr>
+              <a:t>query와 context 사례의 관계 계산</a:t>
+            </a:r>
+          </a:p>
+          <a:p>
+            <a:pPr algn="l">
               <a:lnSpc>
                 <a:spcPct val="114000"/>
               </a:lnSpc>
@@ -6400,7 +6962,7 @@
                 <a:ea typeface="Pretendard"/>
                 <a:cs typeface="Pretendard"/>
               </a:rPr>
-              <a:t>예측에 참고할 사례를 attention으로 선택</a:t>
+              <a:t>attention으로 참고할 사례의 비중 결정</a:t>
             </a:r>
           </a:p>
         </p:txBody>
@@ -6427,7 +6989,7 @@
           </a:bodyPr>
           <a:lstStyle/>
           <a:p>
-            <a:pPr>
+            <a:pPr algn="l">
               <a:lnSpc>
                 <a:spcPct val="114000"/>
               </a:lnSpc>
@@ -6474,7 +7036,7 @@
           </a:bodyPr>
           <a:lstStyle/>
           <a:p>
-            <a:pPr>
+            <a:pPr algn="l">
               <a:lnSpc>
                 <a:spcPct val="114000"/>
               </a:lnSpc>
@@ -6494,11 +7056,11 @@
                 <a:ea typeface="Pretendard"/>
                 <a:cs typeface="Pretendard"/>
               </a:rPr>
-              <a:t>context 라벨의 가중합으로 클래스 확률 계산</a:t>
-            </a:r>
-          </a:p>
-          <a:p>
-            <a:pPr>
+              <a:t>context 라벨을 가중합해 확률 계산</a:t>
+            </a:r>
+          </a:p>
+          <a:p>
+            <a:pPr algn="l">
               <a:lnSpc>
                 <a:spcPct val="114000"/>
               </a:lnSpc>
@@ -6518,7 +7080,7 @@
                 <a:ea typeface="Pretendard"/>
                 <a:cs typeface="Pretendard"/>
               </a:rPr>
-              <a:t>기존·신규 클래스의 라벨 사례 모두 필요</a:t>
+              <a:t>정상·기존 공격·신규 공격의 사례 모두 필요</a:t>
             </a:r>
           </a:p>
         </p:txBody>
@@ -6588,7 +7150,7 @@
           </a:bodyPr>
           <a:lstStyle/>
           <a:p>
-            <a:pPr>
+            <a:pPr algn="l">
               <a:lnSpc>
                 <a:spcPct val="114000"/>
               </a:lnSpc>
@@ -6608,7 +7170,7 @@
                 <a:ea typeface="Pretendard"/>
                 <a:cs typeface="Pretendard"/>
               </a:rPr>
-              <a:t>Context 갱신에도 계산 비용 발생</a:t>
+              <a:t>가중치 학습 없이도 발생하는 갱신 비용</a:t>
             </a:r>
           </a:p>
         </p:txBody>
@@ -6635,7 +7197,7 @@
           </a:bodyPr>
           <a:lstStyle/>
           <a:p>
-            <a:pPr>
+            <a:pPr algn="l">
               <a:lnSpc>
                 <a:spcPct val="114000"/>
               </a:lnSpc>
@@ -6655,11 +7217,11 @@
                 <a:ea typeface="Pretendard"/>
                 <a:cs typeface="Pretendard"/>
               </a:rPr>
-              <a:t>전처리 · 표현 계산 · 캐시 준비</a:t>
-            </a:r>
-          </a:p>
-          <a:p>
-            <a:pPr>
+              <a:t>context 전처리 · 표현 계산 · 캐시 준비</a:t>
+            </a:r>
+          </a:p>
+          <a:p>
+            <a:pPr algn="l">
               <a:lnSpc>
                 <a:spcPct val="114000"/>
               </a:lnSpc>
@@ -6679,7 +7241,5030 @@
                 <a:ea typeface="Pretendard"/>
                 <a:cs typeface="Pretendard"/>
               </a:rPr>
-              <a:t>가중치 학습과 구별하여 갱신 시간 측정</a:t>
+              <a:t>XGB 재학습보다 저렴한지는 실측으로 비교</a:t>
+            </a:r>
+          </a:p>
+        </p:txBody>
+      </p:sp>
+      <p:sp>
+        <p:nvSpPr>
+          <p:cNvPr id="11" name="Rectangle 10"/>
+          <p:cNvSpPr/>
+          <p:nvPr/>
+        </p:nvSpPr>
+        <p:spPr>
+          <a:xfrm>
+            <a:off x="0" y="6446520"/>
+            <a:ext cx="12191999" cy="411480"/>
+          </a:xfrm>
+          <a:prstGeom prst="rect">
+            <a:avLst/>
+          </a:prstGeom>
+          <a:solidFill>
+            <a:srgbClr val="00306C"/>
+          </a:solidFill>
+          <a:ln>
+            <a:noFill/>
+          </a:ln>
+        </p:spPr>
+        <p:style>
+          <a:lnRef idx="1">
+            <a:schemeClr val="accent1"/>
+          </a:lnRef>
+          <a:fillRef idx="3">
+            <a:schemeClr val="accent1"/>
+          </a:fillRef>
+          <a:effectRef idx="2">
+            <a:schemeClr val="accent1"/>
+          </a:effectRef>
+          <a:fontRef idx="minor">
+            <a:schemeClr val="lt1"/>
+          </a:fontRef>
+        </p:style>
+        <p:txBody>
+          <a:bodyPr rtlCol="0" anchor="ctr"/>
+          <a:lstStyle/>
+          <a:p>
+            <a:pPr algn="ctr"/>
+          </a:p>
+        </p:txBody>
+      </p:sp>
+      <p:sp>
+        <p:nvSpPr>
+          <p:cNvPr id="12" name="TextBox 11"/>
+          <p:cNvSpPr txBox="1"/>
+          <p:nvPr/>
+        </p:nvSpPr>
+        <p:spPr>
+          <a:xfrm>
+            <a:off x="566928" y="6528816"/>
+            <a:ext cx="9738360" cy="214853"/>
+          </a:xfrm>
+          <a:prstGeom prst="rect">
+            <a:avLst/>
+          </a:prstGeom>
+          <a:noFill/>
+        </p:spPr>
+        <p:txBody>
+          <a:bodyPr wrap="none" anchor="t" lIns="0" rIns="0" tIns="0" bIns="0">
+            <a:noAutofit/>
+          </a:bodyPr>
+          <a:lstStyle/>
+          <a:p>
+            <a:pPr algn="l">
+              <a:lnSpc>
+                <a:spcPct val="114000"/>
+              </a:lnSpc>
+              <a:spcBef>
+                <a:spcPts val="0"/>
+              </a:spcBef>
+              <a:spcAft>
+                <a:spcPts val="0"/>
+              </a:spcAft>
+            </a:pPr>
+            <a:r>
+              <a:rPr sz="1400" b="0" lang="ko-KR">
+                <a:solidFill>
+                  <a:srgbClr val="FFFFFF"/>
+                </a:solidFill>
+                <a:latin typeface="Pretendard"/>
+                <a:ea typeface="Pretendard"/>
+                <a:cs typeface="Pretendard"/>
+              </a:rPr>
+              <a:t>가중치 추가 학습의 부재와 낮은 갱신 비용을 구별한 비교</a:t>
+            </a:r>
+          </a:p>
+        </p:txBody>
+      </p:sp>
+      <p:sp>
+        <p:nvSpPr>
+          <p:cNvPr id="13" name="TextBox 12"/>
+          <p:cNvSpPr txBox="1"/>
+          <p:nvPr/>
+        </p:nvSpPr>
+        <p:spPr>
+          <a:xfrm>
+            <a:off x="10469880" y="6537960"/>
+            <a:ext cx="1143000" cy="201168"/>
+          </a:xfrm>
+          <a:prstGeom prst="rect">
+            <a:avLst/>
+          </a:prstGeom>
+          <a:noFill/>
+        </p:spPr>
+        <p:txBody>
+          <a:bodyPr wrap="none" anchor="t" lIns="0" rIns="0" tIns="0" bIns="0">
+            <a:noAutofit/>
+          </a:bodyPr>
+          <a:lstStyle/>
+          <a:p>
+            <a:pPr algn="r">
+              <a:lnSpc>
+                <a:spcPct val="114000"/>
+              </a:lnSpc>
+              <a:spcBef>
+                <a:spcPts val="0"/>
+              </a:spcBef>
+              <a:spcAft>
+                <a:spcPts val="0"/>
+              </a:spcAft>
+            </a:pPr>
+            <a:r>
+              <a:rPr sz="1200" b="0" lang="ko-KR">
+                <a:solidFill>
+                  <a:srgbClr val="FFFFFF"/>
+                </a:solidFill>
+                <a:latin typeface="Pretendard"/>
+                <a:ea typeface="Pretendard"/>
+                <a:cs typeface="Pretendard"/>
+              </a:rPr>
+              <a:t>02   4</a:t>
+            </a:r>
+          </a:p>
+        </p:txBody>
+      </p:sp>
+    </p:spTree>
+  </p:cSld>
+  <p:clrMapOvr>
+    <a:masterClrMapping/>
+  </p:clrMapOvr>
+</p:sld>
+</file>
+
+<file path=ppt/slides/slide5.xml><?xml version="1.0" encoding="utf-8"?>
+<p:sld xmlns:a="http://schemas.openxmlformats.org/drawingml/2006/main" xmlns:p="http://schemas.openxmlformats.org/presentationml/2006/main" xmlns:r="http://schemas.openxmlformats.org/officeDocument/2006/relationships">
+  <p:cSld>
+    <p:spTree>
+      <p:nvGrpSpPr>
+        <p:cNvPr id="1" name=""/>
+        <p:cNvGrpSpPr/>
+        <p:nvPr/>
+      </p:nvGrpSpPr>
+      <p:grpSpPr/>
+      <p:sp>
+        <p:nvSpPr>
+          <p:cNvPr id="2" name="TextBox 1"/>
+          <p:cNvSpPr txBox="1"/>
+          <p:nvPr/>
+        </p:nvSpPr>
+        <p:spPr>
+          <a:xfrm>
+            <a:off x="548640" y="301752"/>
+            <a:ext cx="11064240" cy="521207"/>
+          </a:xfrm>
+          <a:prstGeom prst="rect">
+            <a:avLst/>
+          </a:prstGeom>
+          <a:noFill/>
+        </p:spPr>
+        <p:txBody>
+          <a:bodyPr wrap="none" anchor="t" lIns="0" rIns="0" tIns="0" bIns="0">
+            <a:noAutofit/>
+          </a:bodyPr>
+          <a:lstStyle/>
+          <a:p>
+            <a:pPr algn="l">
+              <a:lnSpc>
+                <a:spcPct val="114000"/>
+              </a:lnSpc>
+              <a:spcBef>
+                <a:spcPts val="0"/>
+              </a:spcBef>
+              <a:spcAft>
+                <a:spcPts val="0"/>
+              </a:spcAft>
+            </a:pPr>
+            <a:r>
+              <a:rPr sz="3000" b="1" lang="ko-KR">
+                <a:solidFill>
+                  <a:srgbClr val="00306C"/>
+                </a:solidFill>
+                <a:latin typeface="Pretendard"/>
+                <a:ea typeface="Pretendard"/>
+                <a:cs typeface="Pretendard"/>
+              </a:rPr>
+              <a:t>평가 데이터 구성 · 출처와 제공 사례의 구분</a:t>
+            </a:r>
+          </a:p>
+        </p:txBody>
+      </p:sp>
+      <p:sp>
+        <p:nvSpPr>
+          <p:cNvPr id="3" name="TextBox 2"/>
+          <p:cNvSpPr txBox="1"/>
+          <p:nvPr/>
+        </p:nvSpPr>
+        <p:spPr>
+          <a:xfrm>
+            <a:off x="566928" y="1005840"/>
+            <a:ext cx="10972800" cy="613867"/>
+          </a:xfrm>
+          <a:prstGeom prst="rect">
+            <a:avLst/>
+          </a:prstGeom>
+          <a:noFill/>
+        </p:spPr>
+        <p:txBody>
+          <a:bodyPr wrap="none" anchor="t" lIns="0" rIns="0" tIns="0" bIns="0">
+            <a:noAutofit/>
+          </a:bodyPr>
+          <a:lstStyle/>
+          <a:p>
+            <a:pPr algn="l">
+              <a:lnSpc>
+                <a:spcPct val="114000"/>
+              </a:lnSpc>
+              <a:spcBef>
+                <a:spcPts val="0"/>
+              </a:spcBef>
+              <a:spcAft>
+                <a:spcPts val="0"/>
+              </a:spcAft>
+            </a:pPr>
+            <a:r>
+              <a:rPr sz="2000" b="0" lang="ko-KR">
+                <a:solidFill>
+                  <a:srgbClr val="20262E"/>
+                </a:solidFill>
+                <a:latin typeface="Pretendard"/>
+                <a:ea typeface="Pretendard"/>
+                <a:cs typeface="Pretendard"/>
+              </a:rPr>
+              <a:t>한 행 = 실제 수집된 통신 기록의 특징 + 정상/공격 라벨</a:t>
+            </a:r>
+          </a:p>
+          <a:p>
+            <a:pPr algn="l">
+              <a:lnSpc>
+                <a:spcPct val="114000"/>
+              </a:lnSpc>
+              <a:spcBef>
+                <a:spcPts val="0"/>
+              </a:spcBef>
+              <a:spcAft>
+                <a:spcPts val="0"/>
+              </a:spcAft>
+            </a:pPr>
+            <a:r>
+              <a:rPr sz="2000" b="0" lang="ko-KR">
+                <a:solidFill>
+                  <a:srgbClr val="20262E"/>
+                </a:solidFill>
+                <a:latin typeface="Pretendard"/>
+                <a:ea typeface="Pretendard"/>
+                <a:cs typeface="Pretendard"/>
+              </a:rPr>
+              <a:t>각 벤치마크를 별도로 정제·분리한 뒤 같은 출처 안에서 사례 선택</a:t>
+            </a:r>
+          </a:p>
+        </p:txBody>
+      </p:sp>
+      <p:sp>
+        <p:nvSpPr>
+          <p:cNvPr id="4" name="Rectangle 3"/>
+          <p:cNvSpPr/>
+          <p:nvPr/>
+        </p:nvSpPr>
+        <p:spPr>
+          <a:xfrm>
+            <a:off x="566928" y="2066543"/>
+            <a:ext cx="1892807" cy="969264"/>
+          </a:xfrm>
+          <a:prstGeom prst="rect">
+            <a:avLst/>
+          </a:prstGeom>
+          <a:solidFill>
+            <a:srgbClr val="F1F5F9"/>
+          </a:solidFill>
+          <a:ln>
+            <a:noFill/>
+          </a:ln>
+        </p:spPr>
+        <p:style>
+          <a:lnRef idx="1">
+            <a:schemeClr val="accent1"/>
+          </a:lnRef>
+          <a:fillRef idx="3">
+            <a:schemeClr val="accent1"/>
+          </a:fillRef>
+          <a:effectRef idx="2">
+            <a:schemeClr val="accent1"/>
+          </a:effectRef>
+          <a:fontRef idx="minor">
+            <a:schemeClr val="lt1"/>
+          </a:fontRef>
+        </p:style>
+        <p:txBody>
+          <a:bodyPr rtlCol="0" anchor="ctr"/>
+          <a:lstStyle/>
+          <a:p>
+            <a:pPr algn="ctr"/>
+          </a:p>
+        </p:txBody>
+      </p:sp>
+      <p:sp>
+        <p:nvSpPr>
+          <p:cNvPr id="5" name="TextBox 4"/>
+          <p:cNvSpPr txBox="1"/>
+          <p:nvPr/>
+        </p:nvSpPr>
+        <p:spPr>
+          <a:xfrm>
+            <a:off x="731520" y="2368296"/>
+            <a:ext cx="1581912" cy="337626"/>
+          </a:xfrm>
+          <a:prstGeom prst="rect">
+            <a:avLst/>
+          </a:prstGeom>
+          <a:noFill/>
+        </p:spPr>
+        <p:txBody>
+          <a:bodyPr wrap="none" anchor="t" lIns="0" rIns="0" tIns="0" bIns="0">
+            <a:noAutofit/>
+          </a:bodyPr>
+          <a:lstStyle/>
+          <a:p>
+            <a:pPr algn="l">
+              <a:lnSpc>
+                <a:spcPct val="114000"/>
+              </a:lnSpc>
+              <a:spcBef>
+                <a:spcPts val="0"/>
+              </a:spcBef>
+              <a:spcAft>
+                <a:spcPts val="0"/>
+              </a:spcAft>
+            </a:pPr>
+            <a:r>
+              <a:rPr sz="2200" b="1" lang="ko-KR">
+                <a:solidFill>
+                  <a:srgbClr val="00306C"/>
+                </a:solidFill>
+                <a:latin typeface="Pretendard"/>
+                <a:ea typeface="Pretendard"/>
+                <a:cs typeface="Pretendard"/>
+              </a:rPr>
+              <a:t>CIC2018</a:t>
+            </a:r>
+          </a:p>
+        </p:txBody>
+      </p:sp>
+      <p:sp>
+        <p:nvSpPr>
+          <p:cNvPr id="6" name="Right Arrow 5"/>
+          <p:cNvSpPr/>
+          <p:nvPr/>
+        </p:nvSpPr>
+        <p:spPr>
+          <a:xfrm>
+            <a:off x="2651760" y="2414015"/>
+            <a:ext cx="365760" cy="256032"/>
+          </a:xfrm>
+          <a:prstGeom prst="rightArrow">
+            <a:avLst/>
+          </a:prstGeom>
+          <a:solidFill>
+            <a:srgbClr val="007BC6"/>
+          </a:solidFill>
+          <a:ln>
+            <a:noFill/>
+          </a:ln>
+        </p:spPr>
+        <p:style>
+          <a:lnRef idx="1">
+            <a:schemeClr val="accent1"/>
+          </a:lnRef>
+          <a:fillRef idx="3">
+            <a:schemeClr val="accent1"/>
+          </a:fillRef>
+          <a:effectRef idx="2">
+            <a:schemeClr val="accent1"/>
+          </a:effectRef>
+          <a:fontRef idx="minor">
+            <a:schemeClr val="lt1"/>
+          </a:fontRef>
+        </p:style>
+        <p:txBody>
+          <a:bodyPr rtlCol="0" anchor="ctr"/>
+          <a:lstStyle/>
+          <a:p>
+            <a:pPr algn="ctr"/>
+          </a:p>
+        </p:txBody>
+      </p:sp>
+      <p:sp>
+        <p:nvSpPr>
+          <p:cNvPr id="7" name="Rectangle 6"/>
+          <p:cNvSpPr/>
+          <p:nvPr/>
+        </p:nvSpPr>
+        <p:spPr>
+          <a:xfrm>
+            <a:off x="3236976" y="2066543"/>
+            <a:ext cx="3822191" cy="969264"/>
+          </a:xfrm>
+          <a:prstGeom prst="rect">
+            <a:avLst/>
+          </a:prstGeom>
+          <a:solidFill>
+            <a:srgbClr val="F1F5F9"/>
+          </a:solidFill>
+          <a:ln>
+            <a:noFill/>
+          </a:ln>
+        </p:spPr>
+        <p:style>
+          <a:lnRef idx="1">
+            <a:schemeClr val="accent1"/>
+          </a:lnRef>
+          <a:fillRef idx="3">
+            <a:schemeClr val="accent1"/>
+          </a:fillRef>
+          <a:effectRef idx="2">
+            <a:schemeClr val="accent1"/>
+          </a:effectRef>
+          <a:fontRef idx="minor">
+            <a:schemeClr val="lt1"/>
+          </a:fontRef>
+        </p:style>
+        <p:txBody>
+          <a:bodyPr rtlCol="0" anchor="ctr"/>
+          <a:lstStyle/>
+          <a:p>
+            <a:pPr algn="ctr"/>
+          </a:p>
+        </p:txBody>
+      </p:sp>
+      <p:sp>
+        <p:nvSpPr>
+          <p:cNvPr id="8" name="TextBox 7"/>
+          <p:cNvSpPr txBox="1"/>
+          <p:nvPr/>
+        </p:nvSpPr>
+        <p:spPr>
+          <a:xfrm>
+            <a:off x="3410712" y="2203703"/>
+            <a:ext cx="3474720" cy="292608"/>
+          </a:xfrm>
+          <a:prstGeom prst="rect">
+            <a:avLst/>
+          </a:prstGeom>
+          <a:noFill/>
+        </p:spPr>
+        <p:txBody>
+          <a:bodyPr wrap="none" anchor="t" lIns="0" rIns="0" tIns="0" bIns="0">
+            <a:noAutofit/>
+          </a:bodyPr>
+          <a:lstStyle/>
+          <a:p>
+            <a:pPr algn="l">
+              <a:lnSpc>
+                <a:spcPct val="114000"/>
+              </a:lnSpc>
+              <a:spcBef>
+                <a:spcPts val="0"/>
+              </a:spcBef>
+              <a:spcAft>
+                <a:spcPts val="0"/>
+              </a:spcAft>
+            </a:pPr>
+            <a:r>
+              <a:rPr sz="1900" b="1" lang="ko-KR">
+                <a:solidFill>
+                  <a:srgbClr val="007BC6"/>
+                </a:solidFill>
+                <a:latin typeface="Pretendard"/>
+                <a:ea typeface="Pretendard"/>
+                <a:cs typeface="Pretendard"/>
+              </a:rPr>
+              <a:t>Train · 학습 후보 집합</a:t>
+            </a:r>
+          </a:p>
+        </p:txBody>
+      </p:sp>
+      <p:sp>
+        <p:nvSpPr>
+          <p:cNvPr id="9" name="TextBox 8"/>
+          <p:cNvSpPr txBox="1"/>
+          <p:nvPr/>
+        </p:nvSpPr>
+        <p:spPr>
+          <a:xfrm>
+            <a:off x="3410712" y="2642615"/>
+            <a:ext cx="3474720" cy="265176"/>
+          </a:xfrm>
+          <a:prstGeom prst="rect">
+            <a:avLst/>
+          </a:prstGeom>
+          <a:noFill/>
+        </p:spPr>
+        <p:txBody>
+          <a:bodyPr wrap="none" anchor="t" lIns="0" rIns="0" tIns="0" bIns="0">
+            <a:noAutofit/>
+          </a:bodyPr>
+          <a:lstStyle/>
+          <a:p>
+            <a:pPr algn="l">
+              <a:lnSpc>
+                <a:spcPct val="114000"/>
+              </a:lnSpc>
+              <a:spcBef>
+                <a:spcPts val="0"/>
+              </a:spcBef>
+              <a:spcAft>
+                <a:spcPts val="0"/>
+              </a:spcAft>
+            </a:pPr>
+            <a:r>
+              <a:rPr sz="1600" b="0" lang="ko-KR">
+                <a:solidFill>
+                  <a:srgbClr val="20262E"/>
+                </a:solidFill>
+                <a:latin typeface="Pretendard"/>
+                <a:ea typeface="Pretendard"/>
+                <a:cs typeface="Pretendard"/>
+              </a:rPr>
+              <a:t>초기 사례 → 신규 공격 사례 선택</a:t>
+            </a:r>
+          </a:p>
+        </p:txBody>
+      </p:sp>
+      <p:sp>
+        <p:nvSpPr>
+          <p:cNvPr id="10" name="Rectangle 9"/>
+          <p:cNvSpPr/>
+          <p:nvPr/>
+        </p:nvSpPr>
+        <p:spPr>
+          <a:xfrm>
+            <a:off x="7397496" y="2066543"/>
+            <a:ext cx="4197096" cy="969264"/>
+          </a:xfrm>
+          <a:prstGeom prst="rect">
+            <a:avLst/>
+          </a:prstGeom>
+          <a:solidFill>
+            <a:srgbClr val="F1F5F9"/>
+          </a:solidFill>
+          <a:ln>
+            <a:noFill/>
+          </a:ln>
+        </p:spPr>
+        <p:style>
+          <a:lnRef idx="1">
+            <a:schemeClr val="accent1"/>
+          </a:lnRef>
+          <a:fillRef idx="3">
+            <a:schemeClr val="accent1"/>
+          </a:fillRef>
+          <a:effectRef idx="2">
+            <a:schemeClr val="accent1"/>
+          </a:effectRef>
+          <a:fontRef idx="minor">
+            <a:schemeClr val="lt1"/>
+          </a:fontRef>
+        </p:style>
+        <p:txBody>
+          <a:bodyPr rtlCol="0" anchor="ctr"/>
+          <a:lstStyle/>
+          <a:p>
+            <a:pPr algn="ctr"/>
+          </a:p>
+        </p:txBody>
+      </p:sp>
+      <p:sp>
+        <p:nvSpPr>
+          <p:cNvPr id="11" name="TextBox 10"/>
+          <p:cNvSpPr txBox="1"/>
+          <p:nvPr/>
+        </p:nvSpPr>
+        <p:spPr>
+          <a:xfrm>
+            <a:off x="7571231" y="2203703"/>
+            <a:ext cx="3849624" cy="292608"/>
+          </a:xfrm>
+          <a:prstGeom prst="rect">
+            <a:avLst/>
+          </a:prstGeom>
+          <a:noFill/>
+        </p:spPr>
+        <p:txBody>
+          <a:bodyPr wrap="none" anchor="t" lIns="0" rIns="0" tIns="0" bIns="0">
+            <a:noAutofit/>
+          </a:bodyPr>
+          <a:lstStyle/>
+          <a:p>
+            <a:pPr algn="l">
+              <a:lnSpc>
+                <a:spcPct val="114000"/>
+              </a:lnSpc>
+              <a:spcBef>
+                <a:spcPts val="0"/>
+              </a:spcBef>
+              <a:spcAft>
+                <a:spcPts val="0"/>
+              </a:spcAft>
+            </a:pPr>
+            <a:r>
+              <a:rPr sz="1900" b="1" lang="ko-KR">
+                <a:solidFill>
+                  <a:srgbClr val="007BC6"/>
+                </a:solidFill>
+                <a:latin typeface="Pretendard"/>
+                <a:ea typeface="Pretendard"/>
+                <a:cs typeface="Pretendard"/>
+              </a:rPr>
+              <a:t>Test · 고정 평가 집합</a:t>
+            </a:r>
+          </a:p>
+        </p:txBody>
+      </p:sp>
+      <p:sp>
+        <p:nvSpPr>
+          <p:cNvPr id="12" name="TextBox 11"/>
+          <p:cNvSpPr txBox="1"/>
+          <p:nvPr/>
+        </p:nvSpPr>
+        <p:spPr>
+          <a:xfrm>
+            <a:off x="7571231" y="2642615"/>
+            <a:ext cx="3849624" cy="265176"/>
+          </a:xfrm>
+          <a:prstGeom prst="rect">
+            <a:avLst/>
+          </a:prstGeom>
+          <a:noFill/>
+        </p:spPr>
+        <p:txBody>
+          <a:bodyPr wrap="none" anchor="t" lIns="0" rIns="0" tIns="0" bIns="0">
+            <a:noAutofit/>
+          </a:bodyPr>
+          <a:lstStyle/>
+          <a:p>
+            <a:pPr algn="l">
+              <a:lnSpc>
+                <a:spcPct val="114000"/>
+              </a:lnSpc>
+              <a:spcBef>
+                <a:spcPts val="0"/>
+              </a:spcBef>
+              <a:spcAft>
+                <a:spcPts val="0"/>
+              </a:spcAft>
+            </a:pPr>
+            <a:r>
+              <a:rPr sz="1600" b="0" lang="ko-KR">
+                <a:solidFill>
+                  <a:srgbClr val="20262E"/>
+                </a:solidFill>
+                <a:latin typeface="Pretendard"/>
+                <a:ea typeface="Pretendard"/>
+                <a:cs typeface="Pretendard"/>
+              </a:rPr>
+              <a:t>3,042,473개 · 갱신에 미사용</a:t>
+            </a:r>
+          </a:p>
+        </p:txBody>
+      </p:sp>
+      <p:sp>
+        <p:nvSpPr>
+          <p:cNvPr id="13" name="Rectangle 12"/>
+          <p:cNvSpPr/>
+          <p:nvPr/>
+        </p:nvSpPr>
+        <p:spPr>
+          <a:xfrm>
+            <a:off x="566928" y="3346703"/>
+            <a:ext cx="1892807" cy="969264"/>
+          </a:xfrm>
+          <a:prstGeom prst="rect">
+            <a:avLst/>
+          </a:prstGeom>
+          <a:solidFill>
+            <a:srgbClr val="F1F5F9"/>
+          </a:solidFill>
+          <a:ln>
+            <a:noFill/>
+          </a:ln>
+        </p:spPr>
+        <p:style>
+          <a:lnRef idx="1">
+            <a:schemeClr val="accent1"/>
+          </a:lnRef>
+          <a:fillRef idx="3">
+            <a:schemeClr val="accent1"/>
+          </a:fillRef>
+          <a:effectRef idx="2">
+            <a:schemeClr val="accent1"/>
+          </a:effectRef>
+          <a:fontRef idx="minor">
+            <a:schemeClr val="lt1"/>
+          </a:fontRef>
+        </p:style>
+        <p:txBody>
+          <a:bodyPr rtlCol="0" anchor="ctr"/>
+          <a:lstStyle/>
+          <a:p>
+            <a:pPr algn="ctr"/>
+          </a:p>
+        </p:txBody>
+      </p:sp>
+      <p:sp>
+        <p:nvSpPr>
+          <p:cNvPr id="14" name="TextBox 13"/>
+          <p:cNvSpPr txBox="1"/>
+          <p:nvPr/>
+        </p:nvSpPr>
+        <p:spPr>
+          <a:xfrm>
+            <a:off x="731520" y="3648456"/>
+            <a:ext cx="1581912" cy="337626"/>
+          </a:xfrm>
+          <a:prstGeom prst="rect">
+            <a:avLst/>
+          </a:prstGeom>
+          <a:noFill/>
+        </p:spPr>
+        <p:txBody>
+          <a:bodyPr wrap="none" anchor="t" lIns="0" rIns="0" tIns="0" bIns="0">
+            <a:noAutofit/>
+          </a:bodyPr>
+          <a:lstStyle/>
+          <a:p>
+            <a:pPr algn="l">
+              <a:lnSpc>
+                <a:spcPct val="114000"/>
+              </a:lnSpc>
+              <a:spcBef>
+                <a:spcPts val="0"/>
+              </a:spcBef>
+              <a:spcAft>
+                <a:spcPts val="0"/>
+              </a:spcAft>
+            </a:pPr>
+            <a:r>
+              <a:rPr sz="2200" b="1" lang="ko-KR">
+                <a:solidFill>
+                  <a:srgbClr val="00306C"/>
+                </a:solidFill>
+                <a:latin typeface="Pretendard"/>
+                <a:ea typeface="Pretendard"/>
+                <a:cs typeface="Pretendard"/>
+              </a:rPr>
+              <a:t>ToN-IoT</a:t>
+            </a:r>
+          </a:p>
+        </p:txBody>
+      </p:sp>
+      <p:sp>
+        <p:nvSpPr>
+          <p:cNvPr id="15" name="Right Arrow 14"/>
+          <p:cNvSpPr/>
+          <p:nvPr/>
+        </p:nvSpPr>
+        <p:spPr>
+          <a:xfrm>
+            <a:off x="2651760" y="3694176"/>
+            <a:ext cx="365760" cy="256032"/>
+          </a:xfrm>
+          <a:prstGeom prst="rightArrow">
+            <a:avLst/>
+          </a:prstGeom>
+          <a:solidFill>
+            <a:srgbClr val="007BC6"/>
+          </a:solidFill>
+          <a:ln>
+            <a:noFill/>
+          </a:ln>
+        </p:spPr>
+        <p:style>
+          <a:lnRef idx="1">
+            <a:schemeClr val="accent1"/>
+          </a:lnRef>
+          <a:fillRef idx="3">
+            <a:schemeClr val="accent1"/>
+          </a:fillRef>
+          <a:effectRef idx="2">
+            <a:schemeClr val="accent1"/>
+          </a:effectRef>
+          <a:fontRef idx="minor">
+            <a:schemeClr val="lt1"/>
+          </a:fontRef>
+        </p:style>
+        <p:txBody>
+          <a:bodyPr rtlCol="0" anchor="ctr"/>
+          <a:lstStyle/>
+          <a:p>
+            <a:pPr algn="ctr"/>
+          </a:p>
+        </p:txBody>
+      </p:sp>
+      <p:sp>
+        <p:nvSpPr>
+          <p:cNvPr id="16" name="Rectangle 15"/>
+          <p:cNvSpPr/>
+          <p:nvPr/>
+        </p:nvSpPr>
+        <p:spPr>
+          <a:xfrm>
+            <a:off x="3236976" y="3346703"/>
+            <a:ext cx="3822191" cy="969264"/>
+          </a:xfrm>
+          <a:prstGeom prst="rect">
+            <a:avLst/>
+          </a:prstGeom>
+          <a:solidFill>
+            <a:srgbClr val="F1F5F9"/>
+          </a:solidFill>
+          <a:ln>
+            <a:noFill/>
+          </a:ln>
+        </p:spPr>
+        <p:style>
+          <a:lnRef idx="1">
+            <a:schemeClr val="accent1"/>
+          </a:lnRef>
+          <a:fillRef idx="3">
+            <a:schemeClr val="accent1"/>
+          </a:fillRef>
+          <a:effectRef idx="2">
+            <a:schemeClr val="accent1"/>
+          </a:effectRef>
+          <a:fontRef idx="minor">
+            <a:schemeClr val="lt1"/>
+          </a:fontRef>
+        </p:style>
+        <p:txBody>
+          <a:bodyPr rtlCol="0" anchor="ctr"/>
+          <a:lstStyle/>
+          <a:p>
+            <a:pPr algn="ctr"/>
+          </a:p>
+        </p:txBody>
+      </p:sp>
+      <p:sp>
+        <p:nvSpPr>
+          <p:cNvPr id="17" name="TextBox 16"/>
+          <p:cNvSpPr txBox="1"/>
+          <p:nvPr/>
+        </p:nvSpPr>
+        <p:spPr>
+          <a:xfrm>
+            <a:off x="3410712" y="3483863"/>
+            <a:ext cx="3474720" cy="292608"/>
+          </a:xfrm>
+          <a:prstGeom prst="rect">
+            <a:avLst/>
+          </a:prstGeom>
+          <a:noFill/>
+        </p:spPr>
+        <p:txBody>
+          <a:bodyPr wrap="none" anchor="t" lIns="0" rIns="0" tIns="0" bIns="0">
+            <a:noAutofit/>
+          </a:bodyPr>
+          <a:lstStyle/>
+          <a:p>
+            <a:pPr algn="l">
+              <a:lnSpc>
+                <a:spcPct val="114000"/>
+              </a:lnSpc>
+              <a:spcBef>
+                <a:spcPts val="0"/>
+              </a:spcBef>
+              <a:spcAft>
+                <a:spcPts val="0"/>
+              </a:spcAft>
+            </a:pPr>
+            <a:r>
+              <a:rPr sz="1900" b="1" lang="ko-KR">
+                <a:solidFill>
+                  <a:srgbClr val="007BC6"/>
+                </a:solidFill>
+                <a:latin typeface="Pretendard"/>
+                <a:ea typeface="Pretendard"/>
+                <a:cs typeface="Pretendard"/>
+              </a:rPr>
+              <a:t>Train · 학습 후보 집합</a:t>
+            </a:r>
+          </a:p>
+        </p:txBody>
+      </p:sp>
+      <p:sp>
+        <p:nvSpPr>
+          <p:cNvPr id="18" name="TextBox 17"/>
+          <p:cNvSpPr txBox="1"/>
+          <p:nvPr/>
+        </p:nvSpPr>
+        <p:spPr>
+          <a:xfrm>
+            <a:off x="3410712" y="3922776"/>
+            <a:ext cx="3474720" cy="265176"/>
+          </a:xfrm>
+          <a:prstGeom prst="rect">
+            <a:avLst/>
+          </a:prstGeom>
+          <a:noFill/>
+        </p:spPr>
+        <p:txBody>
+          <a:bodyPr wrap="none" anchor="t" lIns="0" rIns="0" tIns="0" bIns="0">
+            <a:noAutofit/>
+          </a:bodyPr>
+          <a:lstStyle/>
+          <a:p>
+            <a:pPr algn="l">
+              <a:lnSpc>
+                <a:spcPct val="114000"/>
+              </a:lnSpc>
+              <a:spcBef>
+                <a:spcPts val="0"/>
+              </a:spcBef>
+              <a:spcAft>
+                <a:spcPts val="0"/>
+              </a:spcAft>
+            </a:pPr>
+            <a:r>
+              <a:rPr sz="1600" b="0" lang="ko-KR">
+                <a:solidFill>
+                  <a:srgbClr val="20262E"/>
+                </a:solidFill>
+                <a:latin typeface="Pretendard"/>
+                <a:ea typeface="Pretendard"/>
+                <a:cs typeface="Pretendard"/>
+              </a:rPr>
+              <a:t>초기 사례 → 신규 공격 사례 선택</a:t>
+            </a:r>
+          </a:p>
+        </p:txBody>
+      </p:sp>
+      <p:sp>
+        <p:nvSpPr>
+          <p:cNvPr id="19" name="Rectangle 18"/>
+          <p:cNvSpPr/>
+          <p:nvPr/>
+        </p:nvSpPr>
+        <p:spPr>
+          <a:xfrm>
+            <a:off x="7397496" y="3346703"/>
+            <a:ext cx="4197096" cy="969264"/>
+          </a:xfrm>
+          <a:prstGeom prst="rect">
+            <a:avLst/>
+          </a:prstGeom>
+          <a:solidFill>
+            <a:srgbClr val="F1F5F9"/>
+          </a:solidFill>
+          <a:ln>
+            <a:noFill/>
+          </a:ln>
+        </p:spPr>
+        <p:style>
+          <a:lnRef idx="1">
+            <a:schemeClr val="accent1"/>
+          </a:lnRef>
+          <a:fillRef idx="3">
+            <a:schemeClr val="accent1"/>
+          </a:fillRef>
+          <a:effectRef idx="2">
+            <a:schemeClr val="accent1"/>
+          </a:effectRef>
+          <a:fontRef idx="minor">
+            <a:schemeClr val="lt1"/>
+          </a:fontRef>
+        </p:style>
+        <p:txBody>
+          <a:bodyPr rtlCol="0" anchor="ctr"/>
+          <a:lstStyle/>
+          <a:p>
+            <a:pPr algn="ctr"/>
+          </a:p>
+        </p:txBody>
+      </p:sp>
+      <p:sp>
+        <p:nvSpPr>
+          <p:cNvPr id="20" name="TextBox 19"/>
+          <p:cNvSpPr txBox="1"/>
+          <p:nvPr/>
+        </p:nvSpPr>
+        <p:spPr>
+          <a:xfrm>
+            <a:off x="7571231" y="3483863"/>
+            <a:ext cx="3849624" cy="292608"/>
+          </a:xfrm>
+          <a:prstGeom prst="rect">
+            <a:avLst/>
+          </a:prstGeom>
+          <a:noFill/>
+        </p:spPr>
+        <p:txBody>
+          <a:bodyPr wrap="none" anchor="t" lIns="0" rIns="0" tIns="0" bIns="0">
+            <a:noAutofit/>
+          </a:bodyPr>
+          <a:lstStyle/>
+          <a:p>
+            <a:pPr algn="l">
+              <a:lnSpc>
+                <a:spcPct val="114000"/>
+              </a:lnSpc>
+              <a:spcBef>
+                <a:spcPts val="0"/>
+              </a:spcBef>
+              <a:spcAft>
+                <a:spcPts val="0"/>
+              </a:spcAft>
+            </a:pPr>
+            <a:r>
+              <a:rPr sz="1900" b="1" lang="ko-KR">
+                <a:solidFill>
+                  <a:srgbClr val="007BC6"/>
+                </a:solidFill>
+                <a:latin typeface="Pretendard"/>
+                <a:ea typeface="Pretendard"/>
+                <a:cs typeface="Pretendard"/>
+              </a:rPr>
+              <a:t>Test · 고정 평가 집합</a:t>
+            </a:r>
+          </a:p>
+        </p:txBody>
+      </p:sp>
+      <p:sp>
+        <p:nvSpPr>
+          <p:cNvPr id="21" name="TextBox 20"/>
+          <p:cNvSpPr txBox="1"/>
+          <p:nvPr/>
+        </p:nvSpPr>
+        <p:spPr>
+          <a:xfrm>
+            <a:off x="7571231" y="3922776"/>
+            <a:ext cx="3849624" cy="265176"/>
+          </a:xfrm>
+          <a:prstGeom prst="rect">
+            <a:avLst/>
+          </a:prstGeom>
+          <a:noFill/>
+        </p:spPr>
+        <p:txBody>
+          <a:bodyPr wrap="none" anchor="t" lIns="0" rIns="0" tIns="0" bIns="0">
+            <a:noAutofit/>
+          </a:bodyPr>
+          <a:lstStyle/>
+          <a:p>
+            <a:pPr algn="l">
+              <a:lnSpc>
+                <a:spcPct val="114000"/>
+              </a:lnSpc>
+              <a:spcBef>
+                <a:spcPts val="0"/>
+              </a:spcBef>
+              <a:spcAft>
+                <a:spcPts val="0"/>
+              </a:spcAft>
+            </a:pPr>
+            <a:r>
+              <a:rPr sz="1600" b="0" lang="ko-KR">
+                <a:solidFill>
+                  <a:srgbClr val="20262E"/>
+                </a:solidFill>
+                <a:latin typeface="Pretendard"/>
+                <a:ea typeface="Pretendard"/>
+                <a:cs typeface="Pretendard"/>
+              </a:rPr>
+              <a:t>2,271,723개 · 갱신에 미사용</a:t>
+            </a:r>
+          </a:p>
+        </p:txBody>
+      </p:sp>
+      <p:sp>
+        <p:nvSpPr>
+          <p:cNvPr id="22" name="TextBox 21"/>
+          <p:cNvSpPr txBox="1"/>
+          <p:nvPr/>
+        </p:nvSpPr>
+        <p:spPr>
+          <a:xfrm>
+            <a:off x="594360" y="4681728"/>
+            <a:ext cx="10972800" cy="356616"/>
+          </a:xfrm>
+          <a:prstGeom prst="rect">
+            <a:avLst/>
+          </a:prstGeom>
+          <a:noFill/>
+        </p:spPr>
+        <p:txBody>
+          <a:bodyPr wrap="none" anchor="t" lIns="0" rIns="0" tIns="0" bIns="0">
+            <a:noAutofit/>
+          </a:bodyPr>
+          <a:lstStyle/>
+          <a:p>
+            <a:pPr algn="l">
+              <a:lnSpc>
+                <a:spcPct val="114000"/>
+              </a:lnSpc>
+              <a:spcBef>
+                <a:spcPts val="0"/>
+              </a:spcBef>
+              <a:spcAft>
+                <a:spcPts val="0"/>
+              </a:spcAft>
+            </a:pPr>
+            <a:r>
+              <a:rPr sz="2000" b="1" lang="ko-KR">
+                <a:solidFill>
+                  <a:srgbClr val="00306C"/>
+                </a:solidFill>
+                <a:latin typeface="Pretendard"/>
+                <a:ea typeface="Pretendard"/>
+                <a:cs typeface="Pretendard"/>
+              </a:rPr>
+              <a:t>CIC 예시 · 초기 1,000개 + 같은 CIC train의 신규 DDoS 100개 = 제공 라벨 1,100개</a:t>
+            </a:r>
+          </a:p>
+        </p:txBody>
+      </p:sp>
+      <p:sp>
+        <p:nvSpPr>
+          <p:cNvPr id="23" name="TextBox 22"/>
+          <p:cNvSpPr txBox="1"/>
+          <p:nvPr/>
+        </p:nvSpPr>
+        <p:spPr>
+          <a:xfrm>
+            <a:off x="594360" y="5349240"/>
+            <a:ext cx="10972800" cy="603504"/>
+          </a:xfrm>
+          <a:prstGeom prst="rect">
+            <a:avLst/>
+          </a:prstGeom>
+          <a:noFill/>
+        </p:spPr>
+        <p:txBody>
+          <a:bodyPr wrap="none" anchor="t" lIns="0" rIns="0" tIns="0" bIns="0">
+            <a:noAutofit/>
+          </a:bodyPr>
+          <a:lstStyle/>
+          <a:p>
+            <a:pPr algn="l">
+              <a:lnSpc>
+                <a:spcPct val="114000"/>
+              </a:lnSpc>
+              <a:spcBef>
+                <a:spcPts val="0"/>
+              </a:spcBef>
+              <a:spcAft>
+                <a:spcPts val="0"/>
+              </a:spcAft>
+            </a:pPr>
+            <a:r>
+              <a:rPr sz="1900" b="0" lang="ko-KR">
+                <a:solidFill>
+                  <a:srgbClr val="20262E"/>
+                </a:solidFill>
+                <a:latin typeface="Pretendard"/>
+                <a:ea typeface="Pretendard"/>
+                <a:cs typeface="Pretendard"/>
+              </a:rPr>
+              <a:t>이 1,100개로 XGB 재학습 / PFN context 구성</a:t>
+            </a:r>
+          </a:p>
+          <a:p>
+            <a:pPr algn="l">
+              <a:lnSpc>
+                <a:spcPct val="114000"/>
+              </a:lnSpc>
+              <a:spcBef>
+                <a:spcPts val="0"/>
+              </a:spcBef>
+              <a:spcAft>
+                <a:spcPts val="0"/>
+              </a:spcAft>
+            </a:pPr>
+            <a:r>
+              <a:rPr sz="1900" b="0" lang="ko-KR">
+                <a:solidFill>
+                  <a:srgbClr val="20262E"/>
+                </a:solidFill>
+                <a:latin typeface="Pretendard"/>
+                <a:ea typeface="Pretendard"/>
+                <a:cs typeface="Pretendard"/>
+              </a:rPr>
+              <a:t>“현재 데이터셋”의 의미 = 현재까지 제공한 라벨 사례 집합</a:t>
+            </a:r>
+          </a:p>
+        </p:txBody>
+      </p:sp>
+      <p:sp>
+        <p:nvSpPr>
+          <p:cNvPr id="24" name="Rectangle 23"/>
+          <p:cNvSpPr/>
+          <p:nvPr/>
+        </p:nvSpPr>
+        <p:spPr>
+          <a:xfrm>
+            <a:off x="0" y="6446520"/>
+            <a:ext cx="12191999" cy="411480"/>
+          </a:xfrm>
+          <a:prstGeom prst="rect">
+            <a:avLst/>
+          </a:prstGeom>
+          <a:solidFill>
+            <a:srgbClr val="00306C"/>
+          </a:solidFill>
+          <a:ln>
+            <a:noFill/>
+          </a:ln>
+        </p:spPr>
+        <p:style>
+          <a:lnRef idx="1">
+            <a:schemeClr val="accent1"/>
+          </a:lnRef>
+          <a:fillRef idx="3">
+            <a:schemeClr val="accent1"/>
+          </a:fillRef>
+          <a:effectRef idx="2">
+            <a:schemeClr val="accent1"/>
+          </a:effectRef>
+          <a:fontRef idx="minor">
+            <a:schemeClr val="lt1"/>
+          </a:fontRef>
+        </p:style>
+        <p:txBody>
+          <a:bodyPr rtlCol="0" anchor="ctr"/>
+          <a:lstStyle/>
+          <a:p>
+            <a:pPr algn="ctr"/>
+          </a:p>
+        </p:txBody>
+      </p:sp>
+      <p:sp>
+        <p:nvSpPr>
+          <p:cNvPr id="25" name="TextBox 24"/>
+          <p:cNvSpPr txBox="1"/>
+          <p:nvPr/>
+        </p:nvSpPr>
+        <p:spPr>
+          <a:xfrm>
+            <a:off x="566928" y="6528816"/>
+            <a:ext cx="9738360" cy="214853"/>
+          </a:xfrm>
+          <a:prstGeom prst="rect">
+            <a:avLst/>
+          </a:prstGeom>
+          <a:noFill/>
+        </p:spPr>
+        <p:txBody>
+          <a:bodyPr wrap="none" anchor="t" lIns="0" rIns="0" tIns="0" bIns="0">
+            <a:noAutofit/>
+          </a:bodyPr>
+          <a:lstStyle/>
+          <a:p>
+            <a:pPr algn="l">
+              <a:lnSpc>
+                <a:spcPct val="114000"/>
+              </a:lnSpc>
+              <a:spcBef>
+                <a:spcPts val="0"/>
+              </a:spcBef>
+              <a:spcAft>
+                <a:spcPts val="0"/>
+              </a:spcAft>
+            </a:pPr>
+            <a:r>
+              <a:rPr sz="1400" b="0" lang="ko-KR">
+                <a:solidFill>
+                  <a:srgbClr val="FFFFFF"/>
+                </a:solidFill>
+                <a:latin typeface="Pretendard"/>
+                <a:ea typeface="Pretendard"/>
+                <a:cs typeface="Pretendard"/>
+              </a:rPr>
+              <a:t>CIC와 ToN의 독립 평가 · 같은 출처의 행을 선택해 라벨 공개 단계만 구성</a:t>
+            </a:r>
+          </a:p>
+        </p:txBody>
+      </p:sp>
+      <p:sp>
+        <p:nvSpPr>
+          <p:cNvPr id="26" name="TextBox 25"/>
+          <p:cNvSpPr txBox="1"/>
+          <p:nvPr/>
+        </p:nvSpPr>
+        <p:spPr>
+          <a:xfrm>
+            <a:off x="10469880" y="6537960"/>
+            <a:ext cx="1143000" cy="201168"/>
+          </a:xfrm>
+          <a:prstGeom prst="rect">
+            <a:avLst/>
+          </a:prstGeom>
+          <a:noFill/>
+        </p:spPr>
+        <p:txBody>
+          <a:bodyPr wrap="none" anchor="t" lIns="0" rIns="0" tIns="0" bIns="0">
+            <a:noAutofit/>
+          </a:bodyPr>
+          <a:lstStyle/>
+          <a:p>
+            <a:pPr algn="r">
+              <a:lnSpc>
+                <a:spcPct val="114000"/>
+              </a:lnSpc>
+              <a:spcBef>
+                <a:spcPts val="0"/>
+              </a:spcBef>
+              <a:spcAft>
+                <a:spcPts val="0"/>
+              </a:spcAft>
+            </a:pPr>
+            <a:r>
+              <a:rPr sz="1200" b="0" lang="ko-KR">
+                <a:solidFill>
+                  <a:srgbClr val="FFFFFF"/>
+                </a:solidFill>
+                <a:latin typeface="Pretendard"/>
+                <a:ea typeface="Pretendard"/>
+                <a:cs typeface="Pretendard"/>
+              </a:rPr>
+              <a:t>03   5</a:t>
+            </a:r>
+          </a:p>
+        </p:txBody>
+      </p:sp>
+    </p:spTree>
+  </p:cSld>
+  <p:clrMapOvr>
+    <a:masterClrMapping/>
+  </p:clrMapOvr>
+</p:sld>
+</file>
+
+<file path=ppt/slides/slide6.xml><?xml version="1.0" encoding="utf-8"?>
+<p:sld xmlns:a="http://schemas.openxmlformats.org/drawingml/2006/main" xmlns:p="http://schemas.openxmlformats.org/presentationml/2006/main" xmlns:r="http://schemas.openxmlformats.org/officeDocument/2006/relationships">
+  <p:cSld>
+    <p:spTree>
+      <p:nvGrpSpPr>
+        <p:cNvPr id="1" name=""/>
+        <p:cNvGrpSpPr/>
+        <p:nvPr/>
+      </p:nvGrpSpPr>
+      <p:grpSpPr/>
+      <p:sp>
+        <p:nvSpPr>
+          <p:cNvPr id="2" name="TextBox 1"/>
+          <p:cNvSpPr txBox="1"/>
+          <p:nvPr/>
+        </p:nvSpPr>
+        <p:spPr>
+          <a:xfrm>
+            <a:off x="548640" y="301752"/>
+            <a:ext cx="11064240" cy="521207"/>
+          </a:xfrm>
+          <a:prstGeom prst="rect">
+            <a:avLst/>
+          </a:prstGeom>
+          <a:noFill/>
+        </p:spPr>
+        <p:txBody>
+          <a:bodyPr wrap="none" anchor="t" lIns="0" rIns="0" tIns="0" bIns="0">
+            <a:noAutofit/>
+          </a:bodyPr>
+          <a:lstStyle/>
+          <a:p>
+            <a:pPr algn="l">
+              <a:lnSpc>
+                <a:spcPct val="114000"/>
+              </a:lnSpc>
+              <a:spcBef>
+                <a:spcPts val="0"/>
+              </a:spcBef>
+              <a:spcAft>
+                <a:spcPts val="0"/>
+              </a:spcAft>
+            </a:pPr>
+            <a:r>
+              <a:rPr sz="3000" b="1" lang="ko-KR">
+                <a:solidFill>
+                  <a:srgbClr val="00306C"/>
+                </a:solidFill>
+                <a:latin typeface="Pretendard"/>
+                <a:ea typeface="Pretendard"/>
+                <a:cs typeface="Pretendard"/>
+              </a:rPr>
+              <a:t>평가 시나리오 · 신규 공격당 라벨 수 n</a:t>
+            </a:r>
+          </a:p>
+        </p:txBody>
+      </p:sp>
+      <p:sp>
+        <p:nvSpPr>
+          <p:cNvPr id="3" name="TextBox 2"/>
+          <p:cNvSpPr txBox="1"/>
+          <p:nvPr/>
+        </p:nvSpPr>
+        <p:spPr>
+          <a:xfrm>
+            <a:off x="566928" y="1005840"/>
+            <a:ext cx="10972800" cy="320040"/>
+          </a:xfrm>
+          <a:prstGeom prst="rect">
+            <a:avLst/>
+          </a:prstGeom>
+          <a:noFill/>
+        </p:spPr>
+        <p:txBody>
+          <a:bodyPr wrap="none" anchor="t" lIns="0" rIns="0" tIns="0" bIns="0">
+            <a:noAutofit/>
+          </a:bodyPr>
+          <a:lstStyle/>
+          <a:p>
+            <a:pPr algn="l">
+              <a:lnSpc>
+                <a:spcPct val="114000"/>
+              </a:lnSpc>
+              <a:spcBef>
+                <a:spcPts val="0"/>
+              </a:spcBef>
+              <a:spcAft>
+                <a:spcPts val="0"/>
+              </a:spcAft>
+            </a:pPr>
+            <a:r>
+              <a:rPr sz="1800" b="0" lang="ko-KR">
+                <a:solidFill>
+                  <a:srgbClr val="617080"/>
+                </a:solidFill>
+                <a:latin typeface="Pretendard"/>
+                <a:ea typeface="Pretendard"/>
+                <a:cs typeface="Pretendard"/>
+              </a:rPr>
+              <a:t>아래 수량 = 해당 단계에 새로 제공한 학습/context 사례 · 공격 도입 단계순</a:t>
+            </a:r>
+          </a:p>
+        </p:txBody>
+      </p:sp>
+      <p:sp>
+        <p:nvSpPr>
+          <p:cNvPr id="4" name="TextBox 3"/>
+          <p:cNvSpPr txBox="1"/>
+          <p:nvPr/>
+        </p:nvSpPr>
+        <p:spPr>
+          <a:xfrm>
+            <a:off x="566928" y="1600200"/>
+            <a:ext cx="5340096" cy="352973"/>
+          </a:xfrm>
+          <a:prstGeom prst="rect">
+            <a:avLst/>
+          </a:prstGeom>
+          <a:noFill/>
+        </p:spPr>
+        <p:txBody>
+          <a:bodyPr wrap="none" anchor="t" lIns="0" rIns="0" tIns="0" bIns="0">
+            <a:noAutofit/>
+          </a:bodyPr>
+          <a:lstStyle/>
+          <a:p>
+            <a:pPr algn="l">
+              <a:lnSpc>
+                <a:spcPct val="114000"/>
+              </a:lnSpc>
+              <a:spcBef>
+                <a:spcPts val="0"/>
+              </a:spcBef>
+              <a:spcAft>
+                <a:spcPts val="0"/>
+              </a:spcAft>
+            </a:pPr>
+            <a:r>
+              <a:rPr sz="2300" b="1" lang="ko-KR">
+                <a:solidFill>
+                  <a:srgbClr val="007BC6"/>
+                </a:solidFill>
+                <a:latin typeface="Pretendard"/>
+                <a:ea typeface="Pretendard"/>
+                <a:cs typeface="Pretendard"/>
+              </a:rPr>
+              <a:t>CIC2018</a:t>
+            </a:r>
+          </a:p>
+        </p:txBody>
+      </p:sp>
+      <p:sp>
+        <p:nvSpPr>
+          <p:cNvPr id="5" name="Rectangle 4"/>
+          <p:cNvSpPr/>
+          <p:nvPr/>
+        </p:nvSpPr>
+        <p:spPr>
+          <a:xfrm>
+            <a:off x="566928" y="2084831"/>
+            <a:ext cx="5340096" cy="420624"/>
+          </a:xfrm>
+          <a:prstGeom prst="rect">
+            <a:avLst/>
+          </a:prstGeom>
+          <a:solidFill>
+            <a:srgbClr val="00306C"/>
+          </a:solidFill>
+          <a:ln>
+            <a:noFill/>
+          </a:ln>
+        </p:spPr>
+        <p:style>
+          <a:lnRef idx="1">
+            <a:schemeClr val="accent1"/>
+          </a:lnRef>
+          <a:fillRef idx="3">
+            <a:schemeClr val="accent1"/>
+          </a:fillRef>
+          <a:effectRef idx="2">
+            <a:schemeClr val="accent1"/>
+          </a:effectRef>
+          <a:fontRef idx="minor">
+            <a:schemeClr val="lt1"/>
+          </a:fontRef>
+        </p:style>
+        <p:txBody>
+          <a:bodyPr rtlCol="0" anchor="ctr"/>
+          <a:lstStyle/>
+          <a:p>
+            <a:pPr algn="ctr"/>
+          </a:p>
+        </p:txBody>
+      </p:sp>
+      <p:sp>
+        <p:nvSpPr>
+          <p:cNvPr id="6" name="TextBox 5"/>
+          <p:cNvSpPr txBox="1"/>
+          <p:nvPr/>
+        </p:nvSpPr>
+        <p:spPr>
+          <a:xfrm>
+            <a:off x="621792" y="2176272"/>
+            <a:ext cx="466344" cy="228600"/>
+          </a:xfrm>
+          <a:prstGeom prst="rect">
+            <a:avLst/>
+          </a:prstGeom>
+          <a:noFill/>
+        </p:spPr>
+        <p:txBody>
+          <a:bodyPr wrap="none" anchor="t" lIns="0" rIns="0" tIns="0" bIns="0">
+            <a:noAutofit/>
+          </a:bodyPr>
+          <a:lstStyle/>
+          <a:p>
+            <a:pPr algn="l">
+              <a:lnSpc>
+                <a:spcPct val="114000"/>
+              </a:lnSpc>
+              <a:spcBef>
+                <a:spcPts val="0"/>
+              </a:spcBef>
+              <a:spcAft>
+                <a:spcPts val="0"/>
+              </a:spcAft>
+            </a:pPr>
+            <a:r>
+              <a:rPr sz="1400" b="1" lang="ko-KR">
+                <a:solidFill>
+                  <a:srgbClr val="FFFFFF"/>
+                </a:solidFill>
+                <a:latin typeface="Pretendard"/>
+                <a:ea typeface="Pretendard"/>
+                <a:cs typeface="Pretendard"/>
+              </a:rPr>
+              <a:t>단계</a:t>
+            </a:r>
+          </a:p>
+        </p:txBody>
+      </p:sp>
+      <p:sp>
+        <p:nvSpPr>
+          <p:cNvPr id="7" name="TextBox 6"/>
+          <p:cNvSpPr txBox="1"/>
+          <p:nvPr/>
+        </p:nvSpPr>
+        <p:spPr>
+          <a:xfrm>
+            <a:off x="1197864" y="2176272"/>
+            <a:ext cx="2276856" cy="228600"/>
+          </a:xfrm>
+          <a:prstGeom prst="rect">
+            <a:avLst/>
+          </a:prstGeom>
+          <a:noFill/>
+        </p:spPr>
+        <p:txBody>
+          <a:bodyPr wrap="none" anchor="t" lIns="0" rIns="0" tIns="0" bIns="0">
+            <a:noAutofit/>
+          </a:bodyPr>
+          <a:lstStyle/>
+          <a:p>
+            <a:pPr algn="l">
+              <a:lnSpc>
+                <a:spcPct val="114000"/>
+              </a:lnSpc>
+              <a:spcBef>
+                <a:spcPts val="0"/>
+              </a:spcBef>
+              <a:spcAft>
+                <a:spcPts val="0"/>
+              </a:spcAft>
+            </a:pPr>
+            <a:r>
+              <a:rPr sz="1400" b="1" lang="ko-KR">
+                <a:solidFill>
+                  <a:srgbClr val="FFFFFF"/>
+                </a:solidFill>
+                <a:latin typeface="Pretendard"/>
+                <a:ea typeface="Pretendard"/>
+                <a:cs typeface="Pretendard"/>
+              </a:rPr>
+              <a:t>새로 제공한 클래스</a:t>
+            </a:r>
+          </a:p>
+        </p:txBody>
+      </p:sp>
+      <p:sp>
+        <p:nvSpPr>
+          <p:cNvPr id="8" name="TextBox 7"/>
+          <p:cNvSpPr txBox="1"/>
+          <p:nvPr/>
+        </p:nvSpPr>
+        <p:spPr>
+          <a:xfrm>
+            <a:off x="3584448" y="2176272"/>
+            <a:ext cx="804672" cy="228600"/>
+          </a:xfrm>
+          <a:prstGeom prst="rect">
+            <a:avLst/>
+          </a:prstGeom>
+          <a:noFill/>
+        </p:spPr>
+        <p:txBody>
+          <a:bodyPr wrap="none" anchor="t" lIns="0" rIns="0" tIns="0" bIns="0">
+            <a:noAutofit/>
+          </a:bodyPr>
+          <a:lstStyle/>
+          <a:p>
+            <a:pPr algn="r">
+              <a:lnSpc>
+                <a:spcPct val="114000"/>
+              </a:lnSpc>
+              <a:spcBef>
+                <a:spcPts val="0"/>
+              </a:spcBef>
+              <a:spcAft>
+                <a:spcPts val="0"/>
+              </a:spcAft>
+            </a:pPr>
+            <a:r>
+              <a:rPr sz="1400" b="1" lang="ko-KR">
+                <a:solidFill>
+                  <a:srgbClr val="FFFFFF"/>
+                </a:solidFill>
+                <a:latin typeface="Pretendard"/>
+                <a:ea typeface="Pretendard"/>
+                <a:cs typeface="Pretendard"/>
+              </a:rPr>
+              <a:t>클래스당</a:t>
+            </a:r>
+          </a:p>
+        </p:txBody>
+      </p:sp>
+      <p:sp>
+        <p:nvSpPr>
+          <p:cNvPr id="9" name="TextBox 8"/>
+          <p:cNvSpPr txBox="1"/>
+          <p:nvPr/>
+        </p:nvSpPr>
+        <p:spPr>
+          <a:xfrm>
+            <a:off x="4498847" y="2176272"/>
+            <a:ext cx="1353312" cy="228600"/>
+          </a:xfrm>
+          <a:prstGeom prst="rect">
+            <a:avLst/>
+          </a:prstGeom>
+          <a:noFill/>
+        </p:spPr>
+        <p:txBody>
+          <a:bodyPr wrap="none" anchor="t" lIns="0" rIns="0" tIns="0" bIns="0">
+            <a:noAutofit/>
+          </a:bodyPr>
+          <a:lstStyle/>
+          <a:p>
+            <a:pPr algn="r">
+              <a:lnSpc>
+                <a:spcPct val="114000"/>
+              </a:lnSpc>
+              <a:spcBef>
+                <a:spcPts val="0"/>
+              </a:spcBef>
+              <a:spcAft>
+                <a:spcPts val="0"/>
+              </a:spcAft>
+            </a:pPr>
+            <a:r>
+              <a:rPr sz="1400" b="1" lang="ko-KR">
+                <a:solidFill>
+                  <a:srgbClr val="FFFFFF"/>
+                </a:solidFill>
+                <a:latin typeface="Pretendard"/>
+                <a:ea typeface="Pretendard"/>
+                <a:cs typeface="Pretendard"/>
+              </a:rPr>
+              <a:t>누적 합계</a:t>
+            </a:r>
+          </a:p>
+        </p:txBody>
+      </p:sp>
+      <p:sp>
+        <p:nvSpPr>
+          <p:cNvPr id="10" name="Rectangle 9"/>
+          <p:cNvSpPr/>
+          <p:nvPr/>
+        </p:nvSpPr>
+        <p:spPr>
+          <a:xfrm>
+            <a:off x="566928" y="2505456"/>
+            <a:ext cx="5340096" cy="868680"/>
+          </a:xfrm>
+          <a:prstGeom prst="rect">
+            <a:avLst/>
+          </a:prstGeom>
+          <a:solidFill>
+            <a:srgbClr val="F1F5F9"/>
+          </a:solidFill>
+          <a:ln>
+            <a:noFill/>
+          </a:ln>
+        </p:spPr>
+        <p:style>
+          <a:lnRef idx="1">
+            <a:schemeClr val="accent1"/>
+          </a:lnRef>
+          <a:fillRef idx="3">
+            <a:schemeClr val="accent1"/>
+          </a:fillRef>
+          <a:effectRef idx="2">
+            <a:schemeClr val="accent1"/>
+          </a:effectRef>
+          <a:fontRef idx="minor">
+            <a:schemeClr val="lt1"/>
+          </a:fontRef>
+        </p:style>
+        <p:txBody>
+          <a:bodyPr rtlCol="0" anchor="ctr"/>
+          <a:lstStyle/>
+          <a:p>
+            <a:pPr algn="ctr"/>
+          </a:p>
+        </p:txBody>
+      </p:sp>
+      <p:sp>
+        <p:nvSpPr>
+          <p:cNvPr id="11" name="TextBox 10"/>
+          <p:cNvSpPr txBox="1"/>
+          <p:nvPr/>
+        </p:nvSpPr>
+        <p:spPr>
+          <a:xfrm>
+            <a:off x="640080" y="2596896"/>
+            <a:ext cx="429768" cy="740664"/>
+          </a:xfrm>
+          <a:prstGeom prst="rect">
+            <a:avLst/>
+          </a:prstGeom>
+          <a:noFill/>
+        </p:spPr>
+        <p:txBody>
+          <a:bodyPr wrap="none" anchor="t" lIns="0" rIns="0" tIns="0" bIns="0">
+            <a:noAutofit/>
+          </a:bodyPr>
+          <a:lstStyle/>
+          <a:p>
+            <a:pPr algn="l">
+              <a:lnSpc>
+                <a:spcPct val="114000"/>
+              </a:lnSpc>
+              <a:spcBef>
+                <a:spcPts val="0"/>
+              </a:spcBef>
+              <a:spcAft>
+                <a:spcPts val="0"/>
+              </a:spcAft>
+            </a:pPr>
+            <a:r>
+              <a:rPr sz="1600" b="0" lang="ko-KR">
+                <a:solidFill>
+                  <a:srgbClr val="20262E"/>
+                </a:solidFill>
+                <a:latin typeface="Pretendard"/>
+                <a:ea typeface="Pretendard"/>
+                <a:cs typeface="Pretendard"/>
+              </a:rPr>
+              <a:t>1</a:t>
+            </a:r>
+          </a:p>
+        </p:txBody>
+      </p:sp>
+      <p:sp>
+        <p:nvSpPr>
+          <p:cNvPr id="12" name="TextBox 11"/>
+          <p:cNvSpPr txBox="1"/>
+          <p:nvPr/>
+        </p:nvSpPr>
+        <p:spPr>
+          <a:xfrm>
+            <a:off x="1216152" y="2596896"/>
+            <a:ext cx="2240279" cy="740664"/>
+          </a:xfrm>
+          <a:prstGeom prst="rect">
+            <a:avLst/>
+          </a:prstGeom>
+          <a:noFill/>
+        </p:spPr>
+        <p:txBody>
+          <a:bodyPr wrap="none" anchor="t" lIns="0" rIns="0" tIns="0" bIns="0">
+            <a:noAutofit/>
+          </a:bodyPr>
+          <a:lstStyle/>
+          <a:p>
+            <a:pPr algn="l">
+              <a:lnSpc>
+                <a:spcPct val="114000"/>
+              </a:lnSpc>
+              <a:spcBef>
+                <a:spcPts val="0"/>
+              </a:spcBef>
+              <a:spcAft>
+                <a:spcPts val="0"/>
+              </a:spcAft>
+            </a:pPr>
+            <a:r>
+              <a:rPr sz="1600" b="0" lang="ko-KR">
+                <a:solidFill>
+                  <a:srgbClr val="20262E"/>
+                </a:solidFill>
+                <a:latin typeface="Pretendard"/>
+                <a:ea typeface="Pretendard"/>
+                <a:cs typeface="Pretendard"/>
+              </a:rPr>
+              <a:t>Benign</a:t>
+            </a:r>
+          </a:p>
+          <a:p>
+            <a:pPr algn="l">
+              <a:lnSpc>
+                <a:spcPct val="114000"/>
+              </a:lnSpc>
+              <a:spcBef>
+                <a:spcPts val="0"/>
+              </a:spcBef>
+              <a:spcAft>
+                <a:spcPts val="0"/>
+              </a:spcAft>
+            </a:pPr>
+            <a:r>
+              <a:rPr sz="1600" b="0" lang="ko-KR">
+                <a:solidFill>
+                  <a:srgbClr val="20262E"/>
+                </a:solidFill>
+                <a:latin typeface="Pretendard"/>
+                <a:ea typeface="Pretendard"/>
+                <a:cs typeface="Pretendard"/>
+              </a:rPr>
+              <a:t>Brute force</a:t>
+            </a:r>
+          </a:p>
+          <a:p>
+            <a:pPr algn="l">
+              <a:lnSpc>
+                <a:spcPct val="114000"/>
+              </a:lnSpc>
+              <a:spcBef>
+                <a:spcPts val="0"/>
+              </a:spcBef>
+              <a:spcAft>
+                <a:spcPts val="0"/>
+              </a:spcAft>
+            </a:pPr>
+            <a:r>
+              <a:rPr sz="1600" b="0" lang="ko-KR">
+                <a:solidFill>
+                  <a:srgbClr val="20262E"/>
+                </a:solidFill>
+                <a:latin typeface="Pretendard"/>
+                <a:ea typeface="Pretendard"/>
+                <a:cs typeface="Pretendard"/>
+              </a:rPr>
+              <a:t>DoS</a:t>
+            </a:r>
+          </a:p>
+        </p:txBody>
+      </p:sp>
+      <p:sp>
+        <p:nvSpPr>
+          <p:cNvPr id="13" name="TextBox 12"/>
+          <p:cNvSpPr txBox="1"/>
+          <p:nvPr/>
+        </p:nvSpPr>
+        <p:spPr>
+          <a:xfrm>
+            <a:off x="3602736" y="2596896"/>
+            <a:ext cx="768096" cy="740664"/>
+          </a:xfrm>
+          <a:prstGeom prst="rect">
+            <a:avLst/>
+          </a:prstGeom>
+          <a:noFill/>
+        </p:spPr>
+        <p:txBody>
+          <a:bodyPr wrap="none" anchor="t" lIns="0" rIns="0" tIns="0" bIns="0">
+            <a:noAutofit/>
+          </a:bodyPr>
+          <a:lstStyle/>
+          <a:p>
+            <a:pPr algn="r">
+              <a:lnSpc>
+                <a:spcPct val="114000"/>
+              </a:lnSpc>
+              <a:spcBef>
+                <a:spcPts val="0"/>
+              </a:spcBef>
+              <a:spcAft>
+                <a:spcPts val="0"/>
+              </a:spcAft>
+            </a:pPr>
+            <a:r>
+              <a:rPr sz="1600" b="0" lang="ko-KR">
+                <a:solidFill>
+                  <a:srgbClr val="20262E"/>
+                </a:solidFill>
+                <a:latin typeface="Pretendard"/>
+                <a:ea typeface="Pretendard"/>
+                <a:cs typeface="Pretendard"/>
+              </a:rPr>
+              <a:t>750</a:t>
+            </a:r>
+          </a:p>
+          <a:p>
+            <a:pPr algn="r">
+              <a:lnSpc>
+                <a:spcPct val="114000"/>
+              </a:lnSpc>
+              <a:spcBef>
+                <a:spcPts val="0"/>
+              </a:spcBef>
+              <a:spcAft>
+                <a:spcPts val="0"/>
+              </a:spcAft>
+            </a:pPr>
+            <a:r>
+              <a:rPr sz="1600" b="0" lang="ko-KR">
+                <a:solidFill>
+                  <a:srgbClr val="20262E"/>
+                </a:solidFill>
+                <a:latin typeface="Pretendard"/>
+                <a:ea typeface="Pretendard"/>
+                <a:cs typeface="Pretendard"/>
+              </a:rPr>
+              <a:t>125</a:t>
+            </a:r>
+          </a:p>
+          <a:p>
+            <a:pPr algn="r">
+              <a:lnSpc>
+                <a:spcPct val="114000"/>
+              </a:lnSpc>
+              <a:spcBef>
+                <a:spcPts val="0"/>
+              </a:spcBef>
+              <a:spcAft>
+                <a:spcPts val="0"/>
+              </a:spcAft>
+            </a:pPr>
+            <a:r>
+              <a:rPr sz="1600" b="0" lang="ko-KR">
+                <a:solidFill>
+                  <a:srgbClr val="20262E"/>
+                </a:solidFill>
+                <a:latin typeface="Pretendard"/>
+                <a:ea typeface="Pretendard"/>
+                <a:cs typeface="Pretendard"/>
+              </a:rPr>
+              <a:t>125</a:t>
+            </a:r>
+          </a:p>
+        </p:txBody>
+      </p:sp>
+      <p:sp>
+        <p:nvSpPr>
+          <p:cNvPr id="14" name="TextBox 13"/>
+          <p:cNvSpPr txBox="1"/>
+          <p:nvPr/>
+        </p:nvSpPr>
+        <p:spPr>
+          <a:xfrm>
+            <a:off x="4517136" y="2596896"/>
+            <a:ext cx="1316736" cy="740664"/>
+          </a:xfrm>
+          <a:prstGeom prst="rect">
+            <a:avLst/>
+          </a:prstGeom>
+          <a:noFill/>
+        </p:spPr>
+        <p:txBody>
+          <a:bodyPr wrap="none" anchor="t" lIns="0" rIns="0" tIns="0" bIns="0">
+            <a:noAutofit/>
+          </a:bodyPr>
+          <a:lstStyle/>
+          <a:p>
+            <a:pPr algn="r">
+              <a:lnSpc>
+                <a:spcPct val="114000"/>
+              </a:lnSpc>
+              <a:spcBef>
+                <a:spcPts val="0"/>
+              </a:spcBef>
+              <a:spcAft>
+                <a:spcPts val="0"/>
+              </a:spcAft>
+            </a:pPr>
+            <a:r>
+              <a:rPr sz="1600" b="0" lang="ko-KR">
+                <a:solidFill>
+                  <a:srgbClr val="20262E"/>
+                </a:solidFill>
+                <a:latin typeface="Pretendard"/>
+                <a:ea typeface="Pretendard"/>
+                <a:cs typeface="Pretendard"/>
+              </a:rPr>
+              <a:t>1,000</a:t>
+            </a:r>
+          </a:p>
+        </p:txBody>
+      </p:sp>
+      <p:sp>
+        <p:nvSpPr>
+          <p:cNvPr id="15" name="Rectangle 14"/>
+          <p:cNvSpPr/>
+          <p:nvPr/>
+        </p:nvSpPr>
+        <p:spPr>
+          <a:xfrm>
+            <a:off x="566928" y="3374135"/>
+            <a:ext cx="5340096" cy="448056"/>
+          </a:xfrm>
+          <a:prstGeom prst="rect">
+            <a:avLst/>
+          </a:prstGeom>
+          <a:solidFill>
+            <a:srgbClr val="FFFFFF"/>
+          </a:solidFill>
+          <a:ln>
+            <a:noFill/>
+          </a:ln>
+        </p:spPr>
+        <p:style>
+          <a:lnRef idx="1">
+            <a:schemeClr val="accent1"/>
+          </a:lnRef>
+          <a:fillRef idx="3">
+            <a:schemeClr val="accent1"/>
+          </a:fillRef>
+          <a:effectRef idx="2">
+            <a:schemeClr val="accent1"/>
+          </a:effectRef>
+          <a:fontRef idx="minor">
+            <a:schemeClr val="lt1"/>
+          </a:fontRef>
+        </p:style>
+        <p:txBody>
+          <a:bodyPr rtlCol="0" anchor="ctr"/>
+          <a:lstStyle/>
+          <a:p>
+            <a:pPr algn="ctr"/>
+          </a:p>
+        </p:txBody>
+      </p:sp>
+      <p:sp>
+        <p:nvSpPr>
+          <p:cNvPr id="16" name="TextBox 15"/>
+          <p:cNvSpPr txBox="1"/>
+          <p:nvPr/>
+        </p:nvSpPr>
+        <p:spPr>
+          <a:xfrm>
+            <a:off x="640080" y="3465575"/>
+            <a:ext cx="429768" cy="320040"/>
+          </a:xfrm>
+          <a:prstGeom prst="rect">
+            <a:avLst/>
+          </a:prstGeom>
+          <a:noFill/>
+        </p:spPr>
+        <p:txBody>
+          <a:bodyPr wrap="none" anchor="t" lIns="0" rIns="0" tIns="0" bIns="0">
+            <a:noAutofit/>
+          </a:bodyPr>
+          <a:lstStyle/>
+          <a:p>
+            <a:pPr algn="l">
+              <a:lnSpc>
+                <a:spcPct val="114000"/>
+              </a:lnSpc>
+              <a:spcBef>
+                <a:spcPts val="0"/>
+              </a:spcBef>
+              <a:spcAft>
+                <a:spcPts val="0"/>
+              </a:spcAft>
+            </a:pPr>
+            <a:r>
+              <a:rPr sz="1600" b="0" lang="ko-KR">
+                <a:solidFill>
+                  <a:srgbClr val="20262E"/>
+                </a:solidFill>
+                <a:latin typeface="Pretendard"/>
+                <a:ea typeface="Pretendard"/>
+                <a:cs typeface="Pretendard"/>
+              </a:rPr>
+              <a:t>2</a:t>
+            </a:r>
+          </a:p>
+        </p:txBody>
+      </p:sp>
+      <p:sp>
+        <p:nvSpPr>
+          <p:cNvPr id="17" name="TextBox 16"/>
+          <p:cNvSpPr txBox="1"/>
+          <p:nvPr/>
+        </p:nvSpPr>
+        <p:spPr>
+          <a:xfrm>
+            <a:off x="1216152" y="3465575"/>
+            <a:ext cx="2240279" cy="320040"/>
+          </a:xfrm>
+          <a:prstGeom prst="rect">
+            <a:avLst/>
+          </a:prstGeom>
+          <a:noFill/>
+        </p:spPr>
+        <p:txBody>
+          <a:bodyPr wrap="none" anchor="t" lIns="0" rIns="0" tIns="0" bIns="0">
+            <a:noAutofit/>
+          </a:bodyPr>
+          <a:lstStyle/>
+          <a:p>
+            <a:pPr algn="l">
+              <a:lnSpc>
+                <a:spcPct val="114000"/>
+              </a:lnSpc>
+              <a:spcBef>
+                <a:spcPts val="0"/>
+              </a:spcBef>
+              <a:spcAft>
+                <a:spcPts val="0"/>
+              </a:spcAft>
+            </a:pPr>
+            <a:r>
+              <a:rPr sz="1600" b="0" lang="ko-KR">
+                <a:solidFill>
+                  <a:srgbClr val="20262E"/>
+                </a:solidFill>
+                <a:latin typeface="Pretendard"/>
+                <a:ea typeface="Pretendard"/>
+                <a:cs typeface="Pretendard"/>
+              </a:rPr>
+              <a:t>DDoS</a:t>
+            </a:r>
+          </a:p>
+        </p:txBody>
+      </p:sp>
+      <p:sp>
+        <p:nvSpPr>
+          <p:cNvPr id="18" name="TextBox 17"/>
+          <p:cNvSpPr txBox="1"/>
+          <p:nvPr/>
+        </p:nvSpPr>
+        <p:spPr>
+          <a:xfrm>
+            <a:off x="3602736" y="3465575"/>
+            <a:ext cx="768096" cy="320040"/>
+          </a:xfrm>
+          <a:prstGeom prst="rect">
+            <a:avLst/>
+          </a:prstGeom>
+          <a:noFill/>
+        </p:spPr>
+        <p:txBody>
+          <a:bodyPr wrap="none" anchor="t" lIns="0" rIns="0" tIns="0" bIns="0">
+            <a:noAutofit/>
+          </a:bodyPr>
+          <a:lstStyle/>
+          <a:p>
+            <a:pPr algn="r">
+              <a:lnSpc>
+                <a:spcPct val="114000"/>
+              </a:lnSpc>
+              <a:spcBef>
+                <a:spcPts val="0"/>
+              </a:spcBef>
+              <a:spcAft>
+                <a:spcPts val="0"/>
+              </a:spcAft>
+            </a:pPr>
+            <a:r>
+              <a:rPr sz="1600" b="0" lang="ko-KR">
+                <a:solidFill>
+                  <a:srgbClr val="20262E"/>
+                </a:solidFill>
+                <a:latin typeface="Pretendard"/>
+                <a:ea typeface="Pretendard"/>
+                <a:cs typeface="Pretendard"/>
+              </a:rPr>
+              <a:t>n</a:t>
+            </a:r>
+          </a:p>
+        </p:txBody>
+      </p:sp>
+      <p:sp>
+        <p:nvSpPr>
+          <p:cNvPr id="19" name="TextBox 18"/>
+          <p:cNvSpPr txBox="1"/>
+          <p:nvPr/>
+        </p:nvSpPr>
+        <p:spPr>
+          <a:xfrm>
+            <a:off x="4517136" y="3465575"/>
+            <a:ext cx="1316736" cy="320040"/>
+          </a:xfrm>
+          <a:prstGeom prst="rect">
+            <a:avLst/>
+          </a:prstGeom>
+          <a:noFill/>
+        </p:spPr>
+        <p:txBody>
+          <a:bodyPr wrap="none" anchor="t" lIns="0" rIns="0" tIns="0" bIns="0">
+            <a:noAutofit/>
+          </a:bodyPr>
+          <a:lstStyle/>
+          <a:p>
+            <a:pPr algn="r">
+              <a:lnSpc>
+                <a:spcPct val="114000"/>
+              </a:lnSpc>
+              <a:spcBef>
+                <a:spcPts val="0"/>
+              </a:spcBef>
+              <a:spcAft>
+                <a:spcPts val="0"/>
+              </a:spcAft>
+            </a:pPr>
+            <a:r>
+              <a:rPr sz="1600" b="0" lang="ko-KR">
+                <a:solidFill>
+                  <a:srgbClr val="20262E"/>
+                </a:solidFill>
+                <a:latin typeface="Pretendard"/>
+                <a:ea typeface="Pretendard"/>
+                <a:cs typeface="Pretendard"/>
+              </a:rPr>
+              <a:t>1,000 + n</a:t>
+            </a:r>
+          </a:p>
+        </p:txBody>
+      </p:sp>
+      <p:sp>
+        <p:nvSpPr>
+          <p:cNvPr id="20" name="Rectangle 19"/>
+          <p:cNvSpPr/>
+          <p:nvPr/>
+        </p:nvSpPr>
+        <p:spPr>
+          <a:xfrm>
+            <a:off x="566928" y="3822191"/>
+            <a:ext cx="5340096" cy="448056"/>
+          </a:xfrm>
+          <a:prstGeom prst="rect">
+            <a:avLst/>
+          </a:prstGeom>
+          <a:solidFill>
+            <a:srgbClr val="F1F5F9"/>
+          </a:solidFill>
+          <a:ln>
+            <a:noFill/>
+          </a:ln>
+        </p:spPr>
+        <p:style>
+          <a:lnRef idx="1">
+            <a:schemeClr val="accent1"/>
+          </a:lnRef>
+          <a:fillRef idx="3">
+            <a:schemeClr val="accent1"/>
+          </a:fillRef>
+          <a:effectRef idx="2">
+            <a:schemeClr val="accent1"/>
+          </a:effectRef>
+          <a:fontRef idx="minor">
+            <a:schemeClr val="lt1"/>
+          </a:fontRef>
+        </p:style>
+        <p:txBody>
+          <a:bodyPr rtlCol="0" anchor="ctr"/>
+          <a:lstStyle/>
+          <a:p>
+            <a:pPr algn="ctr"/>
+          </a:p>
+        </p:txBody>
+      </p:sp>
+      <p:sp>
+        <p:nvSpPr>
+          <p:cNvPr id="21" name="TextBox 20"/>
+          <p:cNvSpPr txBox="1"/>
+          <p:nvPr/>
+        </p:nvSpPr>
+        <p:spPr>
+          <a:xfrm>
+            <a:off x="640080" y="3913631"/>
+            <a:ext cx="429768" cy="320040"/>
+          </a:xfrm>
+          <a:prstGeom prst="rect">
+            <a:avLst/>
+          </a:prstGeom>
+          <a:noFill/>
+        </p:spPr>
+        <p:txBody>
+          <a:bodyPr wrap="none" anchor="t" lIns="0" rIns="0" tIns="0" bIns="0">
+            <a:noAutofit/>
+          </a:bodyPr>
+          <a:lstStyle/>
+          <a:p>
+            <a:pPr algn="l">
+              <a:lnSpc>
+                <a:spcPct val="114000"/>
+              </a:lnSpc>
+              <a:spcBef>
+                <a:spcPts val="0"/>
+              </a:spcBef>
+              <a:spcAft>
+                <a:spcPts val="0"/>
+              </a:spcAft>
+            </a:pPr>
+            <a:r>
+              <a:rPr sz="1600" b="0" lang="ko-KR">
+                <a:solidFill>
+                  <a:srgbClr val="20262E"/>
+                </a:solidFill>
+                <a:latin typeface="Pretendard"/>
+                <a:ea typeface="Pretendard"/>
+                <a:cs typeface="Pretendard"/>
+              </a:rPr>
+              <a:t>3</a:t>
+            </a:r>
+          </a:p>
+        </p:txBody>
+      </p:sp>
+      <p:sp>
+        <p:nvSpPr>
+          <p:cNvPr id="22" name="TextBox 21"/>
+          <p:cNvSpPr txBox="1"/>
+          <p:nvPr/>
+        </p:nvSpPr>
+        <p:spPr>
+          <a:xfrm>
+            <a:off x="1216152" y="3913631"/>
+            <a:ext cx="2240279" cy="320040"/>
+          </a:xfrm>
+          <a:prstGeom prst="rect">
+            <a:avLst/>
+          </a:prstGeom>
+          <a:noFill/>
+        </p:spPr>
+        <p:txBody>
+          <a:bodyPr wrap="none" anchor="t" lIns="0" rIns="0" tIns="0" bIns="0">
+            <a:noAutofit/>
+          </a:bodyPr>
+          <a:lstStyle/>
+          <a:p>
+            <a:pPr algn="l">
+              <a:lnSpc>
+                <a:spcPct val="114000"/>
+              </a:lnSpc>
+              <a:spcBef>
+                <a:spcPts val="0"/>
+              </a:spcBef>
+              <a:spcAft>
+                <a:spcPts val="0"/>
+              </a:spcAft>
+            </a:pPr>
+            <a:r>
+              <a:rPr sz="1600" b="0" lang="ko-KR">
+                <a:solidFill>
+                  <a:srgbClr val="20262E"/>
+                </a:solidFill>
+                <a:latin typeface="Pretendard"/>
+                <a:ea typeface="Pretendard"/>
+                <a:cs typeface="Pretendard"/>
+              </a:rPr>
+              <a:t>Web attacks</a:t>
+            </a:r>
+          </a:p>
+        </p:txBody>
+      </p:sp>
+      <p:sp>
+        <p:nvSpPr>
+          <p:cNvPr id="23" name="TextBox 22"/>
+          <p:cNvSpPr txBox="1"/>
+          <p:nvPr/>
+        </p:nvSpPr>
+        <p:spPr>
+          <a:xfrm>
+            <a:off x="3602736" y="3913631"/>
+            <a:ext cx="768096" cy="320040"/>
+          </a:xfrm>
+          <a:prstGeom prst="rect">
+            <a:avLst/>
+          </a:prstGeom>
+          <a:noFill/>
+        </p:spPr>
+        <p:txBody>
+          <a:bodyPr wrap="none" anchor="t" lIns="0" rIns="0" tIns="0" bIns="0">
+            <a:noAutofit/>
+          </a:bodyPr>
+          <a:lstStyle/>
+          <a:p>
+            <a:pPr algn="r">
+              <a:lnSpc>
+                <a:spcPct val="114000"/>
+              </a:lnSpc>
+              <a:spcBef>
+                <a:spcPts val="0"/>
+              </a:spcBef>
+              <a:spcAft>
+                <a:spcPts val="0"/>
+              </a:spcAft>
+            </a:pPr>
+            <a:r>
+              <a:rPr sz="1600" b="0" lang="ko-KR">
+                <a:solidFill>
+                  <a:srgbClr val="20262E"/>
+                </a:solidFill>
+                <a:latin typeface="Pretendard"/>
+                <a:ea typeface="Pretendard"/>
+                <a:cs typeface="Pretendard"/>
+              </a:rPr>
+              <a:t>n</a:t>
+            </a:r>
+          </a:p>
+        </p:txBody>
+      </p:sp>
+      <p:sp>
+        <p:nvSpPr>
+          <p:cNvPr id="24" name="TextBox 23"/>
+          <p:cNvSpPr txBox="1"/>
+          <p:nvPr/>
+        </p:nvSpPr>
+        <p:spPr>
+          <a:xfrm>
+            <a:off x="4517136" y="3913631"/>
+            <a:ext cx="1316736" cy="320040"/>
+          </a:xfrm>
+          <a:prstGeom prst="rect">
+            <a:avLst/>
+          </a:prstGeom>
+          <a:noFill/>
+        </p:spPr>
+        <p:txBody>
+          <a:bodyPr wrap="none" anchor="t" lIns="0" rIns="0" tIns="0" bIns="0">
+            <a:noAutofit/>
+          </a:bodyPr>
+          <a:lstStyle/>
+          <a:p>
+            <a:pPr algn="r">
+              <a:lnSpc>
+                <a:spcPct val="114000"/>
+              </a:lnSpc>
+              <a:spcBef>
+                <a:spcPts val="0"/>
+              </a:spcBef>
+              <a:spcAft>
+                <a:spcPts val="0"/>
+              </a:spcAft>
+            </a:pPr>
+            <a:r>
+              <a:rPr sz="1600" b="0" lang="ko-KR">
+                <a:solidFill>
+                  <a:srgbClr val="20262E"/>
+                </a:solidFill>
+                <a:latin typeface="Pretendard"/>
+                <a:ea typeface="Pretendard"/>
+                <a:cs typeface="Pretendard"/>
+              </a:rPr>
+              <a:t>1,000 + 2n</a:t>
+            </a:r>
+          </a:p>
+        </p:txBody>
+      </p:sp>
+      <p:sp>
+        <p:nvSpPr>
+          <p:cNvPr id="25" name="Rectangle 24"/>
+          <p:cNvSpPr/>
+          <p:nvPr/>
+        </p:nvSpPr>
+        <p:spPr>
+          <a:xfrm>
+            <a:off x="566928" y="4270248"/>
+            <a:ext cx="5340096" cy="448056"/>
+          </a:xfrm>
+          <a:prstGeom prst="rect">
+            <a:avLst/>
+          </a:prstGeom>
+          <a:solidFill>
+            <a:srgbClr val="FFFFFF"/>
+          </a:solidFill>
+          <a:ln>
+            <a:noFill/>
+          </a:ln>
+        </p:spPr>
+        <p:style>
+          <a:lnRef idx="1">
+            <a:schemeClr val="accent1"/>
+          </a:lnRef>
+          <a:fillRef idx="3">
+            <a:schemeClr val="accent1"/>
+          </a:fillRef>
+          <a:effectRef idx="2">
+            <a:schemeClr val="accent1"/>
+          </a:effectRef>
+          <a:fontRef idx="minor">
+            <a:schemeClr val="lt1"/>
+          </a:fontRef>
+        </p:style>
+        <p:txBody>
+          <a:bodyPr rtlCol="0" anchor="ctr"/>
+          <a:lstStyle/>
+          <a:p>
+            <a:pPr algn="ctr"/>
+          </a:p>
+        </p:txBody>
+      </p:sp>
+      <p:sp>
+        <p:nvSpPr>
+          <p:cNvPr id="26" name="TextBox 25"/>
+          <p:cNvSpPr txBox="1"/>
+          <p:nvPr/>
+        </p:nvSpPr>
+        <p:spPr>
+          <a:xfrm>
+            <a:off x="640080" y="4361688"/>
+            <a:ext cx="429768" cy="320040"/>
+          </a:xfrm>
+          <a:prstGeom prst="rect">
+            <a:avLst/>
+          </a:prstGeom>
+          <a:noFill/>
+        </p:spPr>
+        <p:txBody>
+          <a:bodyPr wrap="none" anchor="t" lIns="0" rIns="0" tIns="0" bIns="0">
+            <a:noAutofit/>
+          </a:bodyPr>
+          <a:lstStyle/>
+          <a:p>
+            <a:pPr algn="l">
+              <a:lnSpc>
+                <a:spcPct val="114000"/>
+              </a:lnSpc>
+              <a:spcBef>
+                <a:spcPts val="0"/>
+              </a:spcBef>
+              <a:spcAft>
+                <a:spcPts val="0"/>
+              </a:spcAft>
+            </a:pPr>
+            <a:r>
+              <a:rPr sz="1600" b="0" lang="ko-KR">
+                <a:solidFill>
+                  <a:srgbClr val="20262E"/>
+                </a:solidFill>
+                <a:latin typeface="Pretendard"/>
+                <a:ea typeface="Pretendard"/>
+                <a:cs typeface="Pretendard"/>
+              </a:rPr>
+              <a:t>4</a:t>
+            </a:r>
+          </a:p>
+        </p:txBody>
+      </p:sp>
+      <p:sp>
+        <p:nvSpPr>
+          <p:cNvPr id="27" name="TextBox 26"/>
+          <p:cNvSpPr txBox="1"/>
+          <p:nvPr/>
+        </p:nvSpPr>
+        <p:spPr>
+          <a:xfrm>
+            <a:off x="1216152" y="4361688"/>
+            <a:ext cx="2240279" cy="320040"/>
+          </a:xfrm>
+          <a:prstGeom prst="rect">
+            <a:avLst/>
+          </a:prstGeom>
+          <a:noFill/>
+        </p:spPr>
+        <p:txBody>
+          <a:bodyPr wrap="none" anchor="t" lIns="0" rIns="0" tIns="0" bIns="0">
+            <a:noAutofit/>
+          </a:bodyPr>
+          <a:lstStyle/>
+          <a:p>
+            <a:pPr algn="l">
+              <a:lnSpc>
+                <a:spcPct val="114000"/>
+              </a:lnSpc>
+              <a:spcBef>
+                <a:spcPts val="0"/>
+              </a:spcBef>
+              <a:spcAft>
+                <a:spcPts val="0"/>
+              </a:spcAft>
+            </a:pPr>
+            <a:r>
+              <a:rPr sz="1600" b="0" lang="ko-KR">
+                <a:solidFill>
+                  <a:srgbClr val="20262E"/>
+                </a:solidFill>
+                <a:latin typeface="Pretendard"/>
+                <a:ea typeface="Pretendard"/>
+                <a:cs typeface="Pretendard"/>
+              </a:rPr>
+              <a:t>Infiltration</a:t>
+            </a:r>
+          </a:p>
+        </p:txBody>
+      </p:sp>
+      <p:sp>
+        <p:nvSpPr>
+          <p:cNvPr id="28" name="TextBox 27"/>
+          <p:cNvSpPr txBox="1"/>
+          <p:nvPr/>
+        </p:nvSpPr>
+        <p:spPr>
+          <a:xfrm>
+            <a:off x="3602736" y="4361688"/>
+            <a:ext cx="768096" cy="320040"/>
+          </a:xfrm>
+          <a:prstGeom prst="rect">
+            <a:avLst/>
+          </a:prstGeom>
+          <a:noFill/>
+        </p:spPr>
+        <p:txBody>
+          <a:bodyPr wrap="none" anchor="t" lIns="0" rIns="0" tIns="0" bIns="0">
+            <a:noAutofit/>
+          </a:bodyPr>
+          <a:lstStyle/>
+          <a:p>
+            <a:pPr algn="r">
+              <a:lnSpc>
+                <a:spcPct val="114000"/>
+              </a:lnSpc>
+              <a:spcBef>
+                <a:spcPts val="0"/>
+              </a:spcBef>
+              <a:spcAft>
+                <a:spcPts val="0"/>
+              </a:spcAft>
+            </a:pPr>
+            <a:r>
+              <a:rPr sz="1600" b="0" lang="ko-KR">
+                <a:solidFill>
+                  <a:srgbClr val="20262E"/>
+                </a:solidFill>
+                <a:latin typeface="Pretendard"/>
+                <a:ea typeface="Pretendard"/>
+                <a:cs typeface="Pretendard"/>
+              </a:rPr>
+              <a:t>n</a:t>
+            </a:r>
+          </a:p>
+        </p:txBody>
+      </p:sp>
+      <p:sp>
+        <p:nvSpPr>
+          <p:cNvPr id="29" name="TextBox 28"/>
+          <p:cNvSpPr txBox="1"/>
+          <p:nvPr/>
+        </p:nvSpPr>
+        <p:spPr>
+          <a:xfrm>
+            <a:off x="4517136" y="4361688"/>
+            <a:ext cx="1316736" cy="320040"/>
+          </a:xfrm>
+          <a:prstGeom prst="rect">
+            <a:avLst/>
+          </a:prstGeom>
+          <a:noFill/>
+        </p:spPr>
+        <p:txBody>
+          <a:bodyPr wrap="none" anchor="t" lIns="0" rIns="0" tIns="0" bIns="0">
+            <a:noAutofit/>
+          </a:bodyPr>
+          <a:lstStyle/>
+          <a:p>
+            <a:pPr algn="r">
+              <a:lnSpc>
+                <a:spcPct val="114000"/>
+              </a:lnSpc>
+              <a:spcBef>
+                <a:spcPts val="0"/>
+              </a:spcBef>
+              <a:spcAft>
+                <a:spcPts val="0"/>
+              </a:spcAft>
+            </a:pPr>
+            <a:r>
+              <a:rPr sz="1600" b="0" lang="ko-KR">
+                <a:solidFill>
+                  <a:srgbClr val="20262E"/>
+                </a:solidFill>
+                <a:latin typeface="Pretendard"/>
+                <a:ea typeface="Pretendard"/>
+                <a:cs typeface="Pretendard"/>
+              </a:rPr>
+              <a:t>1,000 + 3n</a:t>
+            </a:r>
+          </a:p>
+        </p:txBody>
+      </p:sp>
+      <p:sp>
+        <p:nvSpPr>
+          <p:cNvPr id="30" name="Rectangle 29"/>
+          <p:cNvSpPr/>
+          <p:nvPr/>
+        </p:nvSpPr>
+        <p:spPr>
+          <a:xfrm>
+            <a:off x="566928" y="4718304"/>
+            <a:ext cx="5340096" cy="448056"/>
+          </a:xfrm>
+          <a:prstGeom prst="rect">
+            <a:avLst/>
+          </a:prstGeom>
+          <a:solidFill>
+            <a:srgbClr val="F1F5F9"/>
+          </a:solidFill>
+          <a:ln>
+            <a:noFill/>
+          </a:ln>
+        </p:spPr>
+        <p:style>
+          <a:lnRef idx="1">
+            <a:schemeClr val="accent1"/>
+          </a:lnRef>
+          <a:fillRef idx="3">
+            <a:schemeClr val="accent1"/>
+          </a:fillRef>
+          <a:effectRef idx="2">
+            <a:schemeClr val="accent1"/>
+          </a:effectRef>
+          <a:fontRef idx="minor">
+            <a:schemeClr val="lt1"/>
+          </a:fontRef>
+        </p:style>
+        <p:txBody>
+          <a:bodyPr rtlCol="0" anchor="ctr"/>
+          <a:lstStyle/>
+          <a:p>
+            <a:pPr algn="ctr"/>
+          </a:p>
+        </p:txBody>
+      </p:sp>
+      <p:sp>
+        <p:nvSpPr>
+          <p:cNvPr id="31" name="TextBox 30"/>
+          <p:cNvSpPr txBox="1"/>
+          <p:nvPr/>
+        </p:nvSpPr>
+        <p:spPr>
+          <a:xfrm>
+            <a:off x="640080" y="4809744"/>
+            <a:ext cx="429768" cy="320040"/>
+          </a:xfrm>
+          <a:prstGeom prst="rect">
+            <a:avLst/>
+          </a:prstGeom>
+          <a:noFill/>
+        </p:spPr>
+        <p:txBody>
+          <a:bodyPr wrap="none" anchor="t" lIns="0" rIns="0" tIns="0" bIns="0">
+            <a:noAutofit/>
+          </a:bodyPr>
+          <a:lstStyle/>
+          <a:p>
+            <a:pPr algn="l">
+              <a:lnSpc>
+                <a:spcPct val="114000"/>
+              </a:lnSpc>
+              <a:spcBef>
+                <a:spcPts val="0"/>
+              </a:spcBef>
+              <a:spcAft>
+                <a:spcPts val="0"/>
+              </a:spcAft>
+            </a:pPr>
+            <a:r>
+              <a:rPr sz="1600" b="0" lang="ko-KR">
+                <a:solidFill>
+                  <a:srgbClr val="20262E"/>
+                </a:solidFill>
+                <a:latin typeface="Pretendard"/>
+                <a:ea typeface="Pretendard"/>
+                <a:cs typeface="Pretendard"/>
+              </a:rPr>
+              <a:t>5</a:t>
+            </a:r>
+          </a:p>
+        </p:txBody>
+      </p:sp>
+      <p:sp>
+        <p:nvSpPr>
+          <p:cNvPr id="32" name="TextBox 31"/>
+          <p:cNvSpPr txBox="1"/>
+          <p:nvPr/>
+        </p:nvSpPr>
+        <p:spPr>
+          <a:xfrm>
+            <a:off x="1216152" y="4809744"/>
+            <a:ext cx="2240279" cy="320040"/>
+          </a:xfrm>
+          <a:prstGeom prst="rect">
+            <a:avLst/>
+          </a:prstGeom>
+          <a:noFill/>
+        </p:spPr>
+        <p:txBody>
+          <a:bodyPr wrap="none" anchor="t" lIns="0" rIns="0" tIns="0" bIns="0">
+            <a:noAutofit/>
+          </a:bodyPr>
+          <a:lstStyle/>
+          <a:p>
+            <a:pPr algn="l">
+              <a:lnSpc>
+                <a:spcPct val="114000"/>
+              </a:lnSpc>
+              <a:spcBef>
+                <a:spcPts val="0"/>
+              </a:spcBef>
+              <a:spcAft>
+                <a:spcPts val="0"/>
+              </a:spcAft>
+            </a:pPr>
+            <a:r>
+              <a:rPr sz="1600" b="0" lang="ko-KR">
+                <a:solidFill>
+                  <a:srgbClr val="20262E"/>
+                </a:solidFill>
+                <a:latin typeface="Pretendard"/>
+                <a:ea typeface="Pretendard"/>
+                <a:cs typeface="Pretendard"/>
+              </a:rPr>
+              <a:t>Bot</a:t>
+            </a:r>
+          </a:p>
+        </p:txBody>
+      </p:sp>
+      <p:sp>
+        <p:nvSpPr>
+          <p:cNvPr id="33" name="TextBox 32"/>
+          <p:cNvSpPr txBox="1"/>
+          <p:nvPr/>
+        </p:nvSpPr>
+        <p:spPr>
+          <a:xfrm>
+            <a:off x="3602736" y="4809744"/>
+            <a:ext cx="768096" cy="320040"/>
+          </a:xfrm>
+          <a:prstGeom prst="rect">
+            <a:avLst/>
+          </a:prstGeom>
+          <a:noFill/>
+        </p:spPr>
+        <p:txBody>
+          <a:bodyPr wrap="none" anchor="t" lIns="0" rIns="0" tIns="0" bIns="0">
+            <a:noAutofit/>
+          </a:bodyPr>
+          <a:lstStyle/>
+          <a:p>
+            <a:pPr algn="r">
+              <a:lnSpc>
+                <a:spcPct val="114000"/>
+              </a:lnSpc>
+              <a:spcBef>
+                <a:spcPts val="0"/>
+              </a:spcBef>
+              <a:spcAft>
+                <a:spcPts val="0"/>
+              </a:spcAft>
+            </a:pPr>
+            <a:r>
+              <a:rPr sz="1600" b="0" lang="ko-KR">
+                <a:solidFill>
+                  <a:srgbClr val="20262E"/>
+                </a:solidFill>
+                <a:latin typeface="Pretendard"/>
+                <a:ea typeface="Pretendard"/>
+                <a:cs typeface="Pretendard"/>
+              </a:rPr>
+              <a:t>n</a:t>
+            </a:r>
+          </a:p>
+        </p:txBody>
+      </p:sp>
+      <p:sp>
+        <p:nvSpPr>
+          <p:cNvPr id="34" name="TextBox 33"/>
+          <p:cNvSpPr txBox="1"/>
+          <p:nvPr/>
+        </p:nvSpPr>
+        <p:spPr>
+          <a:xfrm>
+            <a:off x="4517136" y="4809744"/>
+            <a:ext cx="1316736" cy="320040"/>
+          </a:xfrm>
+          <a:prstGeom prst="rect">
+            <a:avLst/>
+          </a:prstGeom>
+          <a:noFill/>
+        </p:spPr>
+        <p:txBody>
+          <a:bodyPr wrap="none" anchor="t" lIns="0" rIns="0" tIns="0" bIns="0">
+            <a:noAutofit/>
+          </a:bodyPr>
+          <a:lstStyle/>
+          <a:p>
+            <a:pPr algn="r">
+              <a:lnSpc>
+                <a:spcPct val="114000"/>
+              </a:lnSpc>
+              <a:spcBef>
+                <a:spcPts val="0"/>
+              </a:spcBef>
+              <a:spcAft>
+                <a:spcPts val="0"/>
+              </a:spcAft>
+            </a:pPr>
+            <a:r>
+              <a:rPr sz="1600" b="0" lang="ko-KR">
+                <a:solidFill>
+                  <a:srgbClr val="20262E"/>
+                </a:solidFill>
+                <a:latin typeface="Pretendard"/>
+                <a:ea typeface="Pretendard"/>
+                <a:cs typeface="Pretendard"/>
+              </a:rPr>
+              <a:t>1,000 + 4n</a:t>
+            </a:r>
+          </a:p>
+        </p:txBody>
+      </p:sp>
+      <p:sp>
+        <p:nvSpPr>
+          <p:cNvPr id="35" name="TextBox 34"/>
+          <p:cNvSpPr txBox="1"/>
+          <p:nvPr/>
+        </p:nvSpPr>
+        <p:spPr>
+          <a:xfrm>
+            <a:off x="6291072" y="1600200"/>
+            <a:ext cx="5340096" cy="352973"/>
+          </a:xfrm>
+          <a:prstGeom prst="rect">
+            <a:avLst/>
+          </a:prstGeom>
+          <a:noFill/>
+        </p:spPr>
+        <p:txBody>
+          <a:bodyPr wrap="none" anchor="t" lIns="0" rIns="0" tIns="0" bIns="0">
+            <a:noAutofit/>
+          </a:bodyPr>
+          <a:lstStyle/>
+          <a:p>
+            <a:pPr algn="l">
+              <a:lnSpc>
+                <a:spcPct val="114000"/>
+              </a:lnSpc>
+              <a:spcBef>
+                <a:spcPts val="0"/>
+              </a:spcBef>
+              <a:spcAft>
+                <a:spcPts val="0"/>
+              </a:spcAft>
+            </a:pPr>
+            <a:r>
+              <a:rPr sz="2300" b="1" lang="ko-KR">
+                <a:solidFill>
+                  <a:srgbClr val="007BC6"/>
+                </a:solidFill>
+                <a:latin typeface="Pretendard"/>
+                <a:ea typeface="Pretendard"/>
+                <a:cs typeface="Pretendard"/>
+              </a:rPr>
+              <a:t>ToN-IoT</a:t>
+            </a:r>
+          </a:p>
+        </p:txBody>
+      </p:sp>
+      <p:sp>
+        <p:nvSpPr>
+          <p:cNvPr id="36" name="Rectangle 35"/>
+          <p:cNvSpPr/>
+          <p:nvPr/>
+        </p:nvSpPr>
+        <p:spPr>
+          <a:xfrm>
+            <a:off x="6291072" y="2084831"/>
+            <a:ext cx="5340096" cy="420624"/>
+          </a:xfrm>
+          <a:prstGeom prst="rect">
+            <a:avLst/>
+          </a:prstGeom>
+          <a:solidFill>
+            <a:srgbClr val="00306C"/>
+          </a:solidFill>
+          <a:ln>
+            <a:noFill/>
+          </a:ln>
+        </p:spPr>
+        <p:style>
+          <a:lnRef idx="1">
+            <a:schemeClr val="accent1"/>
+          </a:lnRef>
+          <a:fillRef idx="3">
+            <a:schemeClr val="accent1"/>
+          </a:fillRef>
+          <a:effectRef idx="2">
+            <a:schemeClr val="accent1"/>
+          </a:effectRef>
+          <a:fontRef idx="minor">
+            <a:schemeClr val="lt1"/>
+          </a:fontRef>
+        </p:style>
+        <p:txBody>
+          <a:bodyPr rtlCol="0" anchor="ctr"/>
+          <a:lstStyle/>
+          <a:p>
+            <a:pPr algn="ctr"/>
+          </a:p>
+        </p:txBody>
+      </p:sp>
+      <p:sp>
+        <p:nvSpPr>
+          <p:cNvPr id="37" name="TextBox 36"/>
+          <p:cNvSpPr txBox="1"/>
+          <p:nvPr/>
+        </p:nvSpPr>
+        <p:spPr>
+          <a:xfrm>
+            <a:off x="6345936" y="2176272"/>
+            <a:ext cx="466344" cy="228600"/>
+          </a:xfrm>
+          <a:prstGeom prst="rect">
+            <a:avLst/>
+          </a:prstGeom>
+          <a:noFill/>
+        </p:spPr>
+        <p:txBody>
+          <a:bodyPr wrap="none" anchor="t" lIns="0" rIns="0" tIns="0" bIns="0">
+            <a:noAutofit/>
+          </a:bodyPr>
+          <a:lstStyle/>
+          <a:p>
+            <a:pPr algn="l">
+              <a:lnSpc>
+                <a:spcPct val="114000"/>
+              </a:lnSpc>
+              <a:spcBef>
+                <a:spcPts val="0"/>
+              </a:spcBef>
+              <a:spcAft>
+                <a:spcPts val="0"/>
+              </a:spcAft>
+            </a:pPr>
+            <a:r>
+              <a:rPr sz="1400" b="1" lang="ko-KR">
+                <a:solidFill>
+                  <a:srgbClr val="FFFFFF"/>
+                </a:solidFill>
+                <a:latin typeface="Pretendard"/>
+                <a:ea typeface="Pretendard"/>
+                <a:cs typeface="Pretendard"/>
+              </a:rPr>
+              <a:t>단계</a:t>
+            </a:r>
+          </a:p>
+        </p:txBody>
+      </p:sp>
+      <p:sp>
+        <p:nvSpPr>
+          <p:cNvPr id="38" name="TextBox 37"/>
+          <p:cNvSpPr txBox="1"/>
+          <p:nvPr/>
+        </p:nvSpPr>
+        <p:spPr>
+          <a:xfrm>
+            <a:off x="6922007" y="2176272"/>
+            <a:ext cx="2276856" cy="228600"/>
+          </a:xfrm>
+          <a:prstGeom prst="rect">
+            <a:avLst/>
+          </a:prstGeom>
+          <a:noFill/>
+        </p:spPr>
+        <p:txBody>
+          <a:bodyPr wrap="none" anchor="t" lIns="0" rIns="0" tIns="0" bIns="0">
+            <a:noAutofit/>
+          </a:bodyPr>
+          <a:lstStyle/>
+          <a:p>
+            <a:pPr algn="l">
+              <a:lnSpc>
+                <a:spcPct val="114000"/>
+              </a:lnSpc>
+              <a:spcBef>
+                <a:spcPts val="0"/>
+              </a:spcBef>
+              <a:spcAft>
+                <a:spcPts val="0"/>
+              </a:spcAft>
+            </a:pPr>
+            <a:r>
+              <a:rPr sz="1400" b="1" lang="ko-KR">
+                <a:solidFill>
+                  <a:srgbClr val="FFFFFF"/>
+                </a:solidFill>
+                <a:latin typeface="Pretendard"/>
+                <a:ea typeface="Pretendard"/>
+                <a:cs typeface="Pretendard"/>
+              </a:rPr>
+              <a:t>새로 제공한 클래스</a:t>
+            </a:r>
+          </a:p>
+        </p:txBody>
+      </p:sp>
+      <p:sp>
+        <p:nvSpPr>
+          <p:cNvPr id="39" name="TextBox 38"/>
+          <p:cNvSpPr txBox="1"/>
+          <p:nvPr/>
+        </p:nvSpPr>
+        <p:spPr>
+          <a:xfrm>
+            <a:off x="9308592" y="2176272"/>
+            <a:ext cx="804672" cy="228600"/>
+          </a:xfrm>
+          <a:prstGeom prst="rect">
+            <a:avLst/>
+          </a:prstGeom>
+          <a:noFill/>
+        </p:spPr>
+        <p:txBody>
+          <a:bodyPr wrap="none" anchor="t" lIns="0" rIns="0" tIns="0" bIns="0">
+            <a:noAutofit/>
+          </a:bodyPr>
+          <a:lstStyle/>
+          <a:p>
+            <a:pPr algn="r">
+              <a:lnSpc>
+                <a:spcPct val="114000"/>
+              </a:lnSpc>
+              <a:spcBef>
+                <a:spcPts val="0"/>
+              </a:spcBef>
+              <a:spcAft>
+                <a:spcPts val="0"/>
+              </a:spcAft>
+            </a:pPr>
+            <a:r>
+              <a:rPr sz="1400" b="1" lang="ko-KR">
+                <a:solidFill>
+                  <a:srgbClr val="FFFFFF"/>
+                </a:solidFill>
+                <a:latin typeface="Pretendard"/>
+                <a:ea typeface="Pretendard"/>
+                <a:cs typeface="Pretendard"/>
+              </a:rPr>
+              <a:t>클래스당</a:t>
+            </a:r>
+          </a:p>
+        </p:txBody>
+      </p:sp>
+      <p:sp>
+        <p:nvSpPr>
+          <p:cNvPr id="40" name="TextBox 39"/>
+          <p:cNvSpPr txBox="1"/>
+          <p:nvPr/>
+        </p:nvSpPr>
+        <p:spPr>
+          <a:xfrm>
+            <a:off x="10222992" y="2176272"/>
+            <a:ext cx="1353312" cy="228600"/>
+          </a:xfrm>
+          <a:prstGeom prst="rect">
+            <a:avLst/>
+          </a:prstGeom>
+          <a:noFill/>
+        </p:spPr>
+        <p:txBody>
+          <a:bodyPr wrap="none" anchor="t" lIns="0" rIns="0" tIns="0" bIns="0">
+            <a:noAutofit/>
+          </a:bodyPr>
+          <a:lstStyle/>
+          <a:p>
+            <a:pPr algn="r">
+              <a:lnSpc>
+                <a:spcPct val="114000"/>
+              </a:lnSpc>
+              <a:spcBef>
+                <a:spcPts val="0"/>
+              </a:spcBef>
+              <a:spcAft>
+                <a:spcPts val="0"/>
+              </a:spcAft>
+            </a:pPr>
+            <a:r>
+              <a:rPr sz="1400" b="1" lang="ko-KR">
+                <a:solidFill>
+                  <a:srgbClr val="FFFFFF"/>
+                </a:solidFill>
+                <a:latin typeface="Pretendard"/>
+                <a:ea typeface="Pretendard"/>
+                <a:cs typeface="Pretendard"/>
+              </a:rPr>
+              <a:t>누적 합계</a:t>
+            </a:r>
+          </a:p>
+        </p:txBody>
+      </p:sp>
+      <p:sp>
+        <p:nvSpPr>
+          <p:cNvPr id="41" name="Rectangle 40"/>
+          <p:cNvSpPr/>
+          <p:nvPr/>
+        </p:nvSpPr>
+        <p:spPr>
+          <a:xfrm>
+            <a:off x="6291072" y="2505456"/>
+            <a:ext cx="5340096" cy="868680"/>
+          </a:xfrm>
+          <a:prstGeom prst="rect">
+            <a:avLst/>
+          </a:prstGeom>
+          <a:solidFill>
+            <a:srgbClr val="F1F5F9"/>
+          </a:solidFill>
+          <a:ln>
+            <a:noFill/>
+          </a:ln>
+        </p:spPr>
+        <p:style>
+          <a:lnRef idx="1">
+            <a:schemeClr val="accent1"/>
+          </a:lnRef>
+          <a:fillRef idx="3">
+            <a:schemeClr val="accent1"/>
+          </a:fillRef>
+          <a:effectRef idx="2">
+            <a:schemeClr val="accent1"/>
+          </a:effectRef>
+          <a:fontRef idx="minor">
+            <a:schemeClr val="lt1"/>
+          </a:fontRef>
+        </p:style>
+        <p:txBody>
+          <a:bodyPr rtlCol="0" anchor="ctr"/>
+          <a:lstStyle/>
+          <a:p>
+            <a:pPr algn="ctr"/>
+          </a:p>
+        </p:txBody>
+      </p:sp>
+      <p:sp>
+        <p:nvSpPr>
+          <p:cNvPr id="42" name="TextBox 41"/>
+          <p:cNvSpPr txBox="1"/>
+          <p:nvPr/>
+        </p:nvSpPr>
+        <p:spPr>
+          <a:xfrm>
+            <a:off x="6364224" y="2596896"/>
+            <a:ext cx="429768" cy="740664"/>
+          </a:xfrm>
+          <a:prstGeom prst="rect">
+            <a:avLst/>
+          </a:prstGeom>
+          <a:noFill/>
+        </p:spPr>
+        <p:txBody>
+          <a:bodyPr wrap="none" anchor="t" lIns="0" rIns="0" tIns="0" bIns="0">
+            <a:noAutofit/>
+          </a:bodyPr>
+          <a:lstStyle/>
+          <a:p>
+            <a:pPr algn="l">
+              <a:lnSpc>
+                <a:spcPct val="114000"/>
+              </a:lnSpc>
+              <a:spcBef>
+                <a:spcPts val="0"/>
+              </a:spcBef>
+              <a:spcAft>
+                <a:spcPts val="0"/>
+              </a:spcAft>
+            </a:pPr>
+            <a:r>
+              <a:rPr sz="1600" b="0" lang="ko-KR">
+                <a:solidFill>
+                  <a:srgbClr val="20262E"/>
+                </a:solidFill>
+                <a:latin typeface="Pretendard"/>
+                <a:ea typeface="Pretendard"/>
+                <a:cs typeface="Pretendard"/>
+              </a:rPr>
+              <a:t>1</a:t>
+            </a:r>
+          </a:p>
+        </p:txBody>
+      </p:sp>
+      <p:sp>
+        <p:nvSpPr>
+          <p:cNvPr id="43" name="TextBox 42"/>
+          <p:cNvSpPr txBox="1"/>
+          <p:nvPr/>
+        </p:nvSpPr>
+        <p:spPr>
+          <a:xfrm>
+            <a:off x="6940296" y="2596896"/>
+            <a:ext cx="2240279" cy="740664"/>
+          </a:xfrm>
+          <a:prstGeom prst="rect">
+            <a:avLst/>
+          </a:prstGeom>
+          <a:noFill/>
+        </p:spPr>
+        <p:txBody>
+          <a:bodyPr wrap="none" anchor="t" lIns="0" rIns="0" tIns="0" bIns="0">
+            <a:noAutofit/>
+          </a:bodyPr>
+          <a:lstStyle/>
+          <a:p>
+            <a:pPr algn="l">
+              <a:lnSpc>
+                <a:spcPct val="114000"/>
+              </a:lnSpc>
+              <a:spcBef>
+                <a:spcPts val="0"/>
+              </a:spcBef>
+              <a:spcAft>
+                <a:spcPts val="0"/>
+              </a:spcAft>
+            </a:pPr>
+            <a:r>
+              <a:rPr sz="1600" b="0" lang="ko-KR">
+                <a:solidFill>
+                  <a:srgbClr val="20262E"/>
+                </a:solidFill>
+                <a:latin typeface="Pretendard"/>
+                <a:ea typeface="Pretendard"/>
+                <a:cs typeface="Pretendard"/>
+              </a:rPr>
+              <a:t>Benign</a:t>
+            </a:r>
+          </a:p>
+          <a:p>
+            <a:pPr algn="l">
+              <a:lnSpc>
+                <a:spcPct val="114000"/>
+              </a:lnSpc>
+              <a:spcBef>
+                <a:spcPts val="0"/>
+              </a:spcBef>
+              <a:spcAft>
+                <a:spcPts val="0"/>
+              </a:spcAft>
+            </a:pPr>
+            <a:r>
+              <a:rPr sz="1600" b="0" lang="ko-KR">
+                <a:solidFill>
+                  <a:srgbClr val="20262E"/>
+                </a:solidFill>
+                <a:latin typeface="Pretendard"/>
+                <a:ea typeface="Pretendard"/>
+                <a:cs typeface="Pretendard"/>
+              </a:rPr>
+              <a:t>DoS</a:t>
+            </a:r>
+          </a:p>
+          <a:p>
+            <a:pPr algn="l">
+              <a:lnSpc>
+                <a:spcPct val="114000"/>
+              </a:lnSpc>
+              <a:spcBef>
+                <a:spcPts val="0"/>
+              </a:spcBef>
+              <a:spcAft>
+                <a:spcPts val="0"/>
+              </a:spcAft>
+            </a:pPr>
+            <a:r>
+              <a:rPr sz="1600" b="0" lang="ko-KR">
+                <a:solidFill>
+                  <a:srgbClr val="20262E"/>
+                </a:solidFill>
+                <a:latin typeface="Pretendard"/>
+                <a:ea typeface="Pretendard"/>
+                <a:cs typeface="Pretendard"/>
+              </a:rPr>
+              <a:t>Scanning</a:t>
+            </a:r>
+          </a:p>
+        </p:txBody>
+      </p:sp>
+      <p:sp>
+        <p:nvSpPr>
+          <p:cNvPr id="44" name="TextBox 43"/>
+          <p:cNvSpPr txBox="1"/>
+          <p:nvPr/>
+        </p:nvSpPr>
+        <p:spPr>
+          <a:xfrm>
+            <a:off x="9326880" y="2596896"/>
+            <a:ext cx="768096" cy="740664"/>
+          </a:xfrm>
+          <a:prstGeom prst="rect">
+            <a:avLst/>
+          </a:prstGeom>
+          <a:noFill/>
+        </p:spPr>
+        <p:txBody>
+          <a:bodyPr wrap="none" anchor="t" lIns="0" rIns="0" tIns="0" bIns="0">
+            <a:noAutofit/>
+          </a:bodyPr>
+          <a:lstStyle/>
+          <a:p>
+            <a:pPr algn="r">
+              <a:lnSpc>
+                <a:spcPct val="114000"/>
+              </a:lnSpc>
+              <a:spcBef>
+                <a:spcPts val="0"/>
+              </a:spcBef>
+              <a:spcAft>
+                <a:spcPts val="0"/>
+              </a:spcAft>
+            </a:pPr>
+            <a:r>
+              <a:rPr sz="1600" b="0" lang="ko-KR">
+                <a:solidFill>
+                  <a:srgbClr val="20262E"/>
+                </a:solidFill>
+                <a:latin typeface="Pretendard"/>
+                <a:ea typeface="Pretendard"/>
+                <a:cs typeface="Pretendard"/>
+              </a:rPr>
+              <a:t>750</a:t>
+            </a:r>
+          </a:p>
+          <a:p>
+            <a:pPr algn="r">
+              <a:lnSpc>
+                <a:spcPct val="114000"/>
+              </a:lnSpc>
+              <a:spcBef>
+                <a:spcPts val="0"/>
+              </a:spcBef>
+              <a:spcAft>
+                <a:spcPts val="0"/>
+              </a:spcAft>
+            </a:pPr>
+            <a:r>
+              <a:rPr sz="1600" b="0" lang="ko-KR">
+                <a:solidFill>
+                  <a:srgbClr val="20262E"/>
+                </a:solidFill>
+                <a:latin typeface="Pretendard"/>
+                <a:ea typeface="Pretendard"/>
+                <a:cs typeface="Pretendard"/>
+              </a:rPr>
+              <a:t>125</a:t>
+            </a:r>
+          </a:p>
+          <a:p>
+            <a:pPr algn="r">
+              <a:lnSpc>
+                <a:spcPct val="114000"/>
+              </a:lnSpc>
+              <a:spcBef>
+                <a:spcPts val="0"/>
+              </a:spcBef>
+              <a:spcAft>
+                <a:spcPts val="0"/>
+              </a:spcAft>
+            </a:pPr>
+            <a:r>
+              <a:rPr sz="1600" b="0" lang="ko-KR">
+                <a:solidFill>
+                  <a:srgbClr val="20262E"/>
+                </a:solidFill>
+                <a:latin typeface="Pretendard"/>
+                <a:ea typeface="Pretendard"/>
+                <a:cs typeface="Pretendard"/>
+              </a:rPr>
+              <a:t>125</a:t>
+            </a:r>
+          </a:p>
+        </p:txBody>
+      </p:sp>
+      <p:sp>
+        <p:nvSpPr>
+          <p:cNvPr id="45" name="TextBox 44"/>
+          <p:cNvSpPr txBox="1"/>
+          <p:nvPr/>
+        </p:nvSpPr>
+        <p:spPr>
+          <a:xfrm>
+            <a:off x="10241280" y="2596896"/>
+            <a:ext cx="1316736" cy="740664"/>
+          </a:xfrm>
+          <a:prstGeom prst="rect">
+            <a:avLst/>
+          </a:prstGeom>
+          <a:noFill/>
+        </p:spPr>
+        <p:txBody>
+          <a:bodyPr wrap="none" anchor="t" lIns="0" rIns="0" tIns="0" bIns="0">
+            <a:noAutofit/>
+          </a:bodyPr>
+          <a:lstStyle/>
+          <a:p>
+            <a:pPr algn="r">
+              <a:lnSpc>
+                <a:spcPct val="114000"/>
+              </a:lnSpc>
+              <a:spcBef>
+                <a:spcPts val="0"/>
+              </a:spcBef>
+              <a:spcAft>
+                <a:spcPts val="0"/>
+              </a:spcAft>
+            </a:pPr>
+            <a:r>
+              <a:rPr sz="1600" b="0" lang="ko-KR">
+                <a:solidFill>
+                  <a:srgbClr val="20262E"/>
+                </a:solidFill>
+                <a:latin typeface="Pretendard"/>
+                <a:ea typeface="Pretendard"/>
+                <a:cs typeface="Pretendard"/>
+              </a:rPr>
+              <a:t>1,000</a:t>
+            </a:r>
+          </a:p>
+        </p:txBody>
+      </p:sp>
+      <p:sp>
+        <p:nvSpPr>
+          <p:cNvPr id="46" name="Rectangle 45"/>
+          <p:cNvSpPr/>
+          <p:nvPr/>
+        </p:nvSpPr>
+        <p:spPr>
+          <a:xfrm>
+            <a:off x="6291072" y="3374135"/>
+            <a:ext cx="5340096" cy="621792"/>
+          </a:xfrm>
+          <a:prstGeom prst="rect">
+            <a:avLst/>
+          </a:prstGeom>
+          <a:solidFill>
+            <a:srgbClr val="FFFFFF"/>
+          </a:solidFill>
+          <a:ln>
+            <a:noFill/>
+          </a:ln>
+        </p:spPr>
+        <p:style>
+          <a:lnRef idx="1">
+            <a:schemeClr val="accent1"/>
+          </a:lnRef>
+          <a:fillRef idx="3">
+            <a:schemeClr val="accent1"/>
+          </a:fillRef>
+          <a:effectRef idx="2">
+            <a:schemeClr val="accent1"/>
+          </a:effectRef>
+          <a:fontRef idx="minor">
+            <a:schemeClr val="lt1"/>
+          </a:fontRef>
+        </p:style>
+        <p:txBody>
+          <a:bodyPr rtlCol="0" anchor="ctr"/>
+          <a:lstStyle/>
+          <a:p>
+            <a:pPr algn="ctr"/>
+          </a:p>
+        </p:txBody>
+      </p:sp>
+      <p:sp>
+        <p:nvSpPr>
+          <p:cNvPr id="47" name="TextBox 46"/>
+          <p:cNvSpPr txBox="1"/>
+          <p:nvPr/>
+        </p:nvSpPr>
+        <p:spPr>
+          <a:xfrm>
+            <a:off x="6364224" y="3465575"/>
+            <a:ext cx="429768" cy="493776"/>
+          </a:xfrm>
+          <a:prstGeom prst="rect">
+            <a:avLst/>
+          </a:prstGeom>
+          <a:noFill/>
+        </p:spPr>
+        <p:txBody>
+          <a:bodyPr wrap="none" anchor="t" lIns="0" rIns="0" tIns="0" bIns="0">
+            <a:noAutofit/>
+          </a:bodyPr>
+          <a:lstStyle/>
+          <a:p>
+            <a:pPr algn="l">
+              <a:lnSpc>
+                <a:spcPct val="114000"/>
+              </a:lnSpc>
+              <a:spcBef>
+                <a:spcPts val="0"/>
+              </a:spcBef>
+              <a:spcAft>
+                <a:spcPts val="0"/>
+              </a:spcAft>
+            </a:pPr>
+            <a:r>
+              <a:rPr sz="1600" b="0" lang="ko-KR">
+                <a:solidFill>
+                  <a:srgbClr val="20262E"/>
+                </a:solidFill>
+                <a:latin typeface="Pretendard"/>
+                <a:ea typeface="Pretendard"/>
+                <a:cs typeface="Pretendard"/>
+              </a:rPr>
+              <a:t>2</a:t>
+            </a:r>
+          </a:p>
+        </p:txBody>
+      </p:sp>
+      <p:sp>
+        <p:nvSpPr>
+          <p:cNvPr id="48" name="TextBox 47"/>
+          <p:cNvSpPr txBox="1"/>
+          <p:nvPr/>
+        </p:nvSpPr>
+        <p:spPr>
+          <a:xfrm>
+            <a:off x="6940296" y="3465575"/>
+            <a:ext cx="2240279" cy="493776"/>
+          </a:xfrm>
+          <a:prstGeom prst="rect">
+            <a:avLst/>
+          </a:prstGeom>
+          <a:noFill/>
+        </p:spPr>
+        <p:txBody>
+          <a:bodyPr wrap="none" anchor="t" lIns="0" rIns="0" tIns="0" bIns="0">
+            <a:noAutofit/>
+          </a:bodyPr>
+          <a:lstStyle/>
+          <a:p>
+            <a:pPr algn="l">
+              <a:lnSpc>
+                <a:spcPct val="114000"/>
+              </a:lnSpc>
+              <a:spcBef>
+                <a:spcPts val="0"/>
+              </a:spcBef>
+              <a:spcAft>
+                <a:spcPts val="0"/>
+              </a:spcAft>
+            </a:pPr>
+            <a:r>
+              <a:rPr sz="1600" b="0" lang="ko-KR">
+                <a:solidFill>
+                  <a:srgbClr val="20262E"/>
+                </a:solidFill>
+                <a:latin typeface="Pretendard"/>
+                <a:ea typeface="Pretendard"/>
+                <a:cs typeface="Pretendard"/>
+              </a:rPr>
+              <a:t>DDoS</a:t>
+            </a:r>
+          </a:p>
+          <a:p>
+            <a:pPr algn="l">
+              <a:lnSpc>
+                <a:spcPct val="114000"/>
+              </a:lnSpc>
+              <a:spcBef>
+                <a:spcPts val="0"/>
+              </a:spcBef>
+              <a:spcAft>
+                <a:spcPts val="0"/>
+              </a:spcAft>
+            </a:pPr>
+            <a:r>
+              <a:rPr sz="1600" b="0" lang="ko-KR">
+                <a:solidFill>
+                  <a:srgbClr val="20262E"/>
+                </a:solidFill>
+                <a:latin typeface="Pretendard"/>
+                <a:ea typeface="Pretendard"/>
+                <a:cs typeface="Pretendard"/>
+              </a:rPr>
+              <a:t>Injection</a:t>
+            </a:r>
+          </a:p>
+        </p:txBody>
+      </p:sp>
+      <p:sp>
+        <p:nvSpPr>
+          <p:cNvPr id="49" name="TextBox 48"/>
+          <p:cNvSpPr txBox="1"/>
+          <p:nvPr/>
+        </p:nvSpPr>
+        <p:spPr>
+          <a:xfrm>
+            <a:off x="9326880" y="3465575"/>
+            <a:ext cx="768096" cy="493776"/>
+          </a:xfrm>
+          <a:prstGeom prst="rect">
+            <a:avLst/>
+          </a:prstGeom>
+          <a:noFill/>
+        </p:spPr>
+        <p:txBody>
+          <a:bodyPr wrap="none" anchor="t" lIns="0" rIns="0" tIns="0" bIns="0">
+            <a:noAutofit/>
+          </a:bodyPr>
+          <a:lstStyle/>
+          <a:p>
+            <a:pPr algn="r">
+              <a:lnSpc>
+                <a:spcPct val="114000"/>
+              </a:lnSpc>
+              <a:spcBef>
+                <a:spcPts val="0"/>
+              </a:spcBef>
+              <a:spcAft>
+                <a:spcPts val="0"/>
+              </a:spcAft>
+            </a:pPr>
+            <a:r>
+              <a:rPr sz="1600" b="0" lang="ko-KR">
+                <a:solidFill>
+                  <a:srgbClr val="20262E"/>
+                </a:solidFill>
+                <a:latin typeface="Pretendard"/>
+                <a:ea typeface="Pretendard"/>
+                <a:cs typeface="Pretendard"/>
+              </a:rPr>
+              <a:t>n</a:t>
+            </a:r>
+          </a:p>
+          <a:p>
+            <a:pPr algn="r">
+              <a:lnSpc>
+                <a:spcPct val="114000"/>
+              </a:lnSpc>
+              <a:spcBef>
+                <a:spcPts val="0"/>
+              </a:spcBef>
+              <a:spcAft>
+                <a:spcPts val="0"/>
+              </a:spcAft>
+            </a:pPr>
+            <a:r>
+              <a:rPr sz="1600" b="0" lang="ko-KR">
+                <a:solidFill>
+                  <a:srgbClr val="20262E"/>
+                </a:solidFill>
+                <a:latin typeface="Pretendard"/>
+                <a:ea typeface="Pretendard"/>
+                <a:cs typeface="Pretendard"/>
+              </a:rPr>
+              <a:t>n</a:t>
+            </a:r>
+          </a:p>
+        </p:txBody>
+      </p:sp>
+      <p:sp>
+        <p:nvSpPr>
+          <p:cNvPr id="50" name="TextBox 49"/>
+          <p:cNvSpPr txBox="1"/>
+          <p:nvPr/>
+        </p:nvSpPr>
+        <p:spPr>
+          <a:xfrm>
+            <a:off x="10241280" y="3465575"/>
+            <a:ext cx="1316736" cy="493776"/>
+          </a:xfrm>
+          <a:prstGeom prst="rect">
+            <a:avLst/>
+          </a:prstGeom>
+          <a:noFill/>
+        </p:spPr>
+        <p:txBody>
+          <a:bodyPr wrap="none" anchor="t" lIns="0" rIns="0" tIns="0" bIns="0">
+            <a:noAutofit/>
+          </a:bodyPr>
+          <a:lstStyle/>
+          <a:p>
+            <a:pPr algn="r">
+              <a:lnSpc>
+                <a:spcPct val="114000"/>
+              </a:lnSpc>
+              <a:spcBef>
+                <a:spcPts val="0"/>
+              </a:spcBef>
+              <a:spcAft>
+                <a:spcPts val="0"/>
+              </a:spcAft>
+            </a:pPr>
+            <a:r>
+              <a:rPr sz="1600" b="0" lang="ko-KR">
+                <a:solidFill>
+                  <a:srgbClr val="20262E"/>
+                </a:solidFill>
+                <a:latin typeface="Pretendard"/>
+                <a:ea typeface="Pretendard"/>
+                <a:cs typeface="Pretendard"/>
+              </a:rPr>
+              <a:t>1,000 + 2n</a:t>
+            </a:r>
+          </a:p>
+        </p:txBody>
+      </p:sp>
+      <p:sp>
+        <p:nvSpPr>
+          <p:cNvPr id="51" name="Rectangle 50"/>
+          <p:cNvSpPr/>
+          <p:nvPr/>
+        </p:nvSpPr>
+        <p:spPr>
+          <a:xfrm>
+            <a:off x="6291072" y="3995927"/>
+            <a:ext cx="5340096" cy="448056"/>
+          </a:xfrm>
+          <a:prstGeom prst="rect">
+            <a:avLst/>
+          </a:prstGeom>
+          <a:solidFill>
+            <a:srgbClr val="F1F5F9"/>
+          </a:solidFill>
+          <a:ln>
+            <a:noFill/>
+          </a:ln>
+        </p:spPr>
+        <p:style>
+          <a:lnRef idx="1">
+            <a:schemeClr val="accent1"/>
+          </a:lnRef>
+          <a:fillRef idx="3">
+            <a:schemeClr val="accent1"/>
+          </a:fillRef>
+          <a:effectRef idx="2">
+            <a:schemeClr val="accent1"/>
+          </a:effectRef>
+          <a:fontRef idx="minor">
+            <a:schemeClr val="lt1"/>
+          </a:fontRef>
+        </p:style>
+        <p:txBody>
+          <a:bodyPr rtlCol="0" anchor="ctr"/>
+          <a:lstStyle/>
+          <a:p>
+            <a:pPr algn="ctr"/>
+          </a:p>
+        </p:txBody>
+      </p:sp>
+      <p:sp>
+        <p:nvSpPr>
+          <p:cNvPr id="52" name="TextBox 51"/>
+          <p:cNvSpPr txBox="1"/>
+          <p:nvPr/>
+        </p:nvSpPr>
+        <p:spPr>
+          <a:xfrm>
+            <a:off x="6364224" y="4087367"/>
+            <a:ext cx="429768" cy="320040"/>
+          </a:xfrm>
+          <a:prstGeom prst="rect">
+            <a:avLst/>
+          </a:prstGeom>
+          <a:noFill/>
+        </p:spPr>
+        <p:txBody>
+          <a:bodyPr wrap="none" anchor="t" lIns="0" rIns="0" tIns="0" bIns="0">
+            <a:noAutofit/>
+          </a:bodyPr>
+          <a:lstStyle/>
+          <a:p>
+            <a:pPr algn="l">
+              <a:lnSpc>
+                <a:spcPct val="114000"/>
+              </a:lnSpc>
+              <a:spcBef>
+                <a:spcPts val="0"/>
+              </a:spcBef>
+              <a:spcAft>
+                <a:spcPts val="0"/>
+              </a:spcAft>
+            </a:pPr>
+            <a:r>
+              <a:rPr sz="1600" b="0" lang="ko-KR">
+                <a:solidFill>
+                  <a:srgbClr val="20262E"/>
+                </a:solidFill>
+                <a:latin typeface="Pretendard"/>
+                <a:ea typeface="Pretendard"/>
+                <a:cs typeface="Pretendard"/>
+              </a:rPr>
+              <a:t>3</a:t>
+            </a:r>
+          </a:p>
+        </p:txBody>
+      </p:sp>
+      <p:sp>
+        <p:nvSpPr>
+          <p:cNvPr id="53" name="TextBox 52"/>
+          <p:cNvSpPr txBox="1"/>
+          <p:nvPr/>
+        </p:nvSpPr>
+        <p:spPr>
+          <a:xfrm>
+            <a:off x="6940296" y="4087367"/>
+            <a:ext cx="2240279" cy="320040"/>
+          </a:xfrm>
+          <a:prstGeom prst="rect">
+            <a:avLst/>
+          </a:prstGeom>
+          <a:noFill/>
+        </p:spPr>
+        <p:txBody>
+          <a:bodyPr wrap="none" anchor="t" lIns="0" rIns="0" tIns="0" bIns="0">
+            <a:noAutofit/>
+          </a:bodyPr>
+          <a:lstStyle/>
+          <a:p>
+            <a:pPr algn="l">
+              <a:lnSpc>
+                <a:spcPct val="114000"/>
+              </a:lnSpc>
+              <a:spcBef>
+                <a:spcPts val="0"/>
+              </a:spcBef>
+              <a:spcAft>
+                <a:spcPts val="0"/>
+              </a:spcAft>
+            </a:pPr>
+            <a:r>
+              <a:rPr sz="1600" b="0" lang="ko-KR">
+                <a:solidFill>
+                  <a:srgbClr val="20262E"/>
+                </a:solidFill>
+                <a:latin typeface="Pretendard"/>
+                <a:ea typeface="Pretendard"/>
+                <a:cs typeface="Pretendard"/>
+              </a:rPr>
+              <a:t>Password</a:t>
+            </a:r>
+          </a:p>
+        </p:txBody>
+      </p:sp>
+      <p:sp>
+        <p:nvSpPr>
+          <p:cNvPr id="54" name="TextBox 53"/>
+          <p:cNvSpPr txBox="1"/>
+          <p:nvPr/>
+        </p:nvSpPr>
+        <p:spPr>
+          <a:xfrm>
+            <a:off x="9326880" y="4087367"/>
+            <a:ext cx="768096" cy="320040"/>
+          </a:xfrm>
+          <a:prstGeom prst="rect">
+            <a:avLst/>
+          </a:prstGeom>
+          <a:noFill/>
+        </p:spPr>
+        <p:txBody>
+          <a:bodyPr wrap="none" anchor="t" lIns="0" rIns="0" tIns="0" bIns="0">
+            <a:noAutofit/>
+          </a:bodyPr>
+          <a:lstStyle/>
+          <a:p>
+            <a:pPr algn="r">
+              <a:lnSpc>
+                <a:spcPct val="114000"/>
+              </a:lnSpc>
+              <a:spcBef>
+                <a:spcPts val="0"/>
+              </a:spcBef>
+              <a:spcAft>
+                <a:spcPts val="0"/>
+              </a:spcAft>
+            </a:pPr>
+            <a:r>
+              <a:rPr sz="1600" b="0" lang="ko-KR">
+                <a:solidFill>
+                  <a:srgbClr val="20262E"/>
+                </a:solidFill>
+                <a:latin typeface="Pretendard"/>
+                <a:ea typeface="Pretendard"/>
+                <a:cs typeface="Pretendard"/>
+              </a:rPr>
+              <a:t>n</a:t>
+            </a:r>
+          </a:p>
+        </p:txBody>
+      </p:sp>
+      <p:sp>
+        <p:nvSpPr>
+          <p:cNvPr id="55" name="TextBox 54"/>
+          <p:cNvSpPr txBox="1"/>
+          <p:nvPr/>
+        </p:nvSpPr>
+        <p:spPr>
+          <a:xfrm>
+            <a:off x="10241280" y="4087367"/>
+            <a:ext cx="1316736" cy="320040"/>
+          </a:xfrm>
+          <a:prstGeom prst="rect">
+            <a:avLst/>
+          </a:prstGeom>
+          <a:noFill/>
+        </p:spPr>
+        <p:txBody>
+          <a:bodyPr wrap="none" anchor="t" lIns="0" rIns="0" tIns="0" bIns="0">
+            <a:noAutofit/>
+          </a:bodyPr>
+          <a:lstStyle/>
+          <a:p>
+            <a:pPr algn="r">
+              <a:lnSpc>
+                <a:spcPct val="114000"/>
+              </a:lnSpc>
+              <a:spcBef>
+                <a:spcPts val="0"/>
+              </a:spcBef>
+              <a:spcAft>
+                <a:spcPts val="0"/>
+              </a:spcAft>
+            </a:pPr>
+            <a:r>
+              <a:rPr sz="1600" b="0" lang="ko-KR">
+                <a:solidFill>
+                  <a:srgbClr val="20262E"/>
+                </a:solidFill>
+                <a:latin typeface="Pretendard"/>
+                <a:ea typeface="Pretendard"/>
+                <a:cs typeface="Pretendard"/>
+              </a:rPr>
+              <a:t>1,000 + 3n</a:t>
+            </a:r>
+          </a:p>
+        </p:txBody>
+      </p:sp>
+      <p:sp>
+        <p:nvSpPr>
+          <p:cNvPr id="56" name="Rectangle 55"/>
+          <p:cNvSpPr/>
+          <p:nvPr/>
+        </p:nvSpPr>
+        <p:spPr>
+          <a:xfrm>
+            <a:off x="6291072" y="4443983"/>
+            <a:ext cx="5340096" cy="448056"/>
+          </a:xfrm>
+          <a:prstGeom prst="rect">
+            <a:avLst/>
+          </a:prstGeom>
+          <a:solidFill>
+            <a:srgbClr val="FFFFFF"/>
+          </a:solidFill>
+          <a:ln>
+            <a:noFill/>
+          </a:ln>
+        </p:spPr>
+        <p:style>
+          <a:lnRef idx="1">
+            <a:schemeClr val="accent1"/>
+          </a:lnRef>
+          <a:fillRef idx="3">
+            <a:schemeClr val="accent1"/>
+          </a:fillRef>
+          <a:effectRef idx="2">
+            <a:schemeClr val="accent1"/>
+          </a:effectRef>
+          <a:fontRef idx="minor">
+            <a:schemeClr val="lt1"/>
+          </a:fontRef>
+        </p:style>
+        <p:txBody>
+          <a:bodyPr rtlCol="0" anchor="ctr"/>
+          <a:lstStyle/>
+          <a:p>
+            <a:pPr algn="ctr"/>
+          </a:p>
+        </p:txBody>
+      </p:sp>
+      <p:sp>
+        <p:nvSpPr>
+          <p:cNvPr id="57" name="TextBox 56"/>
+          <p:cNvSpPr txBox="1"/>
+          <p:nvPr/>
+        </p:nvSpPr>
+        <p:spPr>
+          <a:xfrm>
+            <a:off x="6364224" y="4535423"/>
+            <a:ext cx="429768" cy="320040"/>
+          </a:xfrm>
+          <a:prstGeom prst="rect">
+            <a:avLst/>
+          </a:prstGeom>
+          <a:noFill/>
+        </p:spPr>
+        <p:txBody>
+          <a:bodyPr wrap="none" anchor="t" lIns="0" rIns="0" tIns="0" bIns="0">
+            <a:noAutofit/>
+          </a:bodyPr>
+          <a:lstStyle/>
+          <a:p>
+            <a:pPr algn="l">
+              <a:lnSpc>
+                <a:spcPct val="114000"/>
+              </a:lnSpc>
+              <a:spcBef>
+                <a:spcPts val="0"/>
+              </a:spcBef>
+              <a:spcAft>
+                <a:spcPts val="0"/>
+              </a:spcAft>
+            </a:pPr>
+            <a:r>
+              <a:rPr sz="1600" b="0" lang="ko-KR">
+                <a:solidFill>
+                  <a:srgbClr val="20262E"/>
+                </a:solidFill>
+                <a:latin typeface="Pretendard"/>
+                <a:ea typeface="Pretendard"/>
+                <a:cs typeface="Pretendard"/>
+              </a:rPr>
+              <a:t>4</a:t>
+            </a:r>
+          </a:p>
+        </p:txBody>
+      </p:sp>
+      <p:sp>
+        <p:nvSpPr>
+          <p:cNvPr id="58" name="TextBox 57"/>
+          <p:cNvSpPr txBox="1"/>
+          <p:nvPr/>
+        </p:nvSpPr>
+        <p:spPr>
+          <a:xfrm>
+            <a:off x="6940296" y="4535423"/>
+            <a:ext cx="2240279" cy="320040"/>
+          </a:xfrm>
+          <a:prstGeom prst="rect">
+            <a:avLst/>
+          </a:prstGeom>
+          <a:noFill/>
+        </p:spPr>
+        <p:txBody>
+          <a:bodyPr wrap="none" anchor="t" lIns="0" rIns="0" tIns="0" bIns="0">
+            <a:noAutofit/>
+          </a:bodyPr>
+          <a:lstStyle/>
+          <a:p>
+            <a:pPr algn="l">
+              <a:lnSpc>
+                <a:spcPct val="114000"/>
+              </a:lnSpc>
+              <a:spcBef>
+                <a:spcPts val="0"/>
+              </a:spcBef>
+              <a:spcAft>
+                <a:spcPts val="0"/>
+              </a:spcAft>
+            </a:pPr>
+            <a:r>
+              <a:rPr sz="1600" b="0" lang="ko-KR">
+                <a:solidFill>
+                  <a:srgbClr val="20262E"/>
+                </a:solidFill>
+                <a:latin typeface="Pretendard"/>
+                <a:ea typeface="Pretendard"/>
+                <a:cs typeface="Pretendard"/>
+              </a:rPr>
+              <a:t>XSS</a:t>
+            </a:r>
+          </a:p>
+        </p:txBody>
+      </p:sp>
+      <p:sp>
+        <p:nvSpPr>
+          <p:cNvPr id="59" name="TextBox 58"/>
+          <p:cNvSpPr txBox="1"/>
+          <p:nvPr/>
+        </p:nvSpPr>
+        <p:spPr>
+          <a:xfrm>
+            <a:off x="9326880" y="4535423"/>
+            <a:ext cx="768096" cy="320040"/>
+          </a:xfrm>
+          <a:prstGeom prst="rect">
+            <a:avLst/>
+          </a:prstGeom>
+          <a:noFill/>
+        </p:spPr>
+        <p:txBody>
+          <a:bodyPr wrap="none" anchor="t" lIns="0" rIns="0" tIns="0" bIns="0">
+            <a:noAutofit/>
+          </a:bodyPr>
+          <a:lstStyle/>
+          <a:p>
+            <a:pPr algn="r">
+              <a:lnSpc>
+                <a:spcPct val="114000"/>
+              </a:lnSpc>
+              <a:spcBef>
+                <a:spcPts val="0"/>
+              </a:spcBef>
+              <a:spcAft>
+                <a:spcPts val="0"/>
+              </a:spcAft>
+            </a:pPr>
+            <a:r>
+              <a:rPr sz="1600" b="0" lang="ko-KR">
+                <a:solidFill>
+                  <a:srgbClr val="20262E"/>
+                </a:solidFill>
+                <a:latin typeface="Pretendard"/>
+                <a:ea typeface="Pretendard"/>
+                <a:cs typeface="Pretendard"/>
+              </a:rPr>
+              <a:t>n</a:t>
+            </a:r>
+          </a:p>
+        </p:txBody>
+      </p:sp>
+      <p:sp>
+        <p:nvSpPr>
+          <p:cNvPr id="60" name="TextBox 59"/>
+          <p:cNvSpPr txBox="1"/>
+          <p:nvPr/>
+        </p:nvSpPr>
+        <p:spPr>
+          <a:xfrm>
+            <a:off x="10241280" y="4535423"/>
+            <a:ext cx="1316736" cy="320040"/>
+          </a:xfrm>
+          <a:prstGeom prst="rect">
+            <a:avLst/>
+          </a:prstGeom>
+          <a:noFill/>
+        </p:spPr>
+        <p:txBody>
+          <a:bodyPr wrap="none" anchor="t" lIns="0" rIns="0" tIns="0" bIns="0">
+            <a:noAutofit/>
+          </a:bodyPr>
+          <a:lstStyle/>
+          <a:p>
+            <a:pPr algn="r">
+              <a:lnSpc>
+                <a:spcPct val="114000"/>
+              </a:lnSpc>
+              <a:spcBef>
+                <a:spcPts val="0"/>
+              </a:spcBef>
+              <a:spcAft>
+                <a:spcPts val="0"/>
+              </a:spcAft>
+            </a:pPr>
+            <a:r>
+              <a:rPr sz="1600" b="0" lang="ko-KR">
+                <a:solidFill>
+                  <a:srgbClr val="20262E"/>
+                </a:solidFill>
+                <a:latin typeface="Pretendard"/>
+                <a:ea typeface="Pretendard"/>
+                <a:cs typeface="Pretendard"/>
+              </a:rPr>
+              <a:t>1,000 + 4n</a:t>
+            </a:r>
+          </a:p>
+        </p:txBody>
+      </p:sp>
+      <p:sp>
+        <p:nvSpPr>
+          <p:cNvPr id="61" name="Rectangle 60"/>
+          <p:cNvSpPr/>
+          <p:nvPr/>
+        </p:nvSpPr>
+        <p:spPr>
+          <a:xfrm>
+            <a:off x="6291072" y="4892040"/>
+            <a:ext cx="5340096" cy="621792"/>
+          </a:xfrm>
+          <a:prstGeom prst="rect">
+            <a:avLst/>
+          </a:prstGeom>
+          <a:solidFill>
+            <a:srgbClr val="F1F5F9"/>
+          </a:solidFill>
+          <a:ln>
+            <a:noFill/>
+          </a:ln>
+        </p:spPr>
+        <p:style>
+          <a:lnRef idx="1">
+            <a:schemeClr val="accent1"/>
+          </a:lnRef>
+          <a:fillRef idx="3">
+            <a:schemeClr val="accent1"/>
+          </a:fillRef>
+          <a:effectRef idx="2">
+            <a:schemeClr val="accent1"/>
+          </a:effectRef>
+          <a:fontRef idx="minor">
+            <a:schemeClr val="lt1"/>
+          </a:fontRef>
+        </p:style>
+        <p:txBody>
+          <a:bodyPr rtlCol="0" anchor="ctr"/>
+          <a:lstStyle/>
+          <a:p>
+            <a:pPr algn="ctr"/>
+          </a:p>
+        </p:txBody>
+      </p:sp>
+      <p:sp>
+        <p:nvSpPr>
+          <p:cNvPr id="62" name="TextBox 61"/>
+          <p:cNvSpPr txBox="1"/>
+          <p:nvPr/>
+        </p:nvSpPr>
+        <p:spPr>
+          <a:xfrm>
+            <a:off x="6364224" y="4983479"/>
+            <a:ext cx="429768" cy="493776"/>
+          </a:xfrm>
+          <a:prstGeom prst="rect">
+            <a:avLst/>
+          </a:prstGeom>
+          <a:noFill/>
+        </p:spPr>
+        <p:txBody>
+          <a:bodyPr wrap="none" anchor="t" lIns="0" rIns="0" tIns="0" bIns="0">
+            <a:noAutofit/>
+          </a:bodyPr>
+          <a:lstStyle/>
+          <a:p>
+            <a:pPr algn="l">
+              <a:lnSpc>
+                <a:spcPct val="114000"/>
+              </a:lnSpc>
+              <a:spcBef>
+                <a:spcPts val="0"/>
+              </a:spcBef>
+              <a:spcAft>
+                <a:spcPts val="0"/>
+              </a:spcAft>
+            </a:pPr>
+            <a:r>
+              <a:rPr sz="1600" b="0" lang="ko-KR">
+                <a:solidFill>
+                  <a:srgbClr val="20262E"/>
+                </a:solidFill>
+                <a:latin typeface="Pretendard"/>
+                <a:ea typeface="Pretendard"/>
+                <a:cs typeface="Pretendard"/>
+              </a:rPr>
+              <a:t>5</a:t>
+            </a:r>
+          </a:p>
+        </p:txBody>
+      </p:sp>
+      <p:sp>
+        <p:nvSpPr>
+          <p:cNvPr id="63" name="TextBox 62"/>
+          <p:cNvSpPr txBox="1"/>
+          <p:nvPr/>
+        </p:nvSpPr>
+        <p:spPr>
+          <a:xfrm>
+            <a:off x="6940296" y="4983479"/>
+            <a:ext cx="2240279" cy="493776"/>
+          </a:xfrm>
+          <a:prstGeom prst="rect">
+            <a:avLst/>
+          </a:prstGeom>
+          <a:noFill/>
+        </p:spPr>
+        <p:txBody>
+          <a:bodyPr wrap="none" anchor="t" lIns="0" rIns="0" tIns="0" bIns="0">
+            <a:noAutofit/>
+          </a:bodyPr>
+          <a:lstStyle/>
+          <a:p>
+            <a:pPr algn="l">
+              <a:lnSpc>
+                <a:spcPct val="114000"/>
+              </a:lnSpc>
+              <a:spcBef>
+                <a:spcPts val="0"/>
+              </a:spcBef>
+              <a:spcAft>
+                <a:spcPts val="0"/>
+              </a:spcAft>
+            </a:pPr>
+            <a:r>
+              <a:rPr sz="1600" b="0" lang="ko-KR">
+                <a:solidFill>
+                  <a:srgbClr val="20262E"/>
+                </a:solidFill>
+                <a:latin typeface="Pretendard"/>
+                <a:ea typeface="Pretendard"/>
+                <a:cs typeface="Pretendard"/>
+              </a:rPr>
+              <a:t>Backdoor</a:t>
+            </a:r>
+          </a:p>
+          <a:p>
+            <a:pPr algn="l">
+              <a:lnSpc>
+                <a:spcPct val="114000"/>
+              </a:lnSpc>
+              <a:spcBef>
+                <a:spcPts val="0"/>
+              </a:spcBef>
+              <a:spcAft>
+                <a:spcPts val="0"/>
+              </a:spcAft>
+            </a:pPr>
+            <a:r>
+              <a:rPr sz="1600" b="0" lang="ko-KR">
+                <a:solidFill>
+                  <a:srgbClr val="20262E"/>
+                </a:solidFill>
+                <a:latin typeface="Pretendard"/>
+                <a:ea typeface="Pretendard"/>
+                <a:cs typeface="Pretendard"/>
+              </a:rPr>
+              <a:t>Ransomware</a:t>
+            </a:r>
+          </a:p>
+        </p:txBody>
+      </p:sp>
+      <p:sp>
+        <p:nvSpPr>
+          <p:cNvPr id="64" name="TextBox 63"/>
+          <p:cNvSpPr txBox="1"/>
+          <p:nvPr/>
+        </p:nvSpPr>
+        <p:spPr>
+          <a:xfrm>
+            <a:off x="9326880" y="4983479"/>
+            <a:ext cx="768096" cy="493776"/>
+          </a:xfrm>
+          <a:prstGeom prst="rect">
+            <a:avLst/>
+          </a:prstGeom>
+          <a:noFill/>
+        </p:spPr>
+        <p:txBody>
+          <a:bodyPr wrap="none" anchor="t" lIns="0" rIns="0" tIns="0" bIns="0">
+            <a:noAutofit/>
+          </a:bodyPr>
+          <a:lstStyle/>
+          <a:p>
+            <a:pPr algn="r">
+              <a:lnSpc>
+                <a:spcPct val="114000"/>
+              </a:lnSpc>
+              <a:spcBef>
+                <a:spcPts val="0"/>
+              </a:spcBef>
+              <a:spcAft>
+                <a:spcPts val="0"/>
+              </a:spcAft>
+            </a:pPr>
+            <a:r>
+              <a:rPr sz="1600" b="0" lang="ko-KR">
+                <a:solidFill>
+                  <a:srgbClr val="20262E"/>
+                </a:solidFill>
+                <a:latin typeface="Pretendard"/>
+                <a:ea typeface="Pretendard"/>
+                <a:cs typeface="Pretendard"/>
+              </a:rPr>
+              <a:t>n</a:t>
+            </a:r>
+          </a:p>
+          <a:p>
+            <a:pPr algn="r">
+              <a:lnSpc>
+                <a:spcPct val="114000"/>
+              </a:lnSpc>
+              <a:spcBef>
+                <a:spcPts val="0"/>
+              </a:spcBef>
+              <a:spcAft>
+                <a:spcPts val="0"/>
+              </a:spcAft>
+            </a:pPr>
+            <a:r>
+              <a:rPr sz="1600" b="0" lang="ko-KR">
+                <a:solidFill>
+                  <a:srgbClr val="20262E"/>
+                </a:solidFill>
+                <a:latin typeface="Pretendard"/>
+                <a:ea typeface="Pretendard"/>
+                <a:cs typeface="Pretendard"/>
+              </a:rPr>
+              <a:t>n</a:t>
+            </a:r>
+          </a:p>
+        </p:txBody>
+      </p:sp>
+      <p:sp>
+        <p:nvSpPr>
+          <p:cNvPr id="65" name="TextBox 64"/>
+          <p:cNvSpPr txBox="1"/>
+          <p:nvPr/>
+        </p:nvSpPr>
+        <p:spPr>
+          <a:xfrm>
+            <a:off x="10241280" y="4983479"/>
+            <a:ext cx="1316736" cy="493776"/>
+          </a:xfrm>
+          <a:prstGeom prst="rect">
+            <a:avLst/>
+          </a:prstGeom>
+          <a:noFill/>
+        </p:spPr>
+        <p:txBody>
+          <a:bodyPr wrap="none" anchor="t" lIns="0" rIns="0" tIns="0" bIns="0">
+            <a:noAutofit/>
+          </a:bodyPr>
+          <a:lstStyle/>
+          <a:p>
+            <a:pPr algn="r">
+              <a:lnSpc>
+                <a:spcPct val="114000"/>
+              </a:lnSpc>
+              <a:spcBef>
+                <a:spcPts val="0"/>
+              </a:spcBef>
+              <a:spcAft>
+                <a:spcPts val="0"/>
+              </a:spcAft>
+            </a:pPr>
+            <a:r>
+              <a:rPr sz="1600" b="0" lang="ko-KR">
+                <a:solidFill>
+                  <a:srgbClr val="20262E"/>
+                </a:solidFill>
+                <a:latin typeface="Pretendard"/>
+                <a:ea typeface="Pretendard"/>
+                <a:cs typeface="Pretendard"/>
+              </a:rPr>
+              <a:t>1,000 + 6n</a:t>
+            </a:r>
+          </a:p>
+        </p:txBody>
+      </p:sp>
+      <p:sp>
+        <p:nvSpPr>
+          <p:cNvPr id="66" name="Rectangle 65"/>
+          <p:cNvSpPr/>
+          <p:nvPr/>
+        </p:nvSpPr>
+        <p:spPr>
+          <a:xfrm>
+            <a:off x="6291072" y="5513831"/>
+            <a:ext cx="5340096" cy="448056"/>
+          </a:xfrm>
+          <a:prstGeom prst="rect">
+            <a:avLst/>
+          </a:prstGeom>
+          <a:solidFill>
+            <a:srgbClr val="FFFFFF"/>
+          </a:solidFill>
+          <a:ln>
+            <a:noFill/>
+          </a:ln>
+        </p:spPr>
+        <p:style>
+          <a:lnRef idx="1">
+            <a:schemeClr val="accent1"/>
+          </a:lnRef>
+          <a:fillRef idx="3">
+            <a:schemeClr val="accent1"/>
+          </a:fillRef>
+          <a:effectRef idx="2">
+            <a:schemeClr val="accent1"/>
+          </a:effectRef>
+          <a:fontRef idx="minor">
+            <a:schemeClr val="lt1"/>
+          </a:fontRef>
+        </p:style>
+        <p:txBody>
+          <a:bodyPr rtlCol="0" anchor="ctr"/>
+          <a:lstStyle/>
+          <a:p>
+            <a:pPr algn="ctr"/>
+          </a:p>
+        </p:txBody>
+      </p:sp>
+      <p:sp>
+        <p:nvSpPr>
+          <p:cNvPr id="67" name="TextBox 66"/>
+          <p:cNvSpPr txBox="1"/>
+          <p:nvPr/>
+        </p:nvSpPr>
+        <p:spPr>
+          <a:xfrm>
+            <a:off x="6364224" y="5605271"/>
+            <a:ext cx="429768" cy="320040"/>
+          </a:xfrm>
+          <a:prstGeom prst="rect">
+            <a:avLst/>
+          </a:prstGeom>
+          <a:noFill/>
+        </p:spPr>
+        <p:txBody>
+          <a:bodyPr wrap="none" anchor="t" lIns="0" rIns="0" tIns="0" bIns="0">
+            <a:noAutofit/>
+          </a:bodyPr>
+          <a:lstStyle/>
+          <a:p>
+            <a:pPr algn="l">
+              <a:lnSpc>
+                <a:spcPct val="114000"/>
+              </a:lnSpc>
+              <a:spcBef>
+                <a:spcPts val="0"/>
+              </a:spcBef>
+              <a:spcAft>
+                <a:spcPts val="0"/>
+              </a:spcAft>
+            </a:pPr>
+            <a:r>
+              <a:rPr sz="1600" b="0" lang="ko-KR">
+                <a:solidFill>
+                  <a:srgbClr val="20262E"/>
+                </a:solidFill>
+                <a:latin typeface="Pretendard"/>
+                <a:ea typeface="Pretendard"/>
+                <a:cs typeface="Pretendard"/>
+              </a:rPr>
+              <a:t>6</a:t>
+            </a:r>
+          </a:p>
+        </p:txBody>
+      </p:sp>
+      <p:sp>
+        <p:nvSpPr>
+          <p:cNvPr id="68" name="TextBox 67"/>
+          <p:cNvSpPr txBox="1"/>
+          <p:nvPr/>
+        </p:nvSpPr>
+        <p:spPr>
+          <a:xfrm>
+            <a:off x="6940296" y="5605271"/>
+            <a:ext cx="2240279" cy="320040"/>
+          </a:xfrm>
+          <a:prstGeom prst="rect">
+            <a:avLst/>
+          </a:prstGeom>
+          <a:noFill/>
+        </p:spPr>
+        <p:txBody>
+          <a:bodyPr wrap="none" anchor="t" lIns="0" rIns="0" tIns="0" bIns="0">
+            <a:noAutofit/>
+          </a:bodyPr>
+          <a:lstStyle/>
+          <a:p>
+            <a:pPr algn="l">
+              <a:lnSpc>
+                <a:spcPct val="114000"/>
+              </a:lnSpc>
+              <a:spcBef>
+                <a:spcPts val="0"/>
+              </a:spcBef>
+              <a:spcAft>
+                <a:spcPts val="0"/>
+              </a:spcAft>
+            </a:pPr>
+            <a:r>
+              <a:rPr sz="1600" b="0" lang="ko-KR">
+                <a:solidFill>
+                  <a:srgbClr val="20262E"/>
+                </a:solidFill>
+                <a:latin typeface="Pretendard"/>
+                <a:ea typeface="Pretendard"/>
+                <a:cs typeface="Pretendard"/>
+              </a:rPr>
+              <a:t>MitM</a:t>
+            </a:r>
+          </a:p>
+        </p:txBody>
+      </p:sp>
+      <p:sp>
+        <p:nvSpPr>
+          <p:cNvPr id="69" name="TextBox 68"/>
+          <p:cNvSpPr txBox="1"/>
+          <p:nvPr/>
+        </p:nvSpPr>
+        <p:spPr>
+          <a:xfrm>
+            <a:off x="9326880" y="5605271"/>
+            <a:ext cx="768096" cy="320040"/>
+          </a:xfrm>
+          <a:prstGeom prst="rect">
+            <a:avLst/>
+          </a:prstGeom>
+          <a:noFill/>
+        </p:spPr>
+        <p:txBody>
+          <a:bodyPr wrap="none" anchor="t" lIns="0" rIns="0" tIns="0" bIns="0">
+            <a:noAutofit/>
+          </a:bodyPr>
+          <a:lstStyle/>
+          <a:p>
+            <a:pPr algn="r">
+              <a:lnSpc>
+                <a:spcPct val="114000"/>
+              </a:lnSpc>
+              <a:spcBef>
+                <a:spcPts val="0"/>
+              </a:spcBef>
+              <a:spcAft>
+                <a:spcPts val="0"/>
+              </a:spcAft>
+            </a:pPr>
+            <a:r>
+              <a:rPr sz="1600" b="0" lang="ko-KR">
+                <a:solidFill>
+                  <a:srgbClr val="20262E"/>
+                </a:solidFill>
+                <a:latin typeface="Pretendard"/>
+                <a:ea typeface="Pretendard"/>
+                <a:cs typeface="Pretendard"/>
+              </a:rPr>
+              <a:t>n</a:t>
+            </a:r>
+          </a:p>
+        </p:txBody>
+      </p:sp>
+      <p:sp>
+        <p:nvSpPr>
+          <p:cNvPr id="70" name="TextBox 69"/>
+          <p:cNvSpPr txBox="1"/>
+          <p:nvPr/>
+        </p:nvSpPr>
+        <p:spPr>
+          <a:xfrm>
+            <a:off x="10241280" y="5605271"/>
+            <a:ext cx="1316736" cy="320040"/>
+          </a:xfrm>
+          <a:prstGeom prst="rect">
+            <a:avLst/>
+          </a:prstGeom>
+          <a:noFill/>
+        </p:spPr>
+        <p:txBody>
+          <a:bodyPr wrap="none" anchor="t" lIns="0" rIns="0" tIns="0" bIns="0">
+            <a:noAutofit/>
+          </a:bodyPr>
+          <a:lstStyle/>
+          <a:p>
+            <a:pPr algn="r">
+              <a:lnSpc>
+                <a:spcPct val="114000"/>
+              </a:lnSpc>
+              <a:spcBef>
+                <a:spcPts val="0"/>
+              </a:spcBef>
+              <a:spcAft>
+                <a:spcPts val="0"/>
+              </a:spcAft>
+            </a:pPr>
+            <a:r>
+              <a:rPr sz="1600" b="0" lang="ko-KR">
+                <a:solidFill>
+                  <a:srgbClr val="20262E"/>
+                </a:solidFill>
+                <a:latin typeface="Pretendard"/>
+                <a:ea typeface="Pretendard"/>
+                <a:cs typeface="Pretendard"/>
+              </a:rPr>
+              <a:t>1,000 + 7n</a:t>
+            </a:r>
+          </a:p>
+        </p:txBody>
+      </p:sp>
+      <p:sp>
+        <p:nvSpPr>
+          <p:cNvPr id="71" name="TextBox 70"/>
+          <p:cNvSpPr txBox="1"/>
+          <p:nvPr/>
+        </p:nvSpPr>
+        <p:spPr>
+          <a:xfrm>
+            <a:off x="594360" y="6053328"/>
+            <a:ext cx="10972800" cy="256032"/>
+          </a:xfrm>
+          <a:prstGeom prst="rect">
+            <a:avLst/>
+          </a:prstGeom>
+          <a:noFill/>
+        </p:spPr>
+        <p:txBody>
+          <a:bodyPr wrap="none" anchor="t" lIns="0" rIns="0" tIns="0" bIns="0">
+            <a:noAutofit/>
+          </a:bodyPr>
+          <a:lstStyle/>
+          <a:p>
+            <a:pPr algn="l">
+              <a:lnSpc>
+                <a:spcPct val="114000"/>
+              </a:lnSpc>
+              <a:spcBef>
+                <a:spcPts val="0"/>
+              </a:spcBef>
+              <a:spcAft>
+                <a:spcPts val="0"/>
+              </a:spcAft>
+            </a:pPr>
+            <a:r>
+              <a:rPr sz="1600" b="0" lang="ko-KR">
+                <a:solidFill>
+                  <a:srgbClr val="617080"/>
+                </a:solidFill>
+                <a:latin typeface="Pretendard"/>
+                <a:ea typeface="Pretendard"/>
+                <a:cs typeface="Pretendard"/>
+              </a:rPr>
+              <a:t>n = 100 예시 · CIC 총 1,400개 / ToN 총 1,700개 · 하루 공격량이 아닌 확보 라벨 수</a:t>
+            </a:r>
+          </a:p>
+        </p:txBody>
+      </p:sp>
+      <p:sp>
+        <p:nvSpPr>
+          <p:cNvPr id="72" name="Rectangle 71"/>
+          <p:cNvSpPr/>
+          <p:nvPr/>
+        </p:nvSpPr>
+        <p:spPr>
+          <a:xfrm>
+            <a:off x="0" y="6446520"/>
+            <a:ext cx="12191999" cy="411480"/>
+          </a:xfrm>
+          <a:prstGeom prst="rect">
+            <a:avLst/>
+          </a:prstGeom>
+          <a:solidFill>
+            <a:srgbClr val="00306C"/>
+          </a:solidFill>
+          <a:ln>
+            <a:noFill/>
+          </a:ln>
+        </p:spPr>
+        <p:style>
+          <a:lnRef idx="1">
+            <a:schemeClr val="accent1"/>
+          </a:lnRef>
+          <a:fillRef idx="3">
+            <a:schemeClr val="accent1"/>
+          </a:fillRef>
+          <a:effectRef idx="2">
+            <a:schemeClr val="accent1"/>
+          </a:effectRef>
+          <a:fontRef idx="minor">
+            <a:schemeClr val="lt1"/>
+          </a:fontRef>
+        </p:style>
+        <p:txBody>
+          <a:bodyPr rtlCol="0" anchor="ctr"/>
+          <a:lstStyle/>
+          <a:p>
+            <a:pPr algn="ctr"/>
+          </a:p>
+        </p:txBody>
+      </p:sp>
+      <p:sp>
+        <p:nvSpPr>
+          <p:cNvPr id="73" name="TextBox 72"/>
+          <p:cNvSpPr txBox="1"/>
+          <p:nvPr/>
+        </p:nvSpPr>
+        <p:spPr>
+          <a:xfrm>
+            <a:off x="566928" y="6528816"/>
+            <a:ext cx="9738360" cy="214853"/>
+          </a:xfrm>
+          <a:prstGeom prst="rect">
+            <a:avLst/>
+          </a:prstGeom>
+          <a:noFill/>
+        </p:spPr>
+        <p:txBody>
+          <a:bodyPr wrap="none" anchor="t" lIns="0" rIns="0" tIns="0" bIns="0">
+            <a:noAutofit/>
+          </a:bodyPr>
+          <a:lstStyle/>
+          <a:p>
+            <a:pPr algn="l">
+              <a:lnSpc>
+                <a:spcPct val="114000"/>
+              </a:lnSpc>
+              <a:spcBef>
+                <a:spcPts val="0"/>
+              </a:spcBef>
+              <a:spcAft>
+                <a:spcPts val="0"/>
+              </a:spcAft>
+            </a:pPr>
+            <a:r>
+              <a:rPr sz="1400" b="0" lang="ko-KR">
+                <a:solidFill>
+                  <a:srgbClr val="FFFFFF"/>
+                </a:solidFill>
+                <a:latin typeface="Pretendard"/>
+                <a:ea typeface="Pretendard"/>
+                <a:cs typeface="Pretendard"/>
+              </a:rPr>
+              <a:t>기존 결과 n = 10·20·50·100·200·400 · 100개는 최적값이 아닌 설명용 조건</a:t>
+            </a:r>
+          </a:p>
+        </p:txBody>
+      </p:sp>
+      <p:sp>
+        <p:nvSpPr>
+          <p:cNvPr id="74" name="TextBox 73"/>
+          <p:cNvSpPr txBox="1"/>
+          <p:nvPr/>
+        </p:nvSpPr>
+        <p:spPr>
+          <a:xfrm>
+            <a:off x="10469880" y="6537960"/>
+            <a:ext cx="1143000" cy="201168"/>
+          </a:xfrm>
+          <a:prstGeom prst="rect">
+            <a:avLst/>
+          </a:prstGeom>
+          <a:noFill/>
+        </p:spPr>
+        <p:txBody>
+          <a:bodyPr wrap="none" anchor="t" lIns="0" rIns="0" tIns="0" bIns="0">
+            <a:noAutofit/>
+          </a:bodyPr>
+          <a:lstStyle/>
+          <a:p>
+            <a:pPr algn="r">
+              <a:lnSpc>
+                <a:spcPct val="114000"/>
+              </a:lnSpc>
+              <a:spcBef>
+                <a:spcPts val="0"/>
+              </a:spcBef>
+              <a:spcAft>
+                <a:spcPts val="0"/>
+              </a:spcAft>
+            </a:pPr>
+            <a:r>
+              <a:rPr sz="1200" b="0" lang="ko-KR">
+                <a:solidFill>
+                  <a:srgbClr val="FFFFFF"/>
+                </a:solidFill>
+                <a:latin typeface="Pretendard"/>
+                <a:ea typeface="Pretendard"/>
+                <a:cs typeface="Pretendard"/>
+              </a:rPr>
+              <a:t>03   6</a:t>
             </a:r>
           </a:p>
         </p:txBody>
